--- a/slides/Khmer_Handwritten_OCR_Presentation.pptx
+++ b/slides/Khmer_Handwritten_OCR_Presentation.pptx
@@ -515,7 +515,7 @@
           <a:lstStyle/>
           <a:p>
             <a:r>
-              <a:t>Good morning, respected lecturer Mr. Soklong HIM. Today I present my final project: Khmer Handwritten Line Recognition: A Comparison of Three CTC-Based Deep Learning Approaches. In this project, I engineered and evaluated three distinct deep learning architectures under strict academic benchmarking: an unseen-writer split, HarfBuzz synthetic pre-training, and word-level accuracy scoring.</a:t>
+              <a:t>Good morning, respected lecturer Mr. Soklong HIM. Today I present my final project: Khmer Handwritten Line Recognition. We benchmarked three distinct deep learning architectures on strictly held-out unseen writers using a two-stage curriculum strategy.</a:t>
             </a:r>
           </a:p>
         </p:txBody>
@@ -585,7 +585,7 @@
           <a:lstStyle/>
           <a:p>
             <a:r>
-              <a:t>Looking at the overlaid validation learning curves, we observe the training dynamics. A1 (blue) achieved the lowest and most stable validation trajectory, dropping smoothly from 46% down to 10.9%. A3 Transformer (green) converged reliably but plateaued higher. Notice the complete absence of validation spikes, proving that EMA decay and cosine warmup stabilized training.</a:t>
+              <a:t>Looking at the validation curves on the left, A1 (blue) descended smoothly to the lowest error floor. The comparison bar chart on the right confirms A1's superiority in both CER and Word-Level Accuracy. EMA decay and cosine warmup completely stabilized training across all models.</a:t>
             </a:r>
           </a:p>
         </p:txBody>
@@ -655,7 +655,7 @@
           <a:lstStyle/>
           <a:p>
             <a:r>
-              <a:t>Qualitative error analysis revealed two primary failure modes. First, faint subscript coengs. When a writer scribbles lightly, the downsampled CNN sometimes misses the stroke. Second, visual twin characters like ព and យ where cursive handwriting collapses loops. However, on clear handwriting, A1 transcribes entire 58-character lines with 100% precision.</a:t>
+              <a:t>Qualitative error analysis revealed two primary failure modes: faint subscript coengs and visual twin characters. However, on well-written handwriting, the model achieves 100% precision across complete sentences.</a:t>
             </a:r>
           </a:p>
         </p:txBody>
@@ -725,7 +725,7 @@
           <a:lstStyle/>
           <a:p>
             <a:r>
-              <a:t>In addition to deep learning modeling, this project delivered clean software engineering artifacts. A modular PyTorch codebase, a sheet cropping pipeline with perspective deskewing, and a 100% passing test suite. Our live demo CLI predicts unseen test lines in real time.</a:t>
+              <a:t>In addition to deep learning models, we delivered production software engineering artifacts: a modular codebase, 30 passing unit tests, an automated scanning pipeline, and a live prediction CLI.</a:t>
             </a:r>
           </a:p>
         </p:txBody>
@@ -795,7 +795,7 @@
           <a:lstStyle/>
           <a:p>
             <a:r>
-              <a:t>To conclude: our comparative study demonstrated that Baseline CRNN with VGG and BiLSTM provides the most accurate and sample-efficient architecture for Khmer handwritten line recognition, reaching 80% character accuracy. Synthetic pre-training was essential to make real fine-tuning viable. Thank you very much, Mr. Soklong. I am now ready for your questions!</a:t>
+              <a:t>To conclude: Baseline CRNN with VGG and BiLSTM provides the most accurate and sample-efficient architecture for Khmer handwritten line recognition. Thank you very much, Mr. Soklong HIM. I am now ready for your questions!</a:t>
             </a:r>
           </a:p>
         </p:txBody>
@@ -935,7 +935,7 @@
           <a:lstStyle/>
           <a:p>
             <a:r>
-              <a:t>Khmer handwriting presents three unique challenges. First, vertical stacking of subscript Coeng consonants. Second, Khmer words flow without spaces, making naive bounding-box slicing impossible. Third, high inter-writer variability and visual twins like ព and យ. Therefore, an end-to-end sequence model using CTC is mathematically required.</a:t>
+              <a:t>As seen in the anatomy diagram on the left, Khmer glyphs stack across three vertical tiers: upper vowels, base consonants, and subscript Coengs. Because Khmer text has no spaces between words, traditional character slicing fails completely. An end-to-end CTC sequence model is essential.</a:t>
             </a:r>
           </a:p>
         </p:txBody>
@@ -1005,7 +1005,7 @@
           <a:lstStyle/>
           <a:p>
             <a:r>
-              <a:t>Here is our complete pipeline. We accept raw line crops, normalize them to height 48 with aspect ratio preservation, and feed them to a CNN feature extractor. The sequence encoder processes the temporal frames, projected to 87 classes. CTC loss aligns the sequence without manual bounding boxes, followed by an orthographic rule cleaner.</a:t>
+              <a:t>Here is the complete recognition pipeline. Images are normalized to height 48 while preserving natural stroke aspect ratios. Asymmetric pooling in the CNN shrinks height to 1 while keeping horizontal resolution high. Sequence features pass to CTC loss for alignment, outputting clean NFC Unicode text.</a:t>
             </a:r>
           </a:p>
         </p:txBody>
@@ -1075,7 +1075,7 @@
           <a:lstStyle/>
           <a:p>
             <a:r>
-              <a:t>We enforced a strict writer-disjoint split. Writers W007 and W0011 were held out permanently. Random image splitting lets models memorize a writer's pen quirk; our protocol guarantees true out-of-sample evaluation. Our vocabulary covers 86 Unicode characters with mandatory round-trip verification.</a:t>
+              <a:t>To satisfy Mr. Soklong's rubric, we enforced a strict writer-disjoint partition. 177 lines for training, 50 for validation, and 50 held out exclusively for testing from writers W007 and W0011. Random image splitting causes artificial accuracy inflation; our split tests true handwriting generalization.</a:t>
             </a:r>
           </a:p>
         </p:txBody>
@@ -1145,7 +1145,7 @@
           <a:lstStyle/>
           <a:p>
             <a:r>
-              <a:t>Why two stages? Training from scratch on 177 real lines causes catastrophic overfitting: training loss drops to 0.14 while validation loss is stuck at 1.42. In Stage 1, we pre-trained all models on 10,000 HarfBuzz synthetic samples across 8 fonts, mastering the alphabet. In Stage 2, we fine-tuned on real handwriting with elastic distortions, anchor mixing, and cosine warmup.</a:t>
+              <a:t>Our two-stage training strategy was critical. Training from scratch on 177 lines caused catastrophic overfitting. In Stage 1, we pre-trained on 10,000 synthetic samples to master character glyphs. In Stage 2, we fine-tuned on real handwriting with elastic augmentations, 8x ink oversampling, and anchor mixing to prevent forgetting.</a:t>
             </a:r>
           </a:p>
         </p:txBody>
@@ -1215,7 +1215,7 @@
           <a:lstStyle/>
           <a:p>
             <a:r>
-              <a:t>Approach 1 is our baseline CRNN. It uses a 7-layer VGG CNN with asymmetric pooling, reducing height to 1 while downsampling width by only a factor of 4. This maintains rich temporal resolution for CTC frames. A 2-layer BiLSTM captures forward and backward context. It is compact, parameter-efficient at 8.49M params, and trained from scratch with synthetic initialization.</a:t>
+              <a:t>Approach 1 is our baseline CRNN. It uses 7 VGG convolution layers with asymmetric pooling to squash height to 1 while keeping width high. The 2-layer BiLSTM models sequential context. With 8.49M parameters, it achieved the best balance of sample efficiency and accuracy.</a:t>
             </a:r>
           </a:p>
         </p:txBody>
@@ -1285,7 +1285,7 @@
           <a:lstStyle/>
           <a:p>
             <a:r>
-              <a:t>In Approach 2, we evaluate transfer learning using an ImageNet pre-trained ResNet-18. We modified the early convolutional strides to retain horizontal resolution, and trained with a differential learning rate where the backbone learns at 25% of the head rate. The sequence model and CTC head were kept identical to A1 to isolate the feature extraction choice.</a:t>
+              <a:t>In Approach 2, we tested transfer learning with ResNet-18. We adapted horizontal strides and trained with differential learning rates. It achieved 74.22% character accuracy, but came third because ImageNet natural photo features had a domain shift compared to binary handwriting, and its 31M parameters were prone to overfitting.</a:t>
             </a:r>
           </a:p>
         </p:txBody>
@@ -1355,7 +1355,7 @@
           <a:lstStyle/>
           <a:p>
             <a:r>
-              <a:t>In Approach 3, we isolate the sequence encoder. We keep the CNN and CTC head identical to A1, but replace the BiLSTM with a 4-layer Transformer Encoder with 8 attention heads and sinusoidal positional encodings. This compares multi-head self-attention against recurrent inductive bias directly on identical data.</a:t>
+              <a:t>In Approach 3, we replaced the BiLSTM with a 4-layer Transformer Encoder with 8 attention heads. As illustrated on the left, self-attention computes an all-to-all attention matrix. While it captures global context, it lacks the localized recurrence inductive bias that BiLSTMs possess. On a small real dataset, BiLSTM was more sample efficient.</a:t>
             </a:r>
           </a:p>
         </p:txBody>
@@ -1425,7 +1425,7 @@
           <a:lstStyle/>
           <a:p>
             <a:r>
-              <a:t>Here are our empirical results on test writers W007 and W0011. Approach 1 (Baseline CRNN) won first place with 79.94% Character Accuracy and 25.85% Word-Level Accuracy, transcribing 10% of full lines perfectly. BiLSTM outperformed Transformer because sequential recurrence is the ideal inductive bias for handwriting. Transfer learning came third due to domain mismatch between ImageNet and binary pen strokes.</a:t>
+              <a:t>Here are our official benchmark results on test writers W007 and W0011. A1 Baseline CRNN achieved first place with 79.94% Character Accuracy, 25.85% Word-Level Accuracy, and 10% exact whole-line match. A3 Transformer placed second, and A2 ResNet-18 placed third. Our model accurately read the full unseen test sentence shown at the bottom.</a:t>
             </a:r>
           </a:p>
         </p:txBody>
@@ -4457,68 +4457,14 @@
       </p:pic>
       <p:sp>
         <p:nvSpPr>
-          <p:cNvPr id="3" name="Rounded Rectangle 2"/>
-          <p:cNvSpPr/>
-          <p:nvPr/>
-        </p:nvSpPr>
-        <p:spPr>
-          <a:xfrm>
-            <a:off x="731520" y="1188720"/>
-            <a:ext cx="2926080" cy="411480"/>
-          </a:xfrm>
-          <a:prstGeom prst="roundRect">
-            <a:avLst/>
-          </a:prstGeom>
-          <a:solidFill>
-            <a:srgbClr val="1D4ED8"/>
-          </a:solidFill>
-          <a:ln w="12700">
-            <a:solidFill>
-              <a:srgbClr val="38BDF8"/>
-            </a:solidFill>
-          </a:ln>
-        </p:spPr>
-        <p:style>
-          <a:lnRef idx="1">
-            <a:schemeClr val="accent1"/>
-          </a:lnRef>
-          <a:fillRef idx="3">
-            <a:schemeClr val="accent1"/>
-          </a:fillRef>
-          <a:effectRef idx="2">
-            <a:schemeClr val="accent1"/>
-          </a:effectRef>
-          <a:fontRef idx="minor">
-            <a:schemeClr val="lt1"/>
-          </a:fontRef>
-        </p:style>
-        <p:txBody>
-          <a:bodyPr rtlCol="0" anchor="ctr"/>
-          <a:lstStyle/>
-          <a:p>
-            <a:pPr algn="ctr">
-              <a:defRPr sz="1100" b="1">
-                <a:solidFill>
-                  <a:srgbClr val="FFFFFF"/>
-                </a:solidFill>
-              </a:defRPr>
-            </a:pPr>
-            <a:r>
-              <a:t>FINAL PROJECT • DEEP LEARNING</a:t>
-            </a:r>
-          </a:p>
-        </p:txBody>
-      </p:sp>
-      <p:sp>
-        <p:nvSpPr>
-          <p:cNvPr id="4" name="TextBox 3"/>
+          <p:cNvPr id="3" name="TextBox 2"/>
           <p:cNvSpPr txBox="1"/>
           <p:nvPr/>
         </p:nvSpPr>
         <p:spPr>
           <a:xfrm>
-            <a:off x="731520" y="1828800"/>
-            <a:ext cx="6217920" cy="2286000"/>
+            <a:off x="731520" y="1645920"/>
+            <a:ext cx="6583680" cy="2926080"/>
           </a:xfrm>
           <a:prstGeom prst="rect">
             <a:avLst/>
@@ -4531,8 +4477,20 @@
           </a:bodyPr>
           <a:lstStyle/>
           <a:p>
-            <a:r>
-              <a:rPr sz="4000" b="1">
+            <a:pPr>
+              <a:defRPr sz="1100" b="1">
+                <a:solidFill>
+                  <a:srgbClr val="38BDF8"/>
+                </a:solidFill>
+              </a:defRPr>
+            </a:pPr>
+            <a:r>
+              <a:t>FINAL YEAR PROJECT DEFENSE • DEEP LEARNING</a:t>
+            </a:r>
+          </a:p>
+          <a:p>
+            <a:r>
+              <a:rPr sz="4200" b="1">
                 <a:solidFill>
                   <a:srgbClr val="FFFFFF"/>
                 </a:solidFill>
@@ -4541,7 +4499,7 @@
 </a:t>
             </a:r>
             <a:r>
-              <a:rPr sz="4000" b="1">
+              <a:rPr sz="4200" b="1">
                 <a:solidFill>
                   <a:srgbClr val="38BDF8"/>
                 </a:solidFill>
@@ -4552,129 +4510,36 @@
           <a:p>
             <a:pPr>
               <a:spcBef>
-                <a:spcPts val="1200"/>
+                <a:spcPts val="800"/>
               </a:spcBef>
               <a:defRPr sz="1500">
                 <a:solidFill>
-                  <a:srgbClr val="CBD5E1"/>
-                </a:solidFill>
-              </a:defRPr>
-            </a:pPr>
-            <a:r>
-              <a:t>A Comparative Study of Three CTC-Based Deep Learning Approaches</a:t>
-            </a:r>
-          </a:p>
-        </p:txBody>
-      </p:sp>
-      <p:sp>
-        <p:nvSpPr>
-          <p:cNvPr id="5" name="Rectangle 4"/>
+                  <a:srgbClr val="E2E8F0"/>
+                </a:solidFill>
+              </a:defRPr>
+            </a:pPr>
+            <a:r>
+              <a:t>An Empirical Comparison of Three CTC-Based Deep Learning Approaches</a:t>
+            </a:r>
+          </a:p>
+        </p:txBody>
+      </p:sp>
+      <p:sp>
+        <p:nvSpPr>
+          <p:cNvPr id="4" name="Rounded Rectangle 3"/>
           <p:cNvSpPr/>
           <p:nvPr/>
         </p:nvSpPr>
         <p:spPr>
           <a:xfrm>
-            <a:off x="731520" y="4297680"/>
-            <a:ext cx="1645920" cy="54864"/>
-          </a:xfrm>
-          <a:prstGeom prst="rect">
+            <a:off x="731520" y="4663440"/>
+            <a:ext cx="6217920" cy="1554480"/>
+          </a:xfrm>
+          <a:prstGeom prst="roundRect">
             <a:avLst/>
           </a:prstGeom>
           <a:solidFill>
-            <a:srgbClr val="38BDF8"/>
-          </a:solidFill>
-          <a:ln>
-            <a:noFill/>
-          </a:ln>
-        </p:spPr>
-        <p:style>
-          <a:lnRef idx="1">
-            <a:schemeClr val="accent1"/>
-          </a:lnRef>
-          <a:fillRef idx="3">
-            <a:schemeClr val="accent1"/>
-          </a:fillRef>
-          <a:effectRef idx="2">
-            <a:schemeClr val="accent1"/>
-          </a:effectRef>
-          <a:fontRef idx="minor">
-            <a:schemeClr val="lt1"/>
-          </a:fontRef>
-        </p:style>
-        <p:txBody>
-          <a:bodyPr rtlCol="0" anchor="ctr"/>
-          <a:lstStyle/>
-          <a:p>
-            <a:pPr algn="ctr"/>
-          </a:p>
-        </p:txBody>
-      </p:sp>
-      <p:sp>
-        <p:nvSpPr>
-          <p:cNvPr id="6" name="TextBox 5"/>
-          <p:cNvSpPr txBox="1"/>
-          <p:nvPr/>
-        </p:nvSpPr>
-        <p:spPr>
-          <a:xfrm>
-            <a:off x="731520" y="4572000"/>
-            <a:ext cx="6217920" cy="1645920"/>
-          </a:xfrm>
-          <a:prstGeom prst="rect">
-            <a:avLst/>
-          </a:prstGeom>
-          <a:noFill/>
-        </p:spPr>
-        <p:txBody>
-          <a:bodyPr wrap="none">
-            <a:spAutoFit/>
-          </a:bodyPr>
-          <a:lstStyle/>
-          <a:p>
-            <a:pPr>
-              <a:defRPr sz="1800" b="1">
-                <a:solidFill>
-                  <a:srgbClr val="FFFFFF"/>
-                </a:solidFill>
-              </a:defRPr>
-            </a:pPr>
-            <a:r>
-              <a:t>Hong Than Brathna</a:t>
-            </a:r>
-          </a:p>
-          <a:p>
-            <a:pPr>
-              <a:spcBef>
-                <a:spcPts val="400"/>
-              </a:spcBef>
-              <a:defRPr sz="1300">
-                <a:solidFill>
-                  <a:srgbClr val="94A3B8"/>
-                </a:solidFill>
-              </a:defRPr>
-            </a:pPr>
-            <a:r>
-              <a:t>Software Engineering  |  Lecturer: Mr. Soklong HIM  |  2026</a:t>
-            </a:r>
-          </a:p>
-        </p:txBody>
-      </p:sp>
-      <p:sp>
-        <p:nvSpPr>
-          <p:cNvPr id="7" name="Rounded Rectangle 6"/>
-          <p:cNvSpPr/>
-          <p:nvPr/>
-        </p:nvSpPr>
-        <p:spPr>
-          <a:xfrm>
-            <a:off x="6858000" y="2286000"/>
-            <a:ext cx="1554480" cy="2377440"/>
-          </a:xfrm>
-          <a:prstGeom prst="roundRect">
-            <a:avLst/>
-          </a:prstGeom>
-          <a:solidFill>
-            <a:srgbClr val="0B1936"/>
+            <a:srgbClr val="0A1630"/>
           </a:solidFill>
           <a:ln w="19050">
             <a:solidFill>
@@ -4701,6 +4566,151 @@
           <a:lstStyle/>
           <a:p>
             <a:pPr algn="ctr"/>
+          </a:p>
+        </p:txBody>
+      </p:sp>
+      <p:sp>
+        <p:nvSpPr>
+          <p:cNvPr id="5" name="TextBox 4"/>
+          <p:cNvSpPr txBox="1"/>
+          <p:nvPr/>
+        </p:nvSpPr>
+        <p:spPr>
+          <a:xfrm>
+            <a:off x="914400" y="4754880"/>
+            <a:ext cx="5852160" cy="1371600"/>
+          </a:xfrm>
+          <a:prstGeom prst="rect">
+            <a:avLst/>
+          </a:prstGeom>
+          <a:noFill/>
+        </p:spPr>
+        <p:txBody>
+          <a:bodyPr wrap="none">
+            <a:spAutoFit/>
+          </a:bodyPr>
+          <a:lstStyle/>
+          <a:p>
+            <a:pPr>
+              <a:defRPr sz="1600" b="1">
+                <a:solidFill>
+                  <a:srgbClr val="FFFFFF"/>
+                </a:solidFill>
+              </a:defRPr>
+            </a:pPr>
+            <a:r>
+              <a:t>Hong Than Brathna  |  Software Engineering</a:t>
+            </a:r>
+          </a:p>
+          <a:p>
+            <a:pPr>
+              <a:spcBef>
+                <a:spcPts val="300"/>
+              </a:spcBef>
+              <a:defRPr sz="1300">
+                <a:solidFill>
+                  <a:srgbClr val="38BDF8"/>
+                </a:solidFill>
+              </a:defRPr>
+            </a:pPr>
+            <a:r>
+              <a:t>Advisor / Lecturer: Mr. Soklong HIM  •  2026</a:t>
+            </a:r>
+          </a:p>
+          <a:p>
+            <a:pPr>
+              <a:spcBef>
+                <a:spcPts val="300"/>
+              </a:spcBef>
+              <a:defRPr sz="1100">
+                <a:solidFill>
+                  <a:srgbClr val="94A3B8"/>
+                </a:solidFill>
+              </a:defRPr>
+            </a:pPr>
+            <a:r>
+              <a:t>Evaluation Protocol: Strict Writer-Disjoint Held-Out Benchmark (W007, W0011)</a:t>
+            </a:r>
+          </a:p>
+        </p:txBody>
+      </p:sp>
+      <p:sp>
+        <p:nvSpPr>
+          <p:cNvPr id="6" name="Rounded Rectangle 5"/>
+          <p:cNvSpPr/>
+          <p:nvPr/>
+        </p:nvSpPr>
+        <p:spPr>
+          <a:xfrm>
+            <a:off x="7589520" y="1645920"/>
+            <a:ext cx="3840480" cy="1417320"/>
+          </a:xfrm>
+          <a:prstGeom prst="roundRect">
+            <a:avLst/>
+          </a:prstGeom>
+          <a:solidFill>
+            <a:srgbClr val="0A1630"/>
+          </a:solidFill>
+          <a:ln w="19050">
+            <a:solidFill>
+              <a:srgbClr val="1E40AF"/>
+            </a:solidFill>
+          </a:ln>
+        </p:spPr>
+        <p:style>
+          <a:lnRef idx="1">
+            <a:schemeClr val="accent1"/>
+          </a:lnRef>
+          <a:fillRef idx="3">
+            <a:schemeClr val="accent1"/>
+          </a:fillRef>
+          <a:effectRef idx="2">
+            <a:schemeClr val="accent1"/>
+          </a:effectRef>
+          <a:fontRef idx="minor">
+            <a:schemeClr val="lt1"/>
+          </a:fontRef>
+        </p:style>
+        <p:txBody>
+          <a:bodyPr rtlCol="0" anchor="ctr"/>
+          <a:lstStyle/>
+          <a:p>
+            <a:pPr algn="ctr"/>
+          </a:p>
+        </p:txBody>
+      </p:sp>
+      <p:sp>
+        <p:nvSpPr>
+          <p:cNvPr id="7" name="TextBox 6"/>
+          <p:cNvSpPr txBox="1"/>
+          <p:nvPr/>
+        </p:nvSpPr>
+        <p:spPr>
+          <a:xfrm>
+            <a:off x="7772400" y="1755648"/>
+            <a:ext cx="3474720" cy="1188720"/>
+          </a:xfrm>
+          <a:prstGeom prst="rect">
+            <a:avLst/>
+          </a:prstGeom>
+          <a:noFill/>
+        </p:spPr>
+        <p:txBody>
+          <a:bodyPr wrap="none">
+            <a:spAutoFit/>
+          </a:bodyPr>
+          <a:lstStyle/>
+          <a:p>
+            <a:pPr>
+              <a:defRPr sz="1100" b="1">
+                <a:solidFill>
+                  <a:srgbClr val="38BDF8"/>
+                </a:solidFill>
+              </a:defRPr>
+            </a:pPr>
+            <a:r>
+              <a:t>1. Input Line</a:t>
+            </a:r>
           </a:p>
         </p:txBody>
       </p:sp>
@@ -4720,8 +4730,8 @@
         </p:blipFill>
         <p:spPr>
           <a:xfrm>
-            <a:off x="6949440" y="2743200"/>
-            <a:ext cx="1371600" cy="98156"/>
+            <a:off x="7772400" y="2084832"/>
+            <a:ext cx="3474720" cy="248662"/>
           </a:xfrm>
           <a:prstGeom prst="rect">
             <a:avLst/>
@@ -4730,94 +4740,20 @@
       </p:pic>
       <p:sp>
         <p:nvSpPr>
-          <p:cNvPr id="9" name="TextBox 8"/>
-          <p:cNvSpPr txBox="1"/>
-          <p:nvPr/>
-        </p:nvSpPr>
-        <p:spPr>
-          <a:xfrm>
-            <a:off x="6858000" y="3931920"/>
-            <a:ext cx="1554480" cy="640080"/>
-          </a:xfrm>
-          <a:prstGeom prst="rect">
-            <a:avLst/>
-          </a:prstGeom>
-          <a:noFill/>
-        </p:spPr>
-        <p:txBody>
-          <a:bodyPr wrap="square">
-            <a:spAutoFit/>
-          </a:bodyPr>
-          <a:lstStyle/>
-          <a:p>
-            <a:pPr algn="ctr">
-              <a:defRPr sz="1100" b="1">
-                <a:solidFill>
-                  <a:srgbClr val="CBD5E1"/>
-                </a:solidFill>
-              </a:defRPr>
-            </a:pPr>
-            <a:r>
-              <a:t>Handwritten</a:t>
-            </a:r>
-            <a:br/>
-            <a:r>
-              <a:t>Line Image</a:t>
-            </a:r>
-          </a:p>
-        </p:txBody>
-      </p:sp>
-      <p:sp>
-        <p:nvSpPr>
-          <p:cNvPr id="10" name="TextBox 9"/>
-          <p:cNvSpPr txBox="1"/>
-          <p:nvPr/>
-        </p:nvSpPr>
-        <p:spPr>
-          <a:xfrm>
-            <a:off x="8412480" y="3200400"/>
-            <a:ext cx="365760" cy="457200"/>
-          </a:xfrm>
-          <a:prstGeom prst="rect">
-            <a:avLst/>
-          </a:prstGeom>
-          <a:noFill/>
-        </p:spPr>
-        <p:txBody>
-          <a:bodyPr wrap="none">
-            <a:spAutoFit/>
-          </a:bodyPr>
-          <a:lstStyle/>
-          <a:p>
-            <a:pPr>
-              <a:defRPr sz="1800">
-                <a:solidFill>
-                  <a:srgbClr val="38BDF8"/>
-                </a:solidFill>
-              </a:defRPr>
-            </a:pPr>
-            <a:r>
-              <a:t>➔</a:t>
-            </a:r>
-          </a:p>
-        </p:txBody>
-      </p:sp>
-      <p:sp>
-        <p:nvSpPr>
-          <p:cNvPr id="11" name="Rounded Rectangle 10"/>
+          <p:cNvPr id="9" name="Rounded Rectangle 8"/>
           <p:cNvSpPr/>
           <p:nvPr/>
         </p:nvSpPr>
         <p:spPr>
           <a:xfrm>
-            <a:off x="8778240" y="2286000"/>
-            <a:ext cx="1554480" cy="2377440"/>
+            <a:off x="7589520" y="3246120"/>
+            <a:ext cx="3840480" cy="1417320"/>
           </a:xfrm>
           <a:prstGeom prst="roundRect">
             <a:avLst/>
           </a:prstGeom>
           <a:solidFill>
-            <a:srgbClr val="0B1936"/>
+            <a:srgbClr val="0A1630"/>
           </a:solidFill>
           <a:ln w="19050">
             <a:solidFill>
@@ -4849,14 +4785,14 @@
       </p:sp>
       <p:sp>
         <p:nvSpPr>
-          <p:cNvPr id="12" name="TextBox 11"/>
+          <p:cNvPr id="10" name="TextBox 9"/>
           <p:cNvSpPr txBox="1"/>
           <p:nvPr/>
         </p:nvSpPr>
         <p:spPr>
           <a:xfrm>
-            <a:off x="8778240" y="2743200"/>
-            <a:ext cx="1554480" cy="914400"/>
+            <a:off x="7772400" y="3355848"/>
+            <a:ext cx="3474720" cy="1188720"/>
           </a:xfrm>
           <a:prstGeom prst="rect">
             <a:avLst/>
@@ -4869,105 +4805,50 @@
           </a:bodyPr>
           <a:lstStyle/>
           <a:p>
-            <a:pPr algn="ctr">
-              <a:defRPr sz="2800"/>
-            </a:pPr>
-            <a:r>
-              <a:t>🧠 ⚙️</a:t>
-            </a:r>
-          </a:p>
-        </p:txBody>
-      </p:sp>
-      <p:sp>
-        <p:nvSpPr>
-          <p:cNvPr id="13" name="TextBox 12"/>
-          <p:cNvSpPr txBox="1"/>
-          <p:nvPr/>
-        </p:nvSpPr>
-        <p:spPr>
-          <a:xfrm>
-            <a:off x="8778240" y="3931920"/>
-            <a:ext cx="1554480" cy="640080"/>
-          </a:xfrm>
-          <a:prstGeom prst="rect">
-            <a:avLst/>
-          </a:prstGeom>
-          <a:noFill/>
-        </p:spPr>
-        <p:txBody>
-          <a:bodyPr wrap="square">
-            <a:spAutoFit/>
-          </a:bodyPr>
-          <a:lstStyle/>
-          <a:p>
-            <a:pPr algn="ctr">
+            <a:pPr>
               <a:defRPr sz="1100" b="1">
                 <a:solidFill>
-                  <a:srgbClr val="CBD5E1"/>
-                </a:solidFill>
-              </a:defRPr>
-            </a:pPr>
-            <a:r>
-              <a:t>Deep Learning</a:t>
-            </a:r>
-            <a:br/>
-            <a:r>
-              <a:t>OCR Model</a:t>
-            </a:r>
-          </a:p>
-        </p:txBody>
-      </p:sp>
-      <p:sp>
-        <p:nvSpPr>
-          <p:cNvPr id="14" name="TextBox 13"/>
-          <p:cNvSpPr txBox="1"/>
-          <p:nvPr/>
-        </p:nvSpPr>
-        <p:spPr>
-          <a:xfrm>
-            <a:off x="10332720" y="3200400"/>
-            <a:ext cx="365760" cy="457200"/>
-          </a:xfrm>
-          <a:prstGeom prst="rect">
-            <a:avLst/>
-          </a:prstGeom>
-          <a:noFill/>
-        </p:spPr>
-        <p:txBody>
-          <a:bodyPr wrap="none">
-            <a:spAutoFit/>
-          </a:bodyPr>
-          <a:lstStyle/>
+                  <a:srgbClr val="38BDF8"/>
+                </a:solidFill>
+              </a:defRPr>
+            </a:pPr>
+            <a:r>
+              <a:t>2. Deep Model</a:t>
+            </a:r>
+          </a:p>
           <a:p>
             <a:pPr>
-              <a:defRPr sz="1800">
-                <a:solidFill>
-                  <a:srgbClr val="38BDF8"/>
-                </a:solidFill>
-              </a:defRPr>
-            </a:pPr>
-            <a:r>
-              <a:t>➔</a:t>
-            </a:r>
-          </a:p>
-        </p:txBody>
-      </p:sp>
-      <p:sp>
-        <p:nvSpPr>
-          <p:cNvPr id="15" name="Rounded Rectangle 14"/>
+              <a:spcBef>
+                <a:spcPts val="800"/>
+              </a:spcBef>
+              <a:defRPr sz="1400" b="1">
+                <a:solidFill>
+                  <a:srgbClr val="FFFFFF"/>
+                </a:solidFill>
+              </a:defRPr>
+            </a:pPr>
+            <a:r>
+              <a:t>VGG / ResNet / Transformer</a:t>
+            </a:r>
+          </a:p>
+        </p:txBody>
+      </p:sp>
+      <p:sp>
+        <p:nvSpPr>
+          <p:cNvPr id="11" name="Rounded Rectangle 10"/>
           <p:cNvSpPr/>
           <p:nvPr/>
         </p:nvSpPr>
         <p:spPr>
           <a:xfrm>
-            <a:off x="10698480" y="2286000"/>
-            <a:ext cx="1280160" cy="2377440"/>
+            <a:off x="7589520" y="4846320"/>
+            <a:ext cx="3840480" cy="1417320"/>
           </a:xfrm>
           <a:prstGeom prst="roundRect">
             <a:avLst/>
           </a:prstGeom>
           <a:solidFill>
-            <a:srgbClr val="0B1936"/>
+            <a:srgbClr val="0A1630"/>
           </a:solidFill>
           <a:ln w="19050">
             <a:solidFill>
@@ -4999,14 +4880,14 @@
       </p:sp>
       <p:sp>
         <p:nvSpPr>
-          <p:cNvPr id="16" name="TextBox 15"/>
+          <p:cNvPr id="12" name="TextBox 11"/>
           <p:cNvSpPr txBox="1"/>
           <p:nvPr/>
         </p:nvSpPr>
         <p:spPr>
           <a:xfrm>
-            <a:off x="10698480" y="2743200"/>
-            <a:ext cx="1280160" cy="914400"/>
+            <a:off x="7772400" y="4956048"/>
+            <a:ext cx="3474720" cy="1188720"/>
           </a:xfrm>
           <a:prstGeom prst="rect">
             <a:avLst/>
@@ -5019,54 +4900,30 @@
           </a:bodyPr>
           <a:lstStyle/>
           <a:p>
-            <a:pPr algn="ctr">
-              <a:defRPr sz="3200" b="1">
+            <a:pPr>
+              <a:defRPr sz="1100" b="1">
                 <a:solidFill>
                   <a:srgbClr val="38BDF8"/>
                 </a:solidFill>
               </a:defRPr>
             </a:pPr>
             <a:r>
-              <a:t>ខ្មែរ</a:t>
-            </a:r>
-          </a:p>
-        </p:txBody>
-      </p:sp>
-      <p:sp>
-        <p:nvSpPr>
-          <p:cNvPr id="17" name="TextBox 16"/>
-          <p:cNvSpPr txBox="1"/>
-          <p:nvPr/>
-        </p:nvSpPr>
-        <p:spPr>
-          <a:xfrm>
-            <a:off x="10698480" y="3931920"/>
-            <a:ext cx="1280160" cy="640080"/>
-          </a:xfrm>
-          <a:prstGeom prst="rect">
-            <a:avLst/>
-          </a:prstGeom>
-          <a:noFill/>
-        </p:spPr>
-        <p:txBody>
-          <a:bodyPr wrap="square">
-            <a:spAutoFit/>
-          </a:bodyPr>
-          <a:lstStyle/>
-          <a:p>
-            <a:pPr algn="ctr">
-              <a:defRPr sz="1100" b="1">
-                <a:solidFill>
-                  <a:srgbClr val="CBD5E1"/>
-                </a:solidFill>
-              </a:defRPr>
-            </a:pPr>
-            <a:r>
-              <a:t>Khmer Unicode</a:t>
-            </a:r>
-            <a:br/>
-            <a:r>
-              <a:t>Text</a:t>
+              <a:t>3. Unicode Text</a:t>
+            </a:r>
+          </a:p>
+          <a:p>
+            <a:pPr>
+              <a:spcBef>
+                <a:spcPts val="800"/>
+              </a:spcBef>
+              <a:defRPr sz="1400" b="1">
+                <a:solidFill>
+                  <a:srgbClr val="FFFFFF"/>
+                </a:solidFill>
+              </a:defRPr>
+            </a:pPr>
+            <a:r>
+              <a:t>ព្រឹកនេះ នៅក្នុងបន្ទប់...</a:t>
             </a:r>
           </a:p>
         </p:txBody>
@@ -5121,8 +4978,8 @@
         </p:nvSpPr>
         <p:spPr>
           <a:xfrm>
-            <a:off x="731520" y="411480"/>
-            <a:ext cx="2377440" cy="347472"/>
+            <a:off x="731520" y="384048"/>
+            <a:ext cx="2560320" cy="329184"/>
           </a:xfrm>
           <a:prstGeom prst="roundRect">
             <a:avLst/>
@@ -5159,11 +5016,10 @@
                 <a:solidFill>
                   <a:srgbClr val="FFFFFF"/>
                 </a:solidFill>
-                <a:latin typeface="Arial"/>
-              </a:defRPr>
-            </a:pPr>
-            <a:r>
-              <a:t>10  PERFORMANCE ANALYSIS</a:t>
+              </a:defRPr>
+            </a:pPr>
+            <a:r>
+              <a:t>10  CONVERGENCE &amp; ACCURACY</a:t>
             </a:r>
           </a:p>
         </p:txBody>
@@ -5176,7 +5032,7 @@
         </p:nvSpPr>
         <p:spPr>
           <a:xfrm>
-            <a:off x="731520" y="868680"/>
+            <a:off x="731520" y="804672"/>
             <a:ext cx="10698480" cy="777240"/>
           </a:xfrm>
           <a:prstGeom prst="rect">
@@ -5195,41 +5051,83 @@
                 <a:solidFill>
                   <a:srgbClr val="FFFFFF"/>
                 </a:solidFill>
-                <a:latin typeface="Arial"/>
               </a:rPr>
-              <a:t>Model Performance &amp; </a:t>
+              <a:t>Visual </a:t>
             </a:r>
             <a:r>
               <a:rPr sz="2800" b="1">
                 <a:solidFill>
                   <a:srgbClr val="38BDF8"/>
                 </a:solidFill>
-                <a:latin typeface="Arial"/>
               </a:rPr>
-              <a:t>Learning Curves</a:t>
+              <a:t>Learning Dynamics</a:t>
             </a:r>
           </a:p>
           <a:p>
             <a:pPr>
               <a:spcBef>
-                <a:spcPts val="400"/>
+                <a:spcPts val="300"/>
               </a:spcBef>
               <a:defRPr sz="1200">
                 <a:solidFill>
                   <a:srgbClr val="94A3B8"/>
                 </a:solidFill>
-                <a:latin typeface="Arial"/>
-              </a:defRPr>
-            </a:pPr>
-            <a:r>
-              <a:t>Overlaid validation learning curves and error rates across all three architectures.</a:t>
-            </a:r>
+              </a:defRPr>
+            </a:pPr>
+            <a:r>
+              <a:t>Validation learning curves and test accuracy comparison charts from Google Drive.</a:t>
+            </a:r>
+          </a:p>
+        </p:txBody>
+      </p:sp>
+      <p:sp>
+        <p:nvSpPr>
+          <p:cNvPr id="5" name="Rounded Rectangle 4"/>
+          <p:cNvSpPr/>
+          <p:nvPr/>
+        </p:nvSpPr>
+        <p:spPr>
+          <a:xfrm>
+            <a:off x="731520" y="1737360"/>
+            <a:ext cx="6217920" cy="3383280"/>
+          </a:xfrm>
+          <a:prstGeom prst="roundRect">
+            <a:avLst/>
+          </a:prstGeom>
+          <a:solidFill>
+            <a:srgbClr val="0A1630"/>
+          </a:solidFill>
+          <a:ln w="19050">
+            <a:solidFill>
+              <a:srgbClr val="1E40AF"/>
+            </a:solidFill>
+          </a:ln>
+        </p:spPr>
+        <p:style>
+          <a:lnRef idx="1">
+            <a:schemeClr val="accent1"/>
+          </a:lnRef>
+          <a:fillRef idx="3">
+            <a:schemeClr val="accent1"/>
+          </a:fillRef>
+          <a:effectRef idx="2">
+            <a:schemeClr val="accent1"/>
+          </a:effectRef>
+          <a:fontRef idx="minor">
+            <a:schemeClr val="lt1"/>
+          </a:fontRef>
+        </p:style>
+        <p:txBody>
+          <a:bodyPr rtlCol="0" anchor="ctr"/>
+          <a:lstStyle/>
+          <a:p>
+            <a:pPr algn="ctr"/>
           </a:p>
         </p:txBody>
       </p:sp>
       <p:pic>
         <p:nvPicPr>
-          <p:cNvPr id="5" name="Picture 4" descr="overlaid_learning_curves.png"/>
+          <p:cNvPr id="6" name="Picture 5" descr="overlaid_learning_curves.png"/>
           <p:cNvPicPr>
             <a:picLocks noChangeAspect="1"/>
           </p:cNvPicPr>
@@ -5243,7 +5141,7 @@
         </p:blipFill>
         <p:spPr>
           <a:xfrm>
-            <a:off x="731520" y="1737360"/>
+            <a:off x="822960" y="1828800"/>
             <a:ext cx="6035040" cy="3017520"/>
           </a:xfrm>
           <a:prstGeom prst="rect">
@@ -5251,9 +5149,54 @@
           </a:prstGeom>
         </p:spPr>
       </p:pic>
+      <p:sp>
+        <p:nvSpPr>
+          <p:cNvPr id="7" name="Rounded Rectangle 6"/>
+          <p:cNvSpPr/>
+          <p:nvPr/>
+        </p:nvSpPr>
+        <p:spPr>
+          <a:xfrm>
+            <a:off x="7132320" y="1737360"/>
+            <a:ext cx="4327855" cy="3383280"/>
+          </a:xfrm>
+          <a:prstGeom prst="roundRect">
+            <a:avLst/>
+          </a:prstGeom>
+          <a:solidFill>
+            <a:srgbClr val="0A1630"/>
+          </a:solidFill>
+          <a:ln w="19050">
+            <a:solidFill>
+              <a:srgbClr val="1E40AF"/>
+            </a:solidFill>
+          </a:ln>
+        </p:spPr>
+        <p:style>
+          <a:lnRef idx="1">
+            <a:schemeClr val="accent1"/>
+          </a:lnRef>
+          <a:fillRef idx="3">
+            <a:schemeClr val="accent1"/>
+          </a:fillRef>
+          <a:effectRef idx="2">
+            <a:schemeClr val="accent1"/>
+          </a:effectRef>
+          <a:fontRef idx="minor">
+            <a:schemeClr val="lt1"/>
+          </a:fontRef>
+        </p:style>
+        <p:txBody>
+          <a:bodyPr rtlCol="0" anchor="ctr"/>
+          <a:lstStyle/>
+          <a:p>
+            <a:pPr algn="ctr"/>
+          </a:p>
+        </p:txBody>
+      </p:sp>
       <p:pic>
         <p:nvPicPr>
-          <p:cNvPr id="6" name="Picture 5" descr="comparison_chart.png"/>
+          <p:cNvPr id="8" name="Picture 7" descr="comparison_chart.png"/>
           <p:cNvPicPr>
             <a:picLocks noChangeAspect="1"/>
           </p:cNvPicPr>
@@ -5267,8 +5210,8 @@
         </p:blipFill>
         <p:spPr>
           <a:xfrm>
-            <a:off x="6949440" y="1737360"/>
-            <a:ext cx="4480560" cy="1629295"/>
+            <a:off x="7223760" y="1828800"/>
+            <a:ext cx="4114800" cy="1496291"/>
           </a:xfrm>
           <a:prstGeom prst="rect">
             <a:avLst/>
@@ -5277,20 +5220,20 @@
       </p:pic>
       <p:sp>
         <p:nvSpPr>
-          <p:cNvPr id="7" name="Rounded Rectangle 6"/>
+          <p:cNvPr id="9" name="Rounded Rectangle 8"/>
           <p:cNvSpPr/>
           <p:nvPr/>
         </p:nvSpPr>
         <p:spPr>
           <a:xfrm>
-            <a:off x="731520" y="4846320"/>
-            <a:ext cx="10728655" cy="1554480"/>
+            <a:off x="731520" y="5303520"/>
+            <a:ext cx="10728655" cy="1188720"/>
           </a:xfrm>
           <a:prstGeom prst="roundRect">
             <a:avLst/>
           </a:prstGeom>
           <a:solidFill>
-            <a:srgbClr val="0B1936"/>
+            <a:srgbClr val="0A1630"/>
           </a:solidFill>
           <a:ln w="19050">
             <a:solidFill>
@@ -5322,14 +5265,14 @@
       </p:sp>
       <p:sp>
         <p:nvSpPr>
-          <p:cNvPr id="8" name="TextBox 7"/>
+          <p:cNvPr id="10" name="TextBox 9"/>
           <p:cNvSpPr txBox="1"/>
           <p:nvPr/>
         </p:nvSpPr>
         <p:spPr>
           <a:xfrm>
-            <a:off x="914400" y="4937760"/>
-            <a:ext cx="10332720" cy="1371600"/>
+            <a:off x="914400" y="5376672"/>
+            <a:ext cx="10332720" cy="1005840"/>
           </a:xfrm>
           <a:prstGeom prst="rect">
             <a:avLst/>
@@ -5343,41 +5286,37 @@
           <a:lstStyle/>
           <a:p>
             <a:pPr>
-              <a:defRPr sz="1300" b="1">
+              <a:defRPr sz="1200" b="1">
                 <a:solidFill>
                   <a:srgbClr val="38BDF8"/>
                 </a:solidFill>
               </a:defRPr>
             </a:pPr>
             <a:r>
-              <a:t>Key Scientific Observations</a:t>
+              <a:t>Training Stability &amp; Convergence Insights</a:t>
             </a:r>
           </a:p>
           <a:p>
             <a:pPr>
               <a:spcBef>
-                <a:spcPts val="400"/>
+                <a:spcPts val="300"/>
               </a:spcBef>
               <a:defRPr sz="1050">
                 <a:solidFill>
-                  <a:srgbClr val="CBD5E1"/>
-                </a:solidFill>
-              </a:defRPr>
-            </a:pPr>
-            <a:r>
-              <a:t>● Blue Curve (A1 CRNN): Rapidly drops from 46% to 10.9% validation CER, achieving the lowest error floor.</a:t>
+                  <a:srgbClr val="E2E8F0"/>
+                </a:solidFill>
+              </a:defRPr>
+            </a:pPr>
+            <a:r>
+              <a:t>● Blue Trajectory (A1): Steepest descent and lowest validation floor (10.9% val CER), proving high sample efficiency.</a:t>
             </a:r>
             <a:br/>
             <a:r>
-              <a:t>● Green Curve (A3 Transformer): Stably converges around 14.7% validation CER, performing well but trailing BiLSTM.</a:t>
+              <a:t>● Regularization Success: Zero validation spikes across all 65 epochs thanks to Cosine Warmup and EMA decay (0.999).</a:t>
             </a:r>
             <a:br/>
             <a:r>
-              <a:t>● Orange Curve (A2 ResNet-18): Plateaus around 18.7% validation CER due to capacity bloat and domain shift.</a:t>
-            </a:r>
-            <a:br/>
-            <a:r>
-              <a:t>● Regularization Success: Cosine warmup and EMA (0.999) completely eliminated validation divergence spikes.</a:t>
+              <a:t>● Error Reduction: Character Error Rate dropped from 98% (untrained) to ~20%, an 80% error reduction.</a:t>
             </a:r>
           </a:p>
         </p:txBody>
@@ -5432,8 +5371,8 @@
         </p:nvSpPr>
         <p:spPr>
           <a:xfrm>
-            <a:off x="731520" y="411480"/>
-            <a:ext cx="2377440" cy="347472"/>
+            <a:off x="731520" y="384048"/>
+            <a:ext cx="2560320" cy="329184"/>
           </a:xfrm>
           <a:prstGeom prst="roundRect">
             <a:avLst/>
@@ -5470,7 +5409,6 @@
                 <a:solidFill>
                   <a:srgbClr val="FFFFFF"/>
                 </a:solidFill>
-                <a:latin typeface="Arial"/>
               </a:defRPr>
             </a:pPr>
             <a:r>
@@ -5487,7 +5425,7 @@
         </p:nvSpPr>
         <p:spPr>
           <a:xfrm>
-            <a:off x="731520" y="868680"/>
+            <a:off x="731520" y="804672"/>
             <a:ext cx="10698480" cy="777240"/>
           </a:xfrm>
           <a:prstGeom prst="rect">
@@ -5506,7 +5444,6 @@
                 <a:solidFill>
                   <a:srgbClr val="FFFFFF"/>
                 </a:solidFill>
-                <a:latin typeface="Arial"/>
               </a:rPr>
               <a:t>Recognition Examples &amp; </a:t>
             </a:r>
@@ -5515,25 +5452,23 @@
                 <a:solidFill>
                   <a:srgbClr val="38BDF8"/>
                 </a:solidFill>
-                <a:latin typeface="Arial"/>
               </a:rPr>
-              <a:t>Error Analysis</a:t>
+              <a:t>Error Modes</a:t>
             </a:r>
           </a:p>
           <a:p>
             <a:pPr>
               <a:spcBef>
-                <a:spcPts val="400"/>
+                <a:spcPts val="300"/>
               </a:spcBef>
               <a:defRPr sz="1200">
                 <a:solidFill>
                   <a:srgbClr val="94A3B8"/>
                 </a:solidFill>
-                <a:latin typeface="Arial"/>
-              </a:defRPr>
-            </a:pPr>
-            <a:r>
-              <a:t>Examples from unseen handwritten lines showing correct predictions and common error cases.</a:t>
+              </a:defRPr>
+            </a:pPr>
+            <a:r>
+              <a:t>Analyzing successful transcriptions and linguistic failure cases on unseen handwriting.</a:t>
             </a:r>
           </a:p>
         </p:txBody>
@@ -5547,13 +5482,356 @@
         <p:spPr>
           <a:xfrm>
             <a:off x="731520" y="1737360"/>
-            <a:ext cx="3413455" cy="3657600"/>
+            <a:ext cx="3413455" cy="3840480"/>
           </a:xfrm>
           <a:prstGeom prst="roundRect">
             <a:avLst/>
           </a:prstGeom>
           <a:solidFill>
-            <a:srgbClr val="0B1936"/>
+            <a:srgbClr val="0A1630"/>
+          </a:solidFill>
+          <a:ln w="19050">
+            <a:solidFill>
+              <a:srgbClr val="22C55E"/>
+            </a:solidFill>
+          </a:ln>
+        </p:spPr>
+        <p:style>
+          <a:lnRef idx="1">
+            <a:schemeClr val="accent1"/>
+          </a:lnRef>
+          <a:fillRef idx="3">
+            <a:schemeClr val="accent1"/>
+          </a:fillRef>
+          <a:effectRef idx="2">
+            <a:schemeClr val="accent1"/>
+          </a:effectRef>
+          <a:fontRef idx="minor">
+            <a:schemeClr val="lt1"/>
+          </a:fontRef>
+        </p:style>
+        <p:txBody>
+          <a:bodyPr rtlCol="0" anchor="ctr"/>
+          <a:lstStyle/>
+          <a:p>
+            <a:pPr algn="ctr"/>
+          </a:p>
+        </p:txBody>
+      </p:sp>
+      <p:sp>
+        <p:nvSpPr>
+          <p:cNvPr id="6" name="TextBox 5"/>
+          <p:cNvSpPr txBox="1"/>
+          <p:nvPr/>
+        </p:nvSpPr>
+        <p:spPr>
+          <a:xfrm>
+            <a:off x="914400" y="1874519"/>
+            <a:ext cx="3047695" cy="3566160"/>
+          </a:xfrm>
+          <a:prstGeom prst="rect">
+            <a:avLst/>
+          </a:prstGeom>
+          <a:noFill/>
+        </p:spPr>
+        <p:txBody>
+          <a:bodyPr wrap="square">
+            <a:spAutoFit/>
+          </a:bodyPr>
+          <a:lstStyle/>
+          <a:p>
+            <a:pPr>
+              <a:defRPr sz="1400" b="1">
+                <a:solidFill>
+                  <a:srgbClr val="22C55E"/>
+                </a:solidFill>
+              </a:defRPr>
+            </a:pPr>
+            <a:r>
+              <a:t>✓ Exact Sentence Match</a:t>
+            </a:r>
+          </a:p>
+          <a:p>
+            <a:pPr>
+              <a:spcBef>
+                <a:spcPts val="600"/>
+              </a:spcBef>
+              <a:defRPr sz="1050">
+                <a:solidFill>
+                  <a:srgbClr val="E2E8F0"/>
+                </a:solidFill>
+              </a:defRPr>
+            </a:pPr>
+            <a:r>
+              <a:t>Ground Truth:</a:t>
+            </a:r>
+            <a:br/>
+            <a:r>
+              <a:t>ព្រឹកនេះ នៅក្នុងបន្ទប់រៀនយើងមានសិស្សជាច្រើននាក់</a:t>
+            </a:r>
+            <a:br/>
+            <a:br/>
+            <a:r>
+              <a:t>Prediction:</a:t>
+            </a:r>
+            <a:br/>
+            <a:r>
+              <a:t>ព្រឹកនេះ នៅក្នុងបន្ទប់រៀនយើងមានសិស្សជាច្រើននាក់</a:t>
+            </a:r>
+            <a:br/>
+            <a:br/>
+            <a:r>
+              <a:t>● 100% exact match across all 58 characters.</a:t>
+            </a:r>
+            <a:br/>
+            <a:r>
+              <a:t>● Successfully recovers subscript Coeng ្រ, upper vowels ឹ, ើ, and dependent vowel ៀ without drift.</a:t>
+            </a:r>
+          </a:p>
+        </p:txBody>
+      </p:sp>
+      <p:sp>
+        <p:nvSpPr>
+          <p:cNvPr id="7" name="Rounded Rectangle 6"/>
+          <p:cNvSpPr/>
+          <p:nvPr/>
+        </p:nvSpPr>
+        <p:spPr>
+          <a:xfrm>
+            <a:off x="4389120" y="1737360"/>
+            <a:ext cx="3413455" cy="3840480"/>
+          </a:xfrm>
+          <a:prstGeom prst="roundRect">
+            <a:avLst/>
+          </a:prstGeom>
+          <a:solidFill>
+            <a:srgbClr val="0A1630"/>
+          </a:solidFill>
+          <a:ln w="19050">
+            <a:solidFill>
+              <a:srgbClr val="F59E0B"/>
+            </a:solidFill>
+          </a:ln>
+        </p:spPr>
+        <p:style>
+          <a:lnRef idx="1">
+            <a:schemeClr val="accent1"/>
+          </a:lnRef>
+          <a:fillRef idx="3">
+            <a:schemeClr val="accent1"/>
+          </a:fillRef>
+          <a:effectRef idx="2">
+            <a:schemeClr val="accent1"/>
+          </a:effectRef>
+          <a:fontRef idx="minor">
+            <a:schemeClr val="lt1"/>
+          </a:fontRef>
+        </p:style>
+        <p:txBody>
+          <a:bodyPr rtlCol="0" anchor="ctr"/>
+          <a:lstStyle/>
+          <a:p>
+            <a:pPr algn="ctr"/>
+          </a:p>
+        </p:txBody>
+      </p:sp>
+      <p:sp>
+        <p:nvSpPr>
+          <p:cNvPr id="8" name="TextBox 7"/>
+          <p:cNvSpPr txBox="1"/>
+          <p:nvPr/>
+        </p:nvSpPr>
+        <p:spPr>
+          <a:xfrm>
+            <a:off x="4572000" y="1874519"/>
+            <a:ext cx="3047695" cy="3566160"/>
+          </a:xfrm>
+          <a:prstGeom prst="rect">
+            <a:avLst/>
+          </a:prstGeom>
+          <a:noFill/>
+        </p:spPr>
+        <p:txBody>
+          <a:bodyPr wrap="square">
+            <a:spAutoFit/>
+          </a:bodyPr>
+          <a:lstStyle/>
+          <a:p>
+            <a:pPr>
+              <a:defRPr sz="1400" b="1">
+                <a:solidFill>
+                  <a:srgbClr val="F59E0B"/>
+                </a:solidFill>
+              </a:defRPr>
+            </a:pPr>
+            <a:r>
+              <a:t>⚠️ Subscript Coeng Omission</a:t>
+            </a:r>
+          </a:p>
+          <a:p>
+            <a:pPr>
+              <a:spcBef>
+                <a:spcPts val="600"/>
+              </a:spcBef>
+              <a:defRPr sz="1050">
+                <a:solidFill>
+                  <a:srgbClr val="E2E8F0"/>
+                </a:solidFill>
+              </a:defRPr>
+            </a:pPr>
+            <a:r>
+              <a:t>Ground Truth:  ក្ប (ក + ្ + ប)</a:t>
+            </a:r>
+            <a:br/>
+            <a:r>
+              <a:t>Prediction:    ក (Subscript omitted)</a:t>
+            </a:r>
+            <a:br/>
+            <a:br/>
+            <a:r>
+              <a:t>● Failure Mechanism:</a:t>
+            </a:r>
+            <a:br/>
+            <a:r>
+              <a:t>  When writers use faint ink or hurried pen strokes, subscripts lack pixel contrast.</a:t>
+            </a:r>
+            <a:br/>
+            <a:br/>
+            <a:r>
+              <a:t>● Downsampling layer misses the faint stroke, collapsing it into the base consonant.</a:t>
+            </a:r>
+          </a:p>
+        </p:txBody>
+      </p:sp>
+      <p:sp>
+        <p:nvSpPr>
+          <p:cNvPr id="9" name="Rounded Rectangle 8"/>
+          <p:cNvSpPr/>
+          <p:nvPr/>
+        </p:nvSpPr>
+        <p:spPr>
+          <a:xfrm>
+            <a:off x="8046720" y="1737360"/>
+            <a:ext cx="3413455" cy="3840480"/>
+          </a:xfrm>
+          <a:prstGeom prst="roundRect">
+            <a:avLst/>
+          </a:prstGeom>
+          <a:solidFill>
+            <a:srgbClr val="0A1630"/>
+          </a:solidFill>
+          <a:ln w="19050">
+            <a:solidFill>
+              <a:srgbClr val="EF4444"/>
+            </a:solidFill>
+          </a:ln>
+        </p:spPr>
+        <p:style>
+          <a:lnRef idx="1">
+            <a:schemeClr val="accent1"/>
+          </a:lnRef>
+          <a:fillRef idx="3">
+            <a:schemeClr val="accent1"/>
+          </a:fillRef>
+          <a:effectRef idx="2">
+            <a:schemeClr val="accent1"/>
+          </a:effectRef>
+          <a:fontRef idx="minor">
+            <a:schemeClr val="lt1"/>
+          </a:fontRef>
+        </p:style>
+        <p:txBody>
+          <a:bodyPr rtlCol="0" anchor="ctr"/>
+          <a:lstStyle/>
+          <a:p>
+            <a:pPr algn="ctr"/>
+          </a:p>
+        </p:txBody>
+      </p:sp>
+      <p:sp>
+        <p:nvSpPr>
+          <p:cNvPr id="10" name="TextBox 9"/>
+          <p:cNvSpPr txBox="1"/>
+          <p:nvPr/>
+        </p:nvSpPr>
+        <p:spPr>
+          <a:xfrm>
+            <a:off x="8229600" y="1874519"/>
+            <a:ext cx="3047695" cy="3566160"/>
+          </a:xfrm>
+          <a:prstGeom prst="rect">
+            <a:avLst/>
+          </a:prstGeom>
+          <a:noFill/>
+        </p:spPr>
+        <p:txBody>
+          <a:bodyPr wrap="square">
+            <a:spAutoFit/>
+          </a:bodyPr>
+          <a:lstStyle/>
+          <a:p>
+            <a:pPr>
+              <a:defRPr sz="1400" b="1">
+                <a:solidFill>
+                  <a:srgbClr val="EF4444"/>
+                </a:solidFill>
+              </a:defRPr>
+            </a:pPr>
+            <a:r>
+              <a:t>✗ Visual Twin Loop Collapse</a:t>
+            </a:r>
+          </a:p>
+          <a:p>
+            <a:pPr>
+              <a:spcBef>
+                <a:spcPts val="600"/>
+              </a:spcBef>
+              <a:defRPr sz="1050">
+                <a:solidFill>
+                  <a:srgbClr val="E2E8F0"/>
+                </a:solidFill>
+              </a:defRPr>
+            </a:pPr>
+            <a:r>
+              <a:t>Ground Truth: ព  →  Prediction: យ</a:t>
+            </a:r>
+            <a:br/>
+            <a:r>
+              <a:t>Ground Truth: នោះ → Prediction: នេះ</a:t>
+            </a:r>
+            <a:br/>
+            <a:br/>
+            <a:r>
+              <a:t>● Failure Mechanism:</a:t>
+            </a:r>
+            <a:br/>
+            <a:r>
+              <a:t>  Cursive loops collapse into identical oval shapes at 48px height.</a:t>
+            </a:r>
+            <a:br/>
+            <a:br/>
+            <a:r>
+              <a:t>● Solution: Requires external language model for semantic disambiguation.</a:t>
+            </a:r>
+          </a:p>
+        </p:txBody>
+      </p:sp>
+      <p:sp>
+        <p:nvSpPr>
+          <p:cNvPr id="11" name="Rounded Rectangle 10"/>
+          <p:cNvSpPr/>
+          <p:nvPr/>
+        </p:nvSpPr>
+        <p:spPr>
+          <a:xfrm>
+            <a:off x="731520" y="5669280"/>
+            <a:ext cx="10728655" cy="822960"/>
+          </a:xfrm>
+          <a:prstGeom prst="roundRect">
+            <a:avLst/>
+          </a:prstGeom>
+          <a:solidFill>
+            <a:srgbClr val="0A1630"/>
           </a:solidFill>
           <a:ln w="19050">
             <a:solidFill>
@@ -5585,14 +5863,14 @@
       </p:sp>
       <p:sp>
         <p:nvSpPr>
-          <p:cNvPr id="6" name="TextBox 5"/>
+          <p:cNvPr id="12" name="TextBox 11"/>
           <p:cNvSpPr txBox="1"/>
           <p:nvPr/>
         </p:nvSpPr>
         <p:spPr>
           <a:xfrm>
-            <a:off x="914400" y="1874519"/>
-            <a:ext cx="3047695" cy="3383280"/>
+            <a:off x="914400" y="5715000"/>
+            <a:ext cx="10332720" cy="731520"/>
           </a:xfrm>
           <a:prstGeom prst="rect">
             <a:avLst/>
@@ -5600,354 +5878,12 @@
           <a:noFill/>
         </p:spPr>
         <p:txBody>
-          <a:bodyPr wrap="square">
+          <a:bodyPr wrap="none">
             <a:spAutoFit/>
           </a:bodyPr>
           <a:lstStyle/>
           <a:p>
             <a:pPr>
-              <a:defRPr sz="1300" b="1">
-                <a:solidFill>
-                  <a:srgbClr val="22C55E"/>
-                </a:solidFill>
-              </a:defRPr>
-            </a:pPr>
-            <a:r>
-              <a:t>✓ Correct Recognition Example</a:t>
-            </a:r>
-          </a:p>
-          <a:p>
-            <a:pPr>
-              <a:spcBef>
-                <a:spcPts val="800"/>
-              </a:spcBef>
-              <a:defRPr sz="1050">
-                <a:solidFill>
-                  <a:srgbClr val="CBD5E1"/>
-                </a:solidFill>
-              </a:defRPr>
-            </a:pPr>
-            <a:r>
-              <a:t>Ground Truth:</a:t>
-            </a:r>
-            <a:br/>
-            <a:r>
-              <a:t>ព្រឹកនេះ នៅក្នុងបន្ទប់រៀនយើងមានសិស្សជាច្រើននាក់</a:t>
-            </a:r>
-            <a:br/>
-            <a:br/>
-            <a:r>
-              <a:t>Model Prediction:</a:t>
-            </a:r>
-            <a:br/>
-            <a:r>
-              <a:t>ព្រឹកនេះ នៅក្នុងបន្ទប់រៀនយើងមានសិស្សជាច្រើននាក់</a:t>
-            </a:r>
-            <a:br/>
-            <a:br/>
-            <a:r>
-              <a:t>● Outcome: 100% exact match across all 58 characters.</a:t>
-            </a:r>
-            <a:br/>
-            <a:r>
-              <a:t>● Recovers subscript coeng ្រ, upper vowels ឹ, ើ, and dependent vowel ៀ without drift.</a:t>
-            </a:r>
-          </a:p>
-        </p:txBody>
-      </p:sp>
-      <p:sp>
-        <p:nvSpPr>
-          <p:cNvPr id="7" name="Rounded Rectangle 6"/>
-          <p:cNvSpPr/>
-          <p:nvPr/>
-        </p:nvSpPr>
-        <p:spPr>
-          <a:xfrm>
-            <a:off x="4389120" y="1737360"/>
-            <a:ext cx="3413455" cy="3657600"/>
-          </a:xfrm>
-          <a:prstGeom prst="roundRect">
-            <a:avLst/>
-          </a:prstGeom>
-          <a:solidFill>
-            <a:srgbClr val="0B1936"/>
-          </a:solidFill>
-          <a:ln w="19050">
-            <a:solidFill>
-              <a:srgbClr val="1E40AF"/>
-            </a:solidFill>
-          </a:ln>
-        </p:spPr>
-        <p:style>
-          <a:lnRef idx="1">
-            <a:schemeClr val="accent1"/>
-          </a:lnRef>
-          <a:fillRef idx="3">
-            <a:schemeClr val="accent1"/>
-          </a:fillRef>
-          <a:effectRef idx="2">
-            <a:schemeClr val="accent1"/>
-          </a:effectRef>
-          <a:fontRef idx="minor">
-            <a:schemeClr val="lt1"/>
-          </a:fontRef>
-        </p:style>
-        <p:txBody>
-          <a:bodyPr rtlCol="0" anchor="ctr"/>
-          <a:lstStyle/>
-          <a:p>
-            <a:pPr algn="ctr"/>
-          </a:p>
-        </p:txBody>
-      </p:sp>
-      <p:sp>
-        <p:nvSpPr>
-          <p:cNvPr id="8" name="TextBox 7"/>
-          <p:cNvSpPr txBox="1"/>
-          <p:nvPr/>
-        </p:nvSpPr>
-        <p:spPr>
-          <a:xfrm>
-            <a:off x="4572000" y="1874519"/>
-            <a:ext cx="3047695" cy="3383280"/>
-          </a:xfrm>
-          <a:prstGeom prst="rect">
-            <a:avLst/>
-          </a:prstGeom>
-          <a:noFill/>
-        </p:spPr>
-        <p:txBody>
-          <a:bodyPr wrap="square">
-            <a:spAutoFit/>
-          </a:bodyPr>
-          <a:lstStyle/>
-          <a:p>
-            <a:pPr>
-              <a:defRPr sz="1300" b="1">
-                <a:solidFill>
-                  <a:srgbClr val="F59E0B"/>
-                </a:solidFill>
-              </a:defRPr>
-            </a:pPr>
-            <a:r>
-              <a:t>⚠️ Minor Recognition Error</a:t>
-            </a:r>
-          </a:p>
-          <a:p>
-            <a:pPr>
-              <a:spcBef>
-                <a:spcPts val="800"/>
-              </a:spcBef>
-              <a:defRPr sz="1050">
-                <a:solidFill>
-                  <a:srgbClr val="CBD5E1"/>
-                </a:solidFill>
-              </a:defRPr>
-            </a:pPr>
-            <a:r>
-              <a:t>Ground Truth:</a:t>
-            </a:r>
-            <a:br/>
-            <a:r>
-              <a:t>ក្បាលម៉ាស៊ីនរថភ្លើង</a:t>
-            </a:r>
-            <a:br/>
-            <a:br/>
-            <a:r>
-              <a:t>Model Prediction:</a:t>
-            </a:r>
-            <a:br/>
-            <a:r>
-              <a:t>កាលម៉ាស៊ីនរថភ្លើង</a:t>
-            </a:r>
-            <a:br/>
-            <a:br/>
-            <a:r>
-              <a:t>● Error: Subscript Coeng ្ + ប omitted (ក្ប → ក).</a:t>
-            </a:r>
-            <a:br/>
-            <a:r>
-              <a:t>● Cause: In faint cursive handwriting, small subscript strokes lack contrast, causing temporal collapse.</a:t>
-            </a:r>
-          </a:p>
-        </p:txBody>
-      </p:sp>
-      <p:sp>
-        <p:nvSpPr>
-          <p:cNvPr id="9" name="Rounded Rectangle 8"/>
-          <p:cNvSpPr/>
-          <p:nvPr/>
-        </p:nvSpPr>
-        <p:spPr>
-          <a:xfrm>
-            <a:off x="8046720" y="1737360"/>
-            <a:ext cx="3413455" cy="3657600"/>
-          </a:xfrm>
-          <a:prstGeom prst="roundRect">
-            <a:avLst/>
-          </a:prstGeom>
-          <a:solidFill>
-            <a:srgbClr val="0B1936"/>
-          </a:solidFill>
-          <a:ln w="19050">
-            <a:solidFill>
-              <a:srgbClr val="1E40AF"/>
-            </a:solidFill>
-          </a:ln>
-        </p:spPr>
-        <p:style>
-          <a:lnRef idx="1">
-            <a:schemeClr val="accent1"/>
-          </a:lnRef>
-          <a:fillRef idx="3">
-            <a:schemeClr val="accent1"/>
-          </a:fillRef>
-          <a:effectRef idx="2">
-            <a:schemeClr val="accent1"/>
-          </a:effectRef>
-          <a:fontRef idx="minor">
-            <a:schemeClr val="lt1"/>
-          </a:fontRef>
-        </p:style>
-        <p:txBody>
-          <a:bodyPr rtlCol="0" anchor="ctr"/>
-          <a:lstStyle/>
-          <a:p>
-            <a:pPr algn="ctr"/>
-          </a:p>
-        </p:txBody>
-      </p:sp>
-      <p:sp>
-        <p:nvSpPr>
-          <p:cNvPr id="10" name="TextBox 9"/>
-          <p:cNvSpPr txBox="1"/>
-          <p:nvPr/>
-        </p:nvSpPr>
-        <p:spPr>
-          <a:xfrm>
-            <a:off x="8229600" y="1874519"/>
-            <a:ext cx="3047695" cy="3383280"/>
-          </a:xfrm>
-          <a:prstGeom prst="rect">
-            <a:avLst/>
-          </a:prstGeom>
-          <a:noFill/>
-        </p:spPr>
-        <p:txBody>
-          <a:bodyPr wrap="square">
-            <a:spAutoFit/>
-          </a:bodyPr>
-          <a:lstStyle/>
-          <a:p>
-            <a:pPr>
-              <a:defRPr sz="1300" b="1">
-                <a:solidFill>
-                  <a:srgbClr val="EF4444"/>
-                </a:solidFill>
-              </a:defRPr>
-            </a:pPr>
-            <a:r>
-              <a:t>✗ Challenging Visual Twin Example</a:t>
-            </a:r>
-          </a:p>
-          <a:p>
-            <a:pPr>
-              <a:spcBef>
-                <a:spcPts val="800"/>
-              </a:spcBef>
-              <a:defRPr sz="1050">
-                <a:solidFill>
-                  <a:srgbClr val="CBD5E1"/>
-                </a:solidFill>
-              </a:defRPr>
-            </a:pPr>
-            <a:r>
-              <a:t>Ground Truth: ព → Prediction: យ</a:t>
-            </a:r>
-            <a:br/>
-            <a:r>
-              <a:t>Ground Truth: នោះ → Prediction: នេះ</a:t>
-            </a:r>
-            <a:br/>
-            <a:br/>
-            <a:r>
-              <a:t>● Cause: Visual twin loops collapse in quick cursive handwriting, making them indistinguishable without language context.</a:t>
-            </a:r>
-            <a:br/>
-            <a:r>
-              <a:t>● Solution: Requires a language model for semantic disambiguation.</a:t>
-            </a:r>
-          </a:p>
-        </p:txBody>
-      </p:sp>
-      <p:sp>
-        <p:nvSpPr>
-          <p:cNvPr id="11" name="Rounded Rectangle 10"/>
-          <p:cNvSpPr/>
-          <p:nvPr/>
-        </p:nvSpPr>
-        <p:spPr>
-          <a:xfrm>
-            <a:off x="731520" y="5486400"/>
-            <a:ext cx="10728655" cy="1005840"/>
-          </a:xfrm>
-          <a:prstGeom prst="roundRect">
-            <a:avLst/>
-          </a:prstGeom>
-          <a:solidFill>
-            <a:srgbClr val="0B1936"/>
-          </a:solidFill>
-          <a:ln w="19050">
-            <a:solidFill>
-              <a:srgbClr val="1E40AF"/>
-            </a:solidFill>
-          </a:ln>
-        </p:spPr>
-        <p:style>
-          <a:lnRef idx="1">
-            <a:schemeClr val="accent1"/>
-          </a:lnRef>
-          <a:fillRef idx="3">
-            <a:schemeClr val="accent1"/>
-          </a:fillRef>
-          <a:effectRef idx="2">
-            <a:schemeClr val="accent1"/>
-          </a:effectRef>
-          <a:fontRef idx="minor">
-            <a:schemeClr val="lt1"/>
-          </a:fontRef>
-        </p:style>
-        <p:txBody>
-          <a:bodyPr rtlCol="0" anchor="ctr"/>
-          <a:lstStyle/>
-          <a:p>
-            <a:pPr algn="ctr"/>
-          </a:p>
-        </p:txBody>
-      </p:sp>
-      <p:sp>
-        <p:nvSpPr>
-          <p:cNvPr id="12" name="TextBox 11"/>
-          <p:cNvSpPr txBox="1"/>
-          <p:nvPr/>
-        </p:nvSpPr>
-        <p:spPr>
-          <a:xfrm>
-            <a:off x="914400" y="5577840"/>
-            <a:ext cx="10332720" cy="822960"/>
-          </a:xfrm>
-          <a:prstGeom prst="rect">
-            <a:avLst/>
-          </a:prstGeom>
-          <a:noFill/>
-        </p:spPr>
-        <p:txBody>
-          <a:bodyPr wrap="square">
-            <a:spAutoFit/>
-          </a:bodyPr>
-          <a:lstStyle/>
-          <a:p>
-            <a:pPr>
               <a:defRPr sz="1100" b="1">
                 <a:solidFill>
                   <a:srgbClr val="38BDF8"/>
@@ -5955,7 +5891,7 @@
               </a:defRPr>
             </a:pPr>
             <a:r>
-              <a:t>Key Takeaway: The model recognizes clear and consistent handwriting accurately. Errors concentrate on faint subscripts and visual twins.</a:t>
+              <a:t>💡 Linguistic Finding: Errors are concentrated on faint subscript strokes and cursive twin loops, not base character confusion.</a:t>
             </a:r>
           </a:p>
         </p:txBody>
@@ -6010,8 +5946,8 @@
         </p:nvSpPr>
         <p:spPr>
           <a:xfrm>
-            <a:off x="731520" y="411480"/>
-            <a:ext cx="2377440" cy="347472"/>
+            <a:off x="731520" y="384048"/>
+            <a:ext cx="2560320" cy="329184"/>
           </a:xfrm>
           <a:prstGeom prst="roundRect">
             <a:avLst/>
@@ -6048,11 +5984,10 @@
                 <a:solidFill>
                   <a:srgbClr val="FFFFFF"/>
                 </a:solidFill>
-                <a:latin typeface="Arial"/>
-              </a:defRPr>
-            </a:pPr>
-            <a:r>
-              <a:t>12  LIVE INFERENCE DEMO</a:t>
+              </a:defRPr>
+            </a:pPr>
+            <a:r>
+              <a:t>12  LIVE DEMO &amp; ARTIFACTS</a:t>
             </a:r>
           </a:p>
         </p:txBody>
@@ -6065,7 +6000,7 @@
         </p:nvSpPr>
         <p:spPr>
           <a:xfrm>
-            <a:off x="731520" y="868680"/>
+            <a:off x="731520" y="804672"/>
             <a:ext cx="10698480" cy="777240"/>
           </a:xfrm>
           <a:prstGeom prst="rect">
@@ -6084,41 +6019,83 @@
                 <a:solidFill>
                   <a:srgbClr val="FFFFFF"/>
                 </a:solidFill>
-                <a:latin typeface="Arial"/>
               </a:rPr>
-              <a:t>Live Inference Demo &amp; </a:t>
+              <a:t>Real-Time Inference </a:t>
             </a:r>
             <a:r>
               <a:rPr sz="2800" b="1">
                 <a:solidFill>
                   <a:srgbClr val="38BDF8"/>
                 </a:solidFill>
-                <a:latin typeface="Arial"/>
               </a:rPr>
-              <a:t>Production Artifacts</a:t>
+              <a:t>&amp; Production Software</a:t>
             </a:r>
           </a:p>
           <a:p>
             <a:pPr>
               <a:spcBef>
-                <a:spcPts val="400"/>
+                <a:spcPts val="300"/>
               </a:spcBef>
               <a:defRPr sz="1200">
                 <a:solidFill>
                   <a:srgbClr val="94A3B8"/>
                 </a:solidFill>
-                <a:latin typeface="Arial"/>
-              </a:defRPr>
-            </a:pPr>
-            <a:r>
-              <a:t>Real-time prediction CLI comparing baseline and transfer models on held-out lines.</a:t>
-            </a:r>
+              </a:defRPr>
+            </a:pPr>
+            <a:r>
+              <a:t>End-to-end Python CLI and production engineering pipeline.</a:t>
+            </a:r>
+          </a:p>
+        </p:txBody>
+      </p:sp>
+      <p:sp>
+        <p:nvSpPr>
+          <p:cNvPr id="5" name="Rounded Rectangle 4"/>
+          <p:cNvSpPr/>
+          <p:nvPr/>
+        </p:nvSpPr>
+        <p:spPr>
+          <a:xfrm>
+            <a:off x="731520" y="1737360"/>
+            <a:ext cx="6217920" cy="2011680"/>
+          </a:xfrm>
+          <a:prstGeom prst="roundRect">
+            <a:avLst/>
+          </a:prstGeom>
+          <a:solidFill>
+            <a:srgbClr val="0A1630"/>
+          </a:solidFill>
+          <a:ln w="19050">
+            <a:solidFill>
+              <a:srgbClr val="1E40AF"/>
+            </a:solidFill>
+          </a:ln>
+        </p:spPr>
+        <p:style>
+          <a:lnRef idx="1">
+            <a:schemeClr val="accent1"/>
+          </a:lnRef>
+          <a:fillRef idx="3">
+            <a:schemeClr val="accent1"/>
+          </a:fillRef>
+          <a:effectRef idx="2">
+            <a:schemeClr val="accent1"/>
+          </a:effectRef>
+          <a:fontRef idx="minor">
+            <a:schemeClr val="lt1"/>
+          </a:fontRef>
+        </p:style>
+        <p:txBody>
+          <a:bodyPr rtlCol="0" anchor="ctr"/>
+          <a:lstStyle/>
+          <a:p>
+            <a:pPr algn="ctr"/>
           </a:p>
         </p:txBody>
       </p:sp>
       <p:pic>
         <p:nvPicPr>
-          <p:cNvPr id="5" name="Picture 4" descr="live_demo_output.png"/>
+          <p:cNvPr id="6" name="Picture 5" descr="live_demo_output.png"/>
           <p:cNvPicPr>
             <a:picLocks noChangeAspect="1"/>
           </p:cNvPicPr>
@@ -6132,8 +6109,8 @@
         </p:blipFill>
         <p:spPr>
           <a:xfrm>
-            <a:off x="731520" y="1737360"/>
-            <a:ext cx="6217920" cy="1624432"/>
+            <a:off x="822960" y="1828800"/>
+            <a:ext cx="6035040" cy="1576654"/>
           </a:xfrm>
           <a:prstGeom prst="rect">
             <a:avLst/>
@@ -6142,20 +6119,20 @@
       </p:pic>
       <p:sp>
         <p:nvSpPr>
-          <p:cNvPr id="6" name="Rounded Rectangle 5"/>
+          <p:cNvPr id="7" name="Rounded Rectangle 6"/>
           <p:cNvSpPr/>
           <p:nvPr/>
         </p:nvSpPr>
         <p:spPr>
           <a:xfrm>
-            <a:off x="731520" y="3657600"/>
-            <a:ext cx="6217920" cy="2743200"/>
+            <a:off x="731520" y="3931920"/>
+            <a:ext cx="6217920" cy="2560320"/>
           </a:xfrm>
           <a:prstGeom prst="roundRect">
             <a:avLst/>
           </a:prstGeom>
           <a:solidFill>
-            <a:srgbClr val="0B1936"/>
+            <a:srgbClr val="0A1630"/>
           </a:solidFill>
           <a:ln w="19050">
             <a:solidFill>
@@ -6187,14 +6164,14 @@
       </p:sp>
       <p:sp>
         <p:nvSpPr>
-          <p:cNvPr id="7" name="TextBox 6"/>
+          <p:cNvPr id="8" name="TextBox 7"/>
           <p:cNvSpPr txBox="1"/>
           <p:nvPr/>
         </p:nvSpPr>
         <p:spPr>
           <a:xfrm>
-            <a:off x="914400" y="3794760"/>
-            <a:ext cx="5852160" cy="2377440"/>
+            <a:off x="914400" y="4069080"/>
+            <a:ext cx="5852160" cy="2286000"/>
           </a:xfrm>
           <a:prstGeom prst="rect">
             <a:avLst/>
@@ -6208,14 +6185,14 @@
           <a:lstStyle/>
           <a:p>
             <a:pPr>
-              <a:defRPr sz="1100" b="1">
+              <a:defRPr sz="1200" b="1">
                 <a:solidFill>
                   <a:srgbClr val="38BDF8"/>
                 </a:solidFill>
               </a:defRPr>
             </a:pPr>
             <a:r>
-              <a:t>Terminal Inference CLI Command:</a:t>
+              <a:t>Single-Command Terminal CLI:</a:t>
             </a:r>
           </a:p>
           <a:p>
@@ -6259,20 +6236,20 @@
       </p:sp>
       <p:sp>
         <p:nvSpPr>
-          <p:cNvPr id="8" name="Rounded Rectangle 7"/>
+          <p:cNvPr id="9" name="Rounded Rectangle 8"/>
           <p:cNvSpPr/>
           <p:nvPr/>
         </p:nvSpPr>
         <p:spPr>
           <a:xfrm>
             <a:off x="7132320" y="1737360"/>
-            <a:ext cx="4327855" cy="4663440"/>
+            <a:ext cx="4327855" cy="4754880"/>
           </a:xfrm>
           <a:prstGeom prst="roundRect">
             <a:avLst/>
           </a:prstGeom>
           <a:solidFill>
-            <a:srgbClr val="0B1936"/>
+            <a:srgbClr val="0A1630"/>
           </a:solidFill>
           <a:ln w="19050">
             <a:solidFill>
@@ -6304,7 +6281,7 @@
       </p:sp>
       <p:sp>
         <p:nvSpPr>
-          <p:cNvPr id="9" name="TextBox 8"/>
+          <p:cNvPr id="10" name="TextBox 9"/>
           <p:cNvSpPr txBox="1"/>
           <p:nvPr/>
         </p:nvSpPr>
@@ -6325,7 +6302,7 @@
           <a:lstStyle/>
           <a:p>
             <a:pPr>
-              <a:defRPr sz="1500" b="1">
+              <a:defRPr sz="1400" b="1">
                 <a:solidFill>
                   <a:srgbClr val="38BDF8"/>
                 </a:solidFill>
@@ -6340,9 +6317,9 @@
               <a:spcBef>
                 <a:spcPts val="800"/>
               </a:spcBef>
-              <a:defRPr sz="1100">
-                <a:solidFill>
-                  <a:srgbClr val="CBD5E1"/>
+              <a:defRPr sz="1050">
+                <a:solidFill>
+                  <a:srgbClr val="E2E8F0"/>
                 </a:solidFill>
               </a:defRPr>
             </a:pPr>
@@ -6351,11 +6328,11 @@
             </a:r>
             <a:br/>
             <a:r>
-              <a:t>  - src/models/ (A1 Baseline, A2 Transfer, A3 Transformer)</a:t>
+              <a:t>  - src/models/ (A1, A2, A3)</a:t>
             </a:r>
             <a:br/>
             <a:r>
-              <a:t>  - src/dataset.py &amp; collate_fn with dynamic white padding</a:t>
+              <a:t>  - src/dataset.py &amp; dynamic white padding collate_fn</a:t>
             </a:r>
             <a:br/>
             <a:r>
@@ -6364,7 +6341,7 @@
             <a:br/>
             <a:br/>
             <a:r>
-              <a:t>● Automated Sheet Cropping Pipeline:</a:t>
+              <a:t>● Automated Scanning Pipeline:</a:t>
             </a:r>
             <a:br/>
             <a:r>
@@ -6377,7 +6354,7 @@
             </a:r>
             <a:br/>
             <a:r>
-              <a:t>  - 30 pytest unit tests passing across macOS and Linux Colab</a:t>
+              <a:t>  - 30 pytest tests passing across macOS and Linux Colab</a:t>
             </a:r>
             <a:br/>
             <a:br/>
@@ -6441,8 +6418,8 @@
         </p:nvSpPr>
         <p:spPr>
           <a:xfrm>
-            <a:off x="731520" y="411480"/>
-            <a:ext cx="2377440" cy="347472"/>
+            <a:off x="731520" y="384048"/>
+            <a:ext cx="2560320" cy="329184"/>
           </a:xfrm>
           <a:prstGeom prst="roundRect">
             <a:avLst/>
@@ -6479,11 +6456,10 @@
                 <a:solidFill>
                   <a:srgbClr val="FFFFFF"/>
                 </a:solidFill>
-                <a:latin typeface="Arial"/>
-              </a:defRPr>
-            </a:pPr>
-            <a:r>
-              <a:t>13  CONCLUSION &amp; FUTURE WORK</a:t>
+              </a:defRPr>
+            </a:pPr>
+            <a:r>
+              <a:t>13  CONCLUSION &amp; HORIZONS</a:t>
             </a:r>
           </a:p>
         </p:txBody>
@@ -6496,7 +6472,7 @@
         </p:nvSpPr>
         <p:spPr>
           <a:xfrm>
-            <a:off x="731520" y="868680"/>
+            <a:off x="731520" y="804672"/>
             <a:ext cx="10698480" cy="777240"/>
           </a:xfrm>
           <a:prstGeom prst="rect">
@@ -6515,7 +6491,6 @@
                 <a:solidFill>
                   <a:srgbClr val="FFFFFF"/>
                 </a:solidFill>
-                <a:latin typeface="Arial"/>
               </a:rPr>
               <a:t>Conclusion &amp; </a:t>
             </a:r>
@@ -6524,25 +6499,23 @@
                 <a:solidFill>
                   <a:srgbClr val="38BDF8"/>
                 </a:solidFill>
-                <a:latin typeface="Arial"/>
               </a:rPr>
-              <a:t>Future Work</a:t>
+              <a:t>Future Directions</a:t>
             </a:r>
           </a:p>
           <a:p>
             <a:pPr>
               <a:spcBef>
-                <a:spcPts val="400"/>
+                <a:spcPts val="300"/>
               </a:spcBef>
               <a:defRPr sz="1200">
                 <a:solidFill>
                   <a:srgbClr val="94A3B8"/>
                 </a:solidFill>
-                <a:latin typeface="Arial"/>
-              </a:defRPr>
-            </a:pPr>
-            <a:r>
-              <a:t>Summary of findings, limitations, and directions for future improvement.</a:t>
+              </a:defRPr>
+            </a:pPr>
+            <a:r>
+              <a:t>Summary of empirical insights, project limitations, and future research paths.</a:t>
             </a:r>
           </a:p>
         </p:txBody>
@@ -6562,7 +6535,7 @@
             <a:avLst/>
           </a:prstGeom>
           <a:solidFill>
-            <a:srgbClr val="0B1936"/>
+            <a:srgbClr val="0A1630"/>
           </a:solidFill>
           <a:ln w="19050">
             <a:solidFill>
@@ -6632,17 +6605,17 @@
               </a:spcBef>
               <a:defRPr sz="1050">
                 <a:solidFill>
-                  <a:srgbClr val="CBD5E1"/>
-                </a:solidFill>
-              </a:defRPr>
-            </a:pPr>
-            <a:r>
-              <a:t>● A1 CRNN Performed Best: Lowest CER (20.06%) and highest word accuracy (25.85%) on unseen writers.</a:t>
+                  <a:srgbClr val="E2E8F0"/>
+                </a:solidFill>
+              </a:defRPr>
+            </a:pPr>
+            <a:r>
+              <a:t>● A1 CRNN is the Winner: Reached 79.94% CharAcc and 25.85% WordAcc with only 8.49M params.</a:t>
             </a:r>
             <a:br/>
             <a:br/>
             <a:r>
-              <a:t>● BiLSTM &gt; Transformer: Innate sequential recurrence inductive bias gave BiLSTM superior sample efficiency on modest data.</a:t>
+              <a:t>● BiLSTM &gt; Transformer: Sequential recurrence inductive bias provides superior sample efficiency on modest handwriting data.</a:t>
             </a:r>
             <a:br/>
             <a:br/>
@@ -6667,7 +6640,7 @@
             <a:avLst/>
           </a:prstGeom>
           <a:solidFill>
-            <a:srgbClr val="0B1936"/>
+            <a:srgbClr val="0A1630"/>
           </a:solidFill>
           <a:ln w="19050">
             <a:solidFill>
@@ -6737,22 +6710,22 @@
               </a:spcBef>
               <a:defRPr sz="1050">
                 <a:solidFill>
-                  <a:srgbClr val="CBD5E1"/>
-                </a:solidFill>
-              </a:defRPr>
-            </a:pPr>
-            <a:r>
-              <a:t>● Limited Human Writers: 11 writers total; test set may not cover all Cambodian regional cursive quirks.</a:t>
+                  <a:srgbClr val="E2E8F0"/>
+                </a:solidFill>
+              </a:defRPr>
+            </a:pPr>
+            <a:r>
+              <a:t>● Limited Human Writers: 11 writers; test set does not cover all regional cursive variants.</a:t>
             </a:r>
             <a:br/>
             <a:br/>
             <a:r>
-              <a:t>● Low Contrast Ink: Faint pencil or pen strokes can cause subscript omissions.</a:t>
+              <a:t>● Low Contrast Strokes: Faint pencil strokes can cause subscript deletions.</a:t>
             </a:r>
             <a:br/>
             <a:br/>
             <a:r>
-              <a:t>● No Integrated Language Model: Visual twins cannot be disambiguated by semantic context.</a:t>
+              <a:t>● Absence of Language Model: Cannot disambiguate visual twin characters via semantic context.</a:t>
             </a:r>
           </a:p>
         </p:txBody>
@@ -6772,7 +6745,7 @@
             <a:avLst/>
           </a:prstGeom>
           <a:solidFill>
-            <a:srgbClr val="0B1936"/>
+            <a:srgbClr val="0A1630"/>
           </a:solidFill>
           <a:ln w="19050">
             <a:solidFill>
@@ -6842,22 +6815,22 @@
               </a:spcBef>
               <a:defRPr sz="1050">
                 <a:solidFill>
-                  <a:srgbClr val="CBD5E1"/>
-                </a:solidFill>
-              </a:defRPr>
-            </a:pPr>
-            <a:r>
-              <a:t>● Larger Multi-Province Corpus: Collect student handwriting across multiple provinces.</a:t>
+                  <a:srgbClr val="E2E8F0"/>
+                </a:solidFill>
+              </a:defRPr>
+            </a:pPr>
+            <a:r>
+              <a:t>● Expanded Multi-Province Dataset: Collect writing samples across high schools nationwide.</a:t>
             </a:r>
             <a:br/>
             <a:br/>
             <a:r>
-              <a:t>● Khmer Language Model: Integrate pre-trained Khmer RoBERTa for post-OCR beam search decoding.</a:t>
+              <a:t>● Khmer RoBERTa Language Model: Integrate beam search decoding for post-OCR semantic correction.</a:t>
             </a:r>
             <a:br/>
             <a:br/>
             <a:r>
-              <a:t>● Mobile Deployment: Export A1 via ONNX / CoreML for instant offline phone camera scanning.</a:t>
+              <a:t>● Mobile On-Device Deployment: Export model via ONNX/CoreML for real-time offline phone camera scanning.</a:t>
             </a:r>
           </a:p>
         </p:txBody>
@@ -6877,7 +6850,7 @@
             <a:avLst/>
           </a:prstGeom>
           <a:solidFill>
-            <a:srgbClr val="0B1936"/>
+            <a:srgbClr val="0A1630"/>
           </a:solidFill>
           <a:ln w="19050">
             <a:solidFill>
@@ -6915,7 +6888,7 @@
         </p:nvSpPr>
         <p:spPr>
           <a:xfrm>
-            <a:off x="914400" y="5577840"/>
+            <a:off x="914400" y="5596128"/>
             <a:ext cx="10332720" cy="822960"/>
           </a:xfrm>
           <a:prstGeom prst="rect">
@@ -6924,7 +6897,7 @@
           <a:noFill/>
         </p:spPr>
         <p:txBody>
-          <a:bodyPr wrap="square">
+          <a:bodyPr wrap="none">
             <a:spAutoFit/>
           </a:bodyPr>
           <a:lstStyle/>
@@ -6937,7 +6910,7 @@
               </a:defRPr>
             </a:pPr>
             <a:r>
-              <a:t>🎯 Final Takeaway: A1 Baseline CRNN achieved the best performance with ~80% character accuracy, proving that well-regularized recurrence and synthetic curriculum pre-training are the optimal foundation for Khmer OCR.</a:t>
+              <a:t>🎯 Final Takeaway: Baseline CRNN with VGG and BiLSTM achieved ~80% Character Accuracy on unseen human writers, proving that localized recurrence and synthetic curriculum pre-training are the optimal foundation for Khmer handwriting OCR.</a:t>
             </a:r>
           </a:p>
         </p:txBody>
@@ -6992,8 +6965,8 @@
         </p:nvSpPr>
         <p:spPr>
           <a:xfrm>
-            <a:off x="731520" y="411480"/>
-            <a:ext cx="2377440" cy="347472"/>
+            <a:off x="731520" y="384048"/>
+            <a:ext cx="2560320" cy="329184"/>
           </a:xfrm>
           <a:prstGeom prst="roundRect">
             <a:avLst/>
@@ -7030,11 +7003,10 @@
                 <a:solidFill>
                   <a:srgbClr val="FFFFFF"/>
                 </a:solidFill>
-                <a:latin typeface="Arial"/>
-              </a:defRPr>
-            </a:pPr>
-            <a:r>
-              <a:t>14  REFERENCES &amp; ACKNOWLEDGEMENTS</a:t>
+              </a:defRPr>
+            </a:pPr>
+            <a:r>
+              <a:t>14  REFERENCES &amp; THANKS</a:t>
             </a:r>
           </a:p>
         </p:txBody>
@@ -7047,7 +7019,7 @@
         </p:nvSpPr>
         <p:spPr>
           <a:xfrm>
-            <a:off x="731520" y="868680"/>
+            <a:off x="731520" y="804672"/>
             <a:ext cx="10698480" cy="777240"/>
           </a:xfrm>
           <a:prstGeom prst="rect">
@@ -7066,7 +7038,6 @@
                 <a:solidFill>
                   <a:srgbClr val="FFFFFF"/>
                 </a:solidFill>
-                <a:latin typeface="Arial"/>
               </a:rPr>
               <a:t>References &amp; </a:t>
             </a:r>
@@ -7075,7 +7046,6 @@
                 <a:solidFill>
                   <a:srgbClr val="38BDF8"/>
                 </a:solidFill>
-                <a:latin typeface="Arial"/>
               </a:rPr>
               <a:t>Acknowledgements</a:t>
             </a:r>
@@ -7083,17 +7053,16 @@
           <a:p>
             <a:pPr>
               <a:spcBef>
-                <a:spcPts val="400"/>
+                <a:spcPts val="300"/>
               </a:spcBef>
               <a:defRPr sz="1200">
                 <a:solidFill>
                   <a:srgbClr val="94A3B8"/>
                 </a:solidFill>
-                <a:latin typeface="Arial"/>
-              </a:defRPr>
-            </a:pPr>
-            <a:r>
-              <a:t>Key academic resources, tools, and mentors who supported this project.</a:t>
+              </a:defRPr>
+            </a:pPr>
+            <a:r>
+              <a:t>Academic citations and acknowledgement of support.</a:t>
             </a:r>
           </a:p>
         </p:txBody>
@@ -7113,7 +7082,7 @@
             <a:avLst/>
           </a:prstGeom>
           <a:solidFill>
-            <a:srgbClr val="0B1936"/>
+            <a:srgbClr val="0A1630"/>
           </a:solidFill>
           <a:ln w="19050">
             <a:solidFill>
@@ -7183,7 +7152,7 @@
               </a:spcBef>
               <a:defRPr sz="950">
                 <a:solidFill>
-                  <a:srgbClr val="CBD5E1"/>
+                  <a:srgbClr val="E2E8F0"/>
                 </a:solidFill>
               </a:defRPr>
             </a:pPr>
@@ -7191,17 +7160,21 @@
               <a:t>1. Graves, A., et al. (2006). Connectionist Temporal Classification (CTC): Labelling Unsegmented Sequence Data. ICML.</a:t>
             </a:r>
             <a:br/>
+            <a:br/>
             <a:r>
               <a:t>2. Shi, B., Bai, X., &amp; Yao, C. (2016). An End-to-End Trainable Neural Network for Image-based Sequence Recognition (CRNN). IEEE TPAMI.</a:t>
             </a:r>
             <a:br/>
+            <a:br/>
             <a:r>
               <a:t>3. He, K., et al. (2016). Deep Residual Learning for Image Recognition (ResNet). CVPR.</a:t>
             </a:r>
             <a:br/>
+            <a:br/>
             <a:r>
               <a:t>4. Vaswani, A., et al. (2017). Attention Is All You Need (Transformer). NeurIPS.</a:t>
             </a:r>
+            <a:br/>
             <a:br/>
             <a:r>
               <a:t>5. Loshchilov, I., &amp; Hutter, F. (2019). Decoupled Weight Decay Regularization (AdamW). ICLR.</a:t>
@@ -7224,7 +7197,7 @@
             <a:avLst/>
           </a:prstGeom>
           <a:solidFill>
-            <a:srgbClr val="0B1936"/>
+            <a:srgbClr val="0A1630"/>
           </a:solidFill>
           <a:ln w="19050">
             <a:solidFill>
@@ -7294,7 +7267,7 @@
               </a:spcBef>
               <a:defRPr sz="1000">
                 <a:solidFill>
-                  <a:srgbClr val="CBD5E1"/>
+                  <a:srgbClr val="E2E8F0"/>
                 </a:solidFill>
               </a:defRPr>
             </a:pPr>
@@ -7303,7 +7276,7 @@
             </a:r>
             <a:br/>
             <a:r>
-              <a:t>  Sincere gratitude to our lecturer Mr. Soklong HIM for continuous mentorship, technical rigor, and feedback.</a:t>
+              <a:t>  Sincere gratitude to lecturer Mr. Soklong HIM for continuous mentorship, technical rigor, and feedback.</a:t>
             </a:r>
             <a:br/>
             <a:br/>
@@ -7321,7 +7294,7 @@
             </a:r>
             <a:br/>
             <a:r>
-              <a:t>  Thank you to all human writers and contributors who provided real handwritten samples for this research.</a:t>
+              <a:t>  Thank you to all human writers and contributors who provided handwritten samples for this research.</a:t>
             </a:r>
           </a:p>
         </p:txBody>
@@ -7341,7 +7314,7 @@
             <a:avLst/>
           </a:prstGeom>
           <a:solidFill>
-            <a:srgbClr val="0B1936"/>
+            <a:srgbClr val="0A1630"/>
           </a:solidFill>
           <a:ln w="19050">
             <a:solidFill>
@@ -7407,7 +7380,7 @@
                   <a:srgbClr val="38BDF8"/>
                 </a:solidFill>
               </a:rPr>
-              <a:t>|  Thank you for your time and attention. I look forward to your questions and discussion.</a:t>
+              <a:t>|  Thank you for your time and attention. I welcome your questions and discussion.</a:t>
             </a:r>
           </a:p>
         </p:txBody>
@@ -7462,8 +7435,8 @@
         </p:nvSpPr>
         <p:spPr>
           <a:xfrm>
-            <a:off x="731520" y="411480"/>
-            <a:ext cx="2377440" cy="347472"/>
+            <a:off x="731520" y="384048"/>
+            <a:ext cx="2560320" cy="329184"/>
           </a:xfrm>
           <a:prstGeom prst="roundRect">
             <a:avLst/>
@@ -7500,7 +7473,6 @@
                 <a:solidFill>
                   <a:srgbClr val="FFFFFF"/>
                 </a:solidFill>
-                <a:latin typeface="Arial"/>
               </a:defRPr>
             </a:pPr>
             <a:r>
@@ -7517,7 +7489,7 @@
         </p:nvSpPr>
         <p:spPr>
           <a:xfrm>
-            <a:off x="731520" y="868680"/>
+            <a:off x="731520" y="804672"/>
             <a:ext cx="10698480" cy="777240"/>
           </a:xfrm>
           <a:prstGeom prst="rect">
@@ -7536,7 +7508,6 @@
                 <a:solidFill>
                   <a:srgbClr val="FFFFFF"/>
                 </a:solidFill>
-                <a:latin typeface="Arial"/>
               </a:rPr>
               <a:t>Why is Khmer Handwritten OCR </a:t>
             </a:r>
@@ -7545,11 +7516,25 @@
                 <a:solidFill>
                   <a:srgbClr val="38BDF8"/>
                 </a:solidFill>
-                <a:latin typeface="Arial"/>
               </a:rPr>
               <a:t>Uniquely Difficult?</a:t>
             </a:r>
           </a:p>
+          <a:p>
+            <a:pPr>
+              <a:spcBef>
+                <a:spcPts val="300"/>
+              </a:spcBef>
+              <a:defRPr sz="1200">
+                <a:solidFill>
+                  <a:srgbClr val="94A3B8"/>
+                </a:solidFill>
+              </a:defRPr>
+            </a:pPr>
+            <a:r>
+              <a:t>Khmer script violates standard Western OCR linear segmentation assumptions.</a:t>
+            </a:r>
+          </a:p>
         </p:txBody>
       </p:sp>
       <p:sp>
@@ -7561,13 +7546,82 @@
         <p:spPr>
           <a:xfrm>
             <a:off x="731520" y="1737360"/>
-            <a:ext cx="3413455" cy="4663440"/>
+            <a:ext cx="5303520" cy="4663440"/>
           </a:xfrm>
           <a:prstGeom prst="roundRect">
             <a:avLst/>
           </a:prstGeom>
           <a:solidFill>
-            <a:srgbClr val="0B1936"/>
+            <a:srgbClr val="0A1630"/>
+          </a:solidFill>
+          <a:ln w="19050">
+            <a:solidFill>
+              <a:srgbClr val="38BDF8"/>
+            </a:solidFill>
+          </a:ln>
+        </p:spPr>
+        <p:style>
+          <a:lnRef idx="1">
+            <a:schemeClr val="accent1"/>
+          </a:lnRef>
+          <a:fillRef idx="3">
+            <a:schemeClr val="accent1"/>
+          </a:fillRef>
+          <a:effectRef idx="2">
+            <a:schemeClr val="accent1"/>
+          </a:effectRef>
+          <a:fontRef idx="minor">
+            <a:schemeClr val="lt1"/>
+          </a:fontRef>
+        </p:style>
+        <p:txBody>
+          <a:bodyPr rtlCol="0" anchor="ctr"/>
+          <a:lstStyle/>
+          <a:p>
+            <a:pPr algn="ctr"/>
+          </a:p>
+        </p:txBody>
+      </p:sp>
+      <p:pic>
+        <p:nvPicPr>
+          <p:cNvPr id="6" name="Picture 5" descr="khmer_script_anatomy.jpg"/>
+          <p:cNvPicPr>
+            <a:picLocks noChangeAspect="1"/>
+          </p:cNvPicPr>
+          <p:nvPr/>
+        </p:nvPicPr>
+        <p:blipFill>
+          <a:blip r:embed="rId3"/>
+          <a:stretch>
+            <a:fillRect/>
+          </a:stretch>
+        </p:blipFill>
+        <p:spPr>
+          <a:xfrm>
+            <a:off x="822960" y="1828800"/>
+            <a:ext cx="5120640" cy="2858032"/>
+          </a:xfrm>
+          <a:prstGeom prst="rect">
+            <a:avLst/>
+          </a:prstGeom>
+        </p:spPr>
+      </p:pic>
+      <p:sp>
+        <p:nvSpPr>
+          <p:cNvPr id="7" name="Rounded Rectangle 6"/>
+          <p:cNvSpPr/>
+          <p:nvPr/>
+        </p:nvSpPr>
+        <p:spPr>
+          <a:xfrm>
+            <a:off x="6309360" y="1737360"/>
+            <a:ext cx="5150815" cy="1417320"/>
+          </a:xfrm>
+          <a:prstGeom prst="roundRect">
+            <a:avLst/>
+          </a:prstGeom>
+          <a:solidFill>
+            <a:srgbClr val="0A1630"/>
           </a:solidFill>
           <a:ln w="19050">
             <a:solidFill>
@@ -7599,67 +7653,14 @@
       </p:sp>
       <p:sp>
         <p:nvSpPr>
-          <p:cNvPr id="6" name="Oval 5"/>
-          <p:cNvSpPr/>
-          <p:nvPr/>
-        </p:nvSpPr>
-        <p:spPr>
-          <a:xfrm>
-            <a:off x="1005840" y="2011680"/>
-            <a:ext cx="475488" cy="475488"/>
-          </a:xfrm>
-          <a:prstGeom prst="ellipse">
-            <a:avLst/>
-          </a:prstGeom>
-          <a:solidFill>
-            <a:srgbClr val="2563EB"/>
-          </a:solidFill>
-          <a:ln>
-            <a:noFill/>
-          </a:ln>
-        </p:spPr>
-        <p:style>
-          <a:lnRef idx="1">
-            <a:schemeClr val="accent1"/>
-          </a:lnRef>
-          <a:fillRef idx="3">
-            <a:schemeClr val="accent1"/>
-          </a:fillRef>
-          <a:effectRef idx="2">
-            <a:schemeClr val="accent1"/>
-          </a:effectRef>
-          <a:fontRef idx="minor">
-            <a:schemeClr val="lt1"/>
-          </a:fontRef>
-        </p:style>
-        <p:txBody>
-          <a:bodyPr rtlCol="0" anchor="ctr" tIns="0" bIns="0" lIns="0" rIns="0"/>
-          <a:lstStyle/>
-          <a:p>
-            <a:pPr algn="ctr">
-              <a:defRPr sz="1200" b="1">
-                <a:solidFill>
-                  <a:srgbClr val="FFFFFF"/>
-                </a:solidFill>
-                <a:latin typeface="Arial"/>
-              </a:defRPr>
-            </a:pPr>
-            <a:r>
-              <a:t>01</a:t>
-            </a:r>
-          </a:p>
-        </p:txBody>
-      </p:sp>
-      <p:sp>
-        <p:nvSpPr>
-          <p:cNvPr id="7" name="TextBox 6"/>
+          <p:cNvPr id="8" name="TextBox 7"/>
           <p:cNvSpPr txBox="1"/>
           <p:nvPr/>
         </p:nvSpPr>
         <p:spPr>
           <a:xfrm>
-            <a:off x="1600200" y="1965960"/>
-            <a:ext cx="2407615" cy="731520"/>
+            <a:off x="6492240" y="1847088"/>
+            <a:ext cx="4754880" cy="1188720"/>
           </a:xfrm>
           <a:prstGeom prst="rect">
             <a:avLst/>
@@ -7672,70 +7673,34 @@
           </a:bodyPr>
           <a:lstStyle/>
           <a:p>
-            <a:r>
-              <a:rPr sz="1400" b="1">
-                <a:solidFill>
-                  <a:srgbClr val="FFFFFF"/>
-                </a:solidFill>
-              </a:rPr>
-              <a:t>Complex Character
-</a:t>
-            </a:r>
-            <a:r>
-              <a:rPr sz="1400" b="1">
+            <a:pPr>
+              <a:defRPr sz="1300" b="1">
                 <a:solidFill>
                   <a:srgbClr val="38BDF8"/>
                 </a:solidFill>
-              </a:rPr>
-              <a:t>Structure</a:t>
-            </a:r>
-          </a:p>
-        </p:txBody>
-      </p:sp>
-      <p:sp>
-        <p:nvSpPr>
-          <p:cNvPr id="8" name="TextBox 7"/>
-          <p:cNvSpPr txBox="1"/>
-          <p:nvPr/>
-        </p:nvSpPr>
-        <p:spPr>
-          <a:xfrm>
-            <a:off x="1005840" y="2834640"/>
-            <a:ext cx="2864815" cy="3383280"/>
-          </a:xfrm>
-          <a:prstGeom prst="rect">
-            <a:avLst/>
-          </a:prstGeom>
-          <a:noFill/>
-        </p:spPr>
-        <p:txBody>
-          <a:bodyPr wrap="square">
-            <a:spAutoFit/>
-          </a:bodyPr>
-          <a:lstStyle/>
+              </a:defRPr>
+            </a:pPr>
+            <a:r>
+              <a:t>1. Multi-Tier Vertical Stacking</a:t>
+            </a:r>
+          </a:p>
           <a:p>
             <a:pPr>
-              <a:defRPr sz="1100">
-                <a:solidFill>
-                  <a:srgbClr val="CBD5E1"/>
-                </a:solidFill>
-              </a:defRPr>
-            </a:pPr>
-            <a:r>
-              <a:t>Khmer is an abugida script with stacked consonants and dependent vowels positioned around the base consonant.</a:t>
+              <a:spcBef>
+                <a:spcPts val="300"/>
+              </a:spcBef>
+              <a:defRPr sz="1050">
+                <a:solidFill>
+                  <a:srgbClr val="E2E8F0"/>
+                </a:solidFill>
+              </a:defRPr>
+            </a:pPr>
+            <a:r>
+              <a:t>Characters stack across 3 tiers (Upper Vowel, Base, and Subscript Coeng).</a:t>
             </a:r>
             <a:br/>
-            <a:br/>
-            <a:r>
-              <a:t>● Characters span multiple vertical levels (subscript Coeng, base, upper vowel).</a:t>
-            </a:r>
-            <a:br/>
-            <a:r>
-              <a:t>● Many possible complex ligature combinations.</a:t>
-            </a:r>
-            <a:br/>
-            <a:r>
-              <a:t>● High density of visually similar diacritics.</a:t>
+            <a:r>
+              <a:t>Traditional linear bounding-box segmentation destroys character meaning.</a:t>
             </a:r>
           </a:p>
         </p:txBody>
@@ -7748,14 +7713,14 @@
         </p:nvSpPr>
         <p:spPr>
           <a:xfrm>
-            <a:off x="4388205" y="1737360"/>
-            <a:ext cx="3413455" cy="4663440"/>
+            <a:off x="6309360" y="3337560"/>
+            <a:ext cx="5150815" cy="1417320"/>
           </a:xfrm>
           <a:prstGeom prst="roundRect">
             <a:avLst/>
           </a:prstGeom>
           <a:solidFill>
-            <a:srgbClr val="0B1936"/>
+            <a:srgbClr val="0A1630"/>
           </a:solidFill>
           <a:ln w="19050">
             <a:solidFill>
@@ -7787,67 +7752,14 @@
       </p:sp>
       <p:sp>
         <p:nvSpPr>
-          <p:cNvPr id="10" name="Oval 9"/>
-          <p:cNvSpPr/>
-          <p:nvPr/>
-        </p:nvSpPr>
-        <p:spPr>
-          <a:xfrm>
-            <a:off x="4662525" y="2011680"/>
-            <a:ext cx="475488" cy="475488"/>
-          </a:xfrm>
-          <a:prstGeom prst="ellipse">
-            <a:avLst/>
-          </a:prstGeom>
-          <a:solidFill>
-            <a:srgbClr val="2563EB"/>
-          </a:solidFill>
-          <a:ln>
-            <a:noFill/>
-          </a:ln>
-        </p:spPr>
-        <p:style>
-          <a:lnRef idx="1">
-            <a:schemeClr val="accent1"/>
-          </a:lnRef>
-          <a:fillRef idx="3">
-            <a:schemeClr val="accent1"/>
-          </a:fillRef>
-          <a:effectRef idx="2">
-            <a:schemeClr val="accent1"/>
-          </a:effectRef>
-          <a:fontRef idx="minor">
-            <a:schemeClr val="lt1"/>
-          </a:fontRef>
-        </p:style>
-        <p:txBody>
-          <a:bodyPr rtlCol="0" anchor="ctr" tIns="0" bIns="0" lIns="0" rIns="0"/>
-          <a:lstStyle/>
-          <a:p>
-            <a:pPr algn="ctr">
-              <a:defRPr sz="1200" b="1">
-                <a:solidFill>
-                  <a:srgbClr val="FFFFFF"/>
-                </a:solidFill>
-                <a:latin typeface="Arial"/>
-              </a:defRPr>
-            </a:pPr>
-            <a:r>
-              <a:t>02</a:t>
-            </a:r>
-          </a:p>
-        </p:txBody>
-      </p:sp>
-      <p:sp>
-        <p:nvSpPr>
-          <p:cNvPr id="11" name="TextBox 10"/>
+          <p:cNvPr id="10" name="TextBox 9"/>
           <p:cNvSpPr txBox="1"/>
           <p:nvPr/>
         </p:nvSpPr>
         <p:spPr>
           <a:xfrm>
-            <a:off x="5256885" y="1965960"/>
-            <a:ext cx="2407615" cy="731520"/>
+            <a:off x="6492240" y="3447288"/>
+            <a:ext cx="4754880" cy="1188720"/>
           </a:xfrm>
           <a:prstGeom prst="rect">
             <a:avLst/>
@@ -7860,90 +7772,54 @@
           </a:bodyPr>
           <a:lstStyle/>
           <a:p>
-            <a:r>
-              <a:rPr sz="1400" b="1">
-                <a:solidFill>
-                  <a:srgbClr val="FFFFFF"/>
-                </a:solidFill>
-              </a:rPr>
-              <a:t>No Word Spaces
-</a:t>
-            </a:r>
-            <a:r>
-              <a:rPr sz="1400" b="1">
+            <a:pPr>
+              <a:defRPr sz="1300" b="1">
                 <a:solidFill>
                   <a:srgbClr val="38BDF8"/>
                 </a:solidFill>
-              </a:rPr>
-              <a:t>(Continuous Script)</a:t>
-            </a:r>
-          </a:p>
-        </p:txBody>
-      </p:sp>
-      <p:sp>
-        <p:nvSpPr>
-          <p:cNvPr id="12" name="TextBox 11"/>
-          <p:cNvSpPr txBox="1"/>
-          <p:nvPr/>
-        </p:nvSpPr>
-        <p:spPr>
-          <a:xfrm>
-            <a:off x="4662525" y="2834640"/>
-            <a:ext cx="2864815" cy="3383280"/>
-          </a:xfrm>
-          <a:prstGeom prst="rect">
-            <a:avLst/>
-          </a:prstGeom>
-          <a:noFill/>
-        </p:spPr>
-        <p:txBody>
-          <a:bodyPr wrap="square">
-            <a:spAutoFit/>
-          </a:bodyPr>
-          <a:lstStyle/>
+              </a:defRPr>
+            </a:pPr>
+            <a:r>
+              <a:t>2. Continuous Script (Zero Spaces)</a:t>
+            </a:r>
+          </a:p>
           <a:p>
             <a:pPr>
-              <a:defRPr sz="1100">
-                <a:solidFill>
-                  <a:srgbClr val="CBD5E1"/>
-                </a:solidFill>
-              </a:defRPr>
-            </a:pPr>
-            <a:r>
-              <a:t>Khmer sentences are written continuously without spaces between individual words.</a:t>
+              <a:spcBef>
+                <a:spcPts val="300"/>
+              </a:spcBef>
+              <a:defRPr sz="1050">
+                <a:solidFill>
+                  <a:srgbClr val="E2E8F0"/>
+                </a:solidFill>
+              </a:defRPr>
+            </a:pPr>
+            <a:r>
+              <a:t>Words flow seamlessly without whitespace boundaries.</a:t>
             </a:r>
             <a:br/>
-            <a:br/>
-            <a:r>
-              <a:t>● Words cannot be segmented using simple whitespace slicing.</a:t>
-            </a:r>
-            <a:br/>
-            <a:r>
-              <a:t>● Character boundaries are blurred and continuous.</a:t>
-            </a:r>
-            <a:br/>
-            <a:r>
-              <a:t>● Requires end-to-end sequence alignment via CTC loss.</a:t>
-            </a:r>
-          </a:p>
-        </p:txBody>
-      </p:sp>
-      <p:sp>
-        <p:nvSpPr>
-          <p:cNvPr id="13" name="Rounded Rectangle 12"/>
+            <a:r>
+              <a:t>Requires temporal sequence alignment via CTC loss instead of word slicing.</a:t>
+            </a:r>
+          </a:p>
+        </p:txBody>
+      </p:sp>
+      <p:sp>
+        <p:nvSpPr>
+          <p:cNvPr id="11" name="Rounded Rectangle 10"/>
           <p:cNvSpPr/>
           <p:nvPr/>
         </p:nvSpPr>
         <p:spPr>
           <a:xfrm>
-            <a:off x="8044890" y="1737360"/>
-            <a:ext cx="3413455" cy="4663440"/>
+            <a:off x="6309360" y="4937760"/>
+            <a:ext cx="5150815" cy="1417320"/>
           </a:xfrm>
           <a:prstGeom prst="roundRect">
             <a:avLst/>
           </a:prstGeom>
           <a:solidFill>
-            <a:srgbClr val="0B1936"/>
+            <a:srgbClr val="0A1630"/>
           </a:solidFill>
           <a:ln w="19050">
             <a:solidFill>
@@ -7975,67 +7851,14 @@
       </p:sp>
       <p:sp>
         <p:nvSpPr>
-          <p:cNvPr id="14" name="Oval 13"/>
-          <p:cNvSpPr/>
-          <p:nvPr/>
-        </p:nvSpPr>
-        <p:spPr>
-          <a:xfrm>
-            <a:off x="8319210" y="2011680"/>
-            <a:ext cx="475488" cy="475488"/>
-          </a:xfrm>
-          <a:prstGeom prst="ellipse">
-            <a:avLst/>
-          </a:prstGeom>
-          <a:solidFill>
-            <a:srgbClr val="2563EB"/>
-          </a:solidFill>
-          <a:ln>
-            <a:noFill/>
-          </a:ln>
-        </p:spPr>
-        <p:style>
-          <a:lnRef idx="1">
-            <a:schemeClr val="accent1"/>
-          </a:lnRef>
-          <a:fillRef idx="3">
-            <a:schemeClr val="accent1"/>
-          </a:fillRef>
-          <a:effectRef idx="2">
-            <a:schemeClr val="accent1"/>
-          </a:effectRef>
-          <a:fontRef idx="minor">
-            <a:schemeClr val="lt1"/>
-          </a:fontRef>
-        </p:style>
-        <p:txBody>
-          <a:bodyPr rtlCol="0" anchor="ctr" tIns="0" bIns="0" lIns="0" rIns="0"/>
-          <a:lstStyle/>
-          <a:p>
-            <a:pPr algn="ctr">
-              <a:defRPr sz="1200" b="1">
-                <a:solidFill>
-                  <a:srgbClr val="FFFFFF"/>
-                </a:solidFill>
-                <a:latin typeface="Arial"/>
-              </a:defRPr>
-            </a:pPr>
-            <a:r>
-              <a:t>03</a:t>
-            </a:r>
-          </a:p>
-        </p:txBody>
-      </p:sp>
-      <p:sp>
-        <p:nvSpPr>
-          <p:cNvPr id="15" name="TextBox 14"/>
+          <p:cNvPr id="12" name="TextBox 11"/>
           <p:cNvSpPr txBox="1"/>
           <p:nvPr/>
         </p:nvSpPr>
         <p:spPr>
           <a:xfrm>
-            <a:off x="8913570" y="1965960"/>
-            <a:ext cx="2407615" cy="731520"/>
+            <a:off x="6492240" y="5047488"/>
+            <a:ext cx="4754880" cy="1188720"/>
           </a:xfrm>
           <a:prstGeom prst="rect">
             <a:avLst/>
@@ -8048,70 +7871,34 @@
           </a:bodyPr>
           <a:lstStyle/>
           <a:p>
-            <a:r>
-              <a:rPr sz="1400" b="1">
-                <a:solidFill>
-                  <a:srgbClr val="FFFFFF"/>
-                </a:solidFill>
-              </a:rPr>
-              <a:t>High Inter-Writer
-</a:t>
-            </a:r>
-            <a:r>
-              <a:rPr sz="1400" b="1">
+            <a:pPr>
+              <a:defRPr sz="1300" b="1">
                 <a:solidFill>
                   <a:srgbClr val="38BDF8"/>
                 </a:solidFill>
-              </a:rPr>
-              <a:t>Variability</a:t>
-            </a:r>
-          </a:p>
-        </p:txBody>
-      </p:sp>
-      <p:sp>
-        <p:nvSpPr>
-          <p:cNvPr id="16" name="TextBox 15"/>
-          <p:cNvSpPr txBox="1"/>
-          <p:nvPr/>
-        </p:nvSpPr>
-        <p:spPr>
-          <a:xfrm>
-            <a:off x="8319210" y="2834640"/>
-            <a:ext cx="2864815" cy="3383280"/>
-          </a:xfrm>
-          <a:prstGeom prst="rect">
-            <a:avLst/>
-          </a:prstGeom>
-          <a:noFill/>
-        </p:spPr>
-        <p:txBody>
-          <a:bodyPr wrap="square">
-            <a:spAutoFit/>
-          </a:bodyPr>
-          <a:lstStyle/>
+              </a:defRPr>
+            </a:pPr>
+            <a:r>
+              <a:t>3. High Inter-Writer Variability</a:t>
+            </a:r>
+          </a:p>
           <a:p>
             <a:pPr>
-              <a:defRPr sz="1100">
-                <a:solidFill>
-                  <a:srgbClr val="CBD5E1"/>
-                </a:solidFill>
-              </a:defRPr>
-            </a:pPr>
-            <a:r>
-              <a:t>Handwriting styles differ significantly across writers, with variations in stroke thickness, cursive loops and slant.</a:t>
+              <a:spcBef>
+                <a:spcPts val="300"/>
+              </a:spcBef>
+              <a:defRPr sz="1050">
+                <a:solidFill>
+                  <a:srgbClr val="E2E8F0"/>
+                </a:solidFill>
+              </a:defRPr>
+            </a:pPr>
+            <a:r>
+              <a:t>Cursive loop collapse creates visual twins (ព vs យ, ត vs ដ).</a:t>
             </a:r>
             <a:br/>
-            <a:br/>
-            <a:r>
-              <a:t>● The same character looks drastically different across people.</a:t>
-            </a:r>
-            <a:br/>
-            <a:r>
-              <a:t>● Visually similar character pairs (e.g. ព vs យ, ត vs ដ, ច vs ជ).</a:t>
-            </a:r>
-            <a:br/>
-            <a:r>
-              <a:t>● Requires strict writer-disjoint evaluation to prevent data leakage.</a:t>
+            <a:r>
+              <a:t>Strict writer-disjoint splitting is required to prevent style memorization.</a:t>
             </a:r>
           </a:p>
         </p:txBody>
@@ -8166,8 +7953,8 @@
         </p:nvSpPr>
         <p:spPr>
           <a:xfrm>
-            <a:off x="731520" y="411480"/>
-            <a:ext cx="2377440" cy="347472"/>
+            <a:off x="731520" y="384048"/>
+            <a:ext cx="2560320" cy="329184"/>
           </a:xfrm>
           <a:prstGeom prst="roundRect">
             <a:avLst/>
@@ -8204,7 +7991,6 @@
                 <a:solidFill>
                   <a:srgbClr val="FFFFFF"/>
                 </a:solidFill>
-                <a:latin typeface="Arial"/>
               </a:defRPr>
             </a:pPr>
             <a:r>
@@ -8221,7 +8007,7 @@
         </p:nvSpPr>
         <p:spPr>
           <a:xfrm>
-            <a:off x="731520" y="868680"/>
+            <a:off x="731520" y="804672"/>
             <a:ext cx="10698480" cy="777240"/>
           </a:xfrm>
           <a:prstGeom prst="rect">
@@ -8240,7 +8026,6 @@
                 <a:solidFill>
                   <a:srgbClr val="FFFFFF"/>
                 </a:solidFill>
-                <a:latin typeface="Arial"/>
               </a:rPr>
               <a:t>End-to-End </a:t>
             </a:r>
@@ -8249,7 +8034,6 @@
                 <a:solidFill>
                   <a:srgbClr val="38BDF8"/>
                 </a:solidFill>
-                <a:latin typeface="Arial"/>
               </a:rPr>
               <a:t>Recognition Pipeline</a:t>
             </a:r>
@@ -8257,17 +8041,16 @@
           <a:p>
             <a:pPr>
               <a:spcBef>
-                <a:spcPts val="400"/>
+                <a:spcPts val="300"/>
               </a:spcBef>
               <a:defRPr sz="1200">
                 <a:solidFill>
                   <a:srgbClr val="94A3B8"/>
                 </a:solidFill>
-                <a:latin typeface="Arial"/>
-              </a:defRPr>
-            </a:pPr>
-            <a:r>
-              <a:t>From handwritten line image to Khmer Unicode text using deep learning.</a:t>
+              </a:defRPr>
+            </a:pPr>
+            <a:r>
+              <a:t>Transforms unconstrained handwritten line images into Unicode text.</a:t>
             </a:r>
           </a:p>
         </p:txBody>
@@ -8281,13 +8064,13 @@
         <p:spPr>
           <a:xfrm>
             <a:off x="731520" y="1828800"/>
-            <a:ext cx="1645920" cy="2834640"/>
+            <a:ext cx="1645920" cy="2560320"/>
           </a:xfrm>
           <a:prstGeom prst="roundRect">
             <a:avLst/>
           </a:prstGeom>
           <a:solidFill>
-            <a:srgbClr val="0B1936"/>
+            <a:srgbClr val="0A1630"/>
           </a:solidFill>
           <a:ln w="19050">
             <a:solidFill>
@@ -8319,67 +8102,14 @@
       </p:sp>
       <p:sp>
         <p:nvSpPr>
-          <p:cNvPr id="6" name="Oval 5"/>
-          <p:cNvSpPr/>
-          <p:nvPr/>
-        </p:nvSpPr>
-        <p:spPr>
-          <a:xfrm>
-            <a:off x="868680" y="1965960"/>
-            <a:ext cx="475488" cy="475488"/>
-          </a:xfrm>
-          <a:prstGeom prst="ellipse">
-            <a:avLst/>
-          </a:prstGeom>
-          <a:solidFill>
-            <a:srgbClr val="2563EB"/>
-          </a:solidFill>
-          <a:ln>
-            <a:noFill/>
-          </a:ln>
-        </p:spPr>
-        <p:style>
-          <a:lnRef idx="1">
-            <a:schemeClr val="accent1"/>
-          </a:lnRef>
-          <a:fillRef idx="3">
-            <a:schemeClr val="accent1"/>
-          </a:fillRef>
-          <a:effectRef idx="2">
-            <a:schemeClr val="accent1"/>
-          </a:effectRef>
-          <a:fontRef idx="minor">
-            <a:schemeClr val="lt1"/>
-          </a:fontRef>
-        </p:style>
-        <p:txBody>
-          <a:bodyPr rtlCol="0" anchor="ctr" tIns="0" bIns="0" lIns="0" rIns="0"/>
-          <a:lstStyle/>
-          <a:p>
-            <a:pPr algn="ctr">
-              <a:defRPr sz="1200" b="1">
-                <a:solidFill>
-                  <a:srgbClr val="FFFFFF"/>
-                </a:solidFill>
-                <a:latin typeface="Arial"/>
-              </a:defRPr>
-            </a:pPr>
-            <a:r>
-              <a:t>1</a:t>
-            </a:r>
-          </a:p>
-        </p:txBody>
-      </p:sp>
-      <p:sp>
-        <p:nvSpPr>
-          <p:cNvPr id="7" name="TextBox 6"/>
+          <p:cNvPr id="6" name="TextBox 5"/>
           <p:cNvSpPr txBox="1"/>
           <p:nvPr/>
         </p:nvSpPr>
         <p:spPr>
           <a:xfrm>
-            <a:off x="822960" y="2514600"/>
-            <a:ext cx="1463040" cy="640080"/>
+            <a:off x="822960" y="2011680"/>
+            <a:ext cx="1463040" cy="2194560"/>
           </a:xfrm>
           <a:prstGeom prst="rect">
             <a:avLst/>
@@ -8393,108 +8123,64 @@
           <a:lstStyle/>
           <a:p>
             <a:pPr algn="ctr">
-              <a:defRPr sz="1200" b="1">
+              <a:defRPr sz="1400" b="1">
+                <a:solidFill>
+                  <a:srgbClr val="38BDF8"/>
+                </a:solidFill>
+              </a:defRPr>
+            </a:pPr>
+            <a:r>
+              <a:t>1. Input</a:t>
+            </a:r>
+          </a:p>
+          <a:p>
+            <a:pPr algn="ctr">
+              <a:spcBef>
+                <a:spcPts val="1000"/>
+              </a:spcBef>
+              <a:defRPr sz="1300" b="1">
                 <a:solidFill>
                   <a:srgbClr val="FFFFFF"/>
                 </a:solidFill>
               </a:defRPr>
             </a:pPr>
             <a:r>
-              <a:t>Input Image</a:t>
-            </a:r>
-          </a:p>
-        </p:txBody>
-      </p:sp>
-      <p:sp>
-        <p:nvSpPr>
-          <p:cNvPr id="8" name="TextBox 7"/>
-          <p:cNvSpPr txBox="1"/>
-          <p:nvPr/>
-        </p:nvSpPr>
-        <p:spPr>
-          <a:xfrm>
-            <a:off x="822960" y="3200400"/>
-            <a:ext cx="1463040" cy="1280160"/>
-          </a:xfrm>
-          <a:prstGeom prst="rect">
-            <a:avLst/>
-          </a:prstGeom>
-          <a:noFill/>
-        </p:spPr>
-        <p:txBody>
-          <a:bodyPr wrap="square">
-            <a:spAutoFit/>
-          </a:bodyPr>
-          <a:lstStyle/>
+              <a:t>Raw Line Image</a:t>
+            </a:r>
+          </a:p>
           <a:p>
             <a:pPr algn="ctr">
+              <a:spcBef>
+                <a:spcPts val="600"/>
+              </a:spcBef>
               <a:defRPr sz="1000">
                 <a:solidFill>
-                  <a:srgbClr val="CBD5E1"/>
-                </a:solidFill>
-              </a:defRPr>
-            </a:pPr>
-            <a:r>
-              <a:t>Raw handwritten line crop</a:t>
-            </a:r>
-            <a:br/>
-            <a:r>
-              <a:t>(variable width)</a:t>
-            </a:r>
-          </a:p>
-        </p:txBody>
-      </p:sp>
-      <p:sp>
-        <p:nvSpPr>
-          <p:cNvPr id="9" name="TextBox 8"/>
-          <p:cNvSpPr txBox="1"/>
-          <p:nvPr/>
-        </p:nvSpPr>
-        <p:spPr>
-          <a:xfrm>
-            <a:off x="2377440" y="2926080"/>
-            <a:ext cx="164592" cy="457200"/>
-          </a:xfrm>
-          <a:prstGeom prst="rect">
-            <a:avLst/>
-          </a:prstGeom>
-          <a:noFill/>
-        </p:spPr>
-        <p:txBody>
-          <a:bodyPr wrap="none">
-            <a:spAutoFit/>
-          </a:bodyPr>
-          <a:lstStyle/>
-          <a:p>
-            <a:pPr>
-              <a:defRPr sz="1400">
-                <a:solidFill>
-                  <a:srgbClr val="38BDF8"/>
-                </a:solidFill>
-              </a:defRPr>
-            </a:pPr>
-            <a:r>
-              <a:t>➔</a:t>
-            </a:r>
-          </a:p>
-        </p:txBody>
-      </p:sp>
-      <p:sp>
-        <p:nvSpPr>
-          <p:cNvPr id="10" name="Rounded Rectangle 9"/>
+                  <a:srgbClr val="94A3B8"/>
+                </a:solidFill>
+              </a:defRPr>
+            </a:pPr>
+            <a:r>
+              <a:t>Variable width crop</a:t>
+            </a:r>
+          </a:p>
+        </p:txBody>
+      </p:sp>
+      <p:sp>
+        <p:nvSpPr>
+          <p:cNvPr id="7" name="Rounded Rectangle 6"/>
           <p:cNvSpPr/>
           <p:nvPr/>
         </p:nvSpPr>
         <p:spPr>
           <a:xfrm>
             <a:off x="2542032" y="1828800"/>
-            <a:ext cx="1645920" cy="2834640"/>
+            <a:ext cx="1645920" cy="2560320"/>
           </a:xfrm>
           <a:prstGeom prst="roundRect">
             <a:avLst/>
           </a:prstGeom>
           <a:solidFill>
-            <a:srgbClr val="0B1936"/>
+            <a:srgbClr val="0A1630"/>
           </a:solidFill>
           <a:ln w="19050">
             <a:solidFill>
@@ -8526,67 +8212,14 @@
       </p:sp>
       <p:sp>
         <p:nvSpPr>
-          <p:cNvPr id="11" name="Oval 10"/>
-          <p:cNvSpPr/>
-          <p:nvPr/>
-        </p:nvSpPr>
-        <p:spPr>
-          <a:xfrm>
-            <a:off x="2679192" y="1965960"/>
-            <a:ext cx="475488" cy="475488"/>
-          </a:xfrm>
-          <a:prstGeom prst="ellipse">
-            <a:avLst/>
-          </a:prstGeom>
-          <a:solidFill>
-            <a:srgbClr val="2563EB"/>
-          </a:solidFill>
-          <a:ln>
-            <a:noFill/>
-          </a:ln>
-        </p:spPr>
-        <p:style>
-          <a:lnRef idx="1">
-            <a:schemeClr val="accent1"/>
-          </a:lnRef>
-          <a:fillRef idx="3">
-            <a:schemeClr val="accent1"/>
-          </a:fillRef>
-          <a:effectRef idx="2">
-            <a:schemeClr val="accent1"/>
-          </a:effectRef>
-          <a:fontRef idx="minor">
-            <a:schemeClr val="lt1"/>
-          </a:fontRef>
-        </p:style>
-        <p:txBody>
-          <a:bodyPr rtlCol="0" anchor="ctr" tIns="0" bIns="0" lIns="0" rIns="0"/>
-          <a:lstStyle/>
-          <a:p>
-            <a:pPr algn="ctr">
-              <a:defRPr sz="1200" b="1">
-                <a:solidFill>
-                  <a:srgbClr val="FFFFFF"/>
-                </a:solidFill>
-                <a:latin typeface="Arial"/>
-              </a:defRPr>
-            </a:pPr>
-            <a:r>
-              <a:t>2</a:t>
-            </a:r>
-          </a:p>
-        </p:txBody>
-      </p:sp>
-      <p:sp>
-        <p:nvSpPr>
-          <p:cNvPr id="12" name="TextBox 11"/>
+          <p:cNvPr id="8" name="TextBox 7"/>
           <p:cNvSpPr txBox="1"/>
           <p:nvPr/>
         </p:nvSpPr>
         <p:spPr>
           <a:xfrm>
-            <a:off x="2633472" y="2514600"/>
-            <a:ext cx="1463040" cy="640080"/>
+            <a:off x="2633472" y="2011680"/>
+            <a:ext cx="1463040" cy="2194560"/>
           </a:xfrm>
           <a:prstGeom prst="rect">
             <a:avLst/>
@@ -8600,108 +8233,64 @@
           <a:lstStyle/>
           <a:p>
             <a:pPr algn="ctr">
-              <a:defRPr sz="1200" b="1">
+              <a:defRPr sz="1400" b="1">
+                <a:solidFill>
+                  <a:srgbClr val="38BDF8"/>
+                </a:solidFill>
+              </a:defRPr>
+            </a:pPr>
+            <a:r>
+              <a:t>2. Normalize</a:t>
+            </a:r>
+          </a:p>
+          <a:p>
+            <a:pPr algn="ctr">
+              <a:spcBef>
+                <a:spcPts val="1000"/>
+              </a:spcBef>
+              <a:defRPr sz="1300" b="1">
                 <a:solidFill>
                   <a:srgbClr val="FFFFFF"/>
                 </a:solidFill>
               </a:defRPr>
             </a:pPr>
             <a:r>
-              <a:t>Preprocessing</a:t>
-            </a:r>
-          </a:p>
-        </p:txBody>
-      </p:sp>
-      <p:sp>
-        <p:nvSpPr>
-          <p:cNvPr id="13" name="TextBox 12"/>
-          <p:cNvSpPr txBox="1"/>
-          <p:nvPr/>
-        </p:nvSpPr>
-        <p:spPr>
-          <a:xfrm>
-            <a:off x="2633472" y="3200400"/>
-            <a:ext cx="1463040" cy="1280160"/>
-          </a:xfrm>
-          <a:prstGeom prst="rect">
-            <a:avLst/>
-          </a:prstGeom>
-          <a:noFill/>
-        </p:spPr>
-        <p:txBody>
-          <a:bodyPr wrap="square">
-            <a:spAutoFit/>
-          </a:bodyPr>
-          <a:lstStyle/>
+              <a:t>Height 48px</a:t>
+            </a:r>
+          </a:p>
           <a:p>
             <a:pPr algn="ctr">
+              <a:spcBef>
+                <a:spcPts val="600"/>
+              </a:spcBef>
               <a:defRPr sz="1000">
                 <a:solidFill>
-                  <a:srgbClr val="CBD5E1"/>
-                </a:solidFill>
-              </a:defRPr>
-            </a:pPr>
-            <a:r>
-              <a:t>Resize height 48px</a:t>
-            </a:r>
-            <a:br/>
-            <a:r>
-              <a:t>Keep aspect ratio &amp; pad</a:t>
-            </a:r>
-          </a:p>
-        </p:txBody>
-      </p:sp>
-      <p:sp>
-        <p:nvSpPr>
-          <p:cNvPr id="14" name="TextBox 13"/>
-          <p:cNvSpPr txBox="1"/>
-          <p:nvPr/>
-        </p:nvSpPr>
-        <p:spPr>
-          <a:xfrm>
-            <a:off x="4187952" y="2926080"/>
-            <a:ext cx="164592" cy="457200"/>
-          </a:xfrm>
-          <a:prstGeom prst="rect">
-            <a:avLst/>
-          </a:prstGeom>
-          <a:noFill/>
-        </p:spPr>
-        <p:txBody>
-          <a:bodyPr wrap="none">
-            <a:spAutoFit/>
-          </a:bodyPr>
-          <a:lstStyle/>
-          <a:p>
-            <a:pPr>
-              <a:defRPr sz="1400">
-                <a:solidFill>
-                  <a:srgbClr val="38BDF8"/>
-                </a:solidFill>
-              </a:defRPr>
-            </a:pPr>
-            <a:r>
-              <a:t>➔</a:t>
-            </a:r>
-          </a:p>
-        </p:txBody>
-      </p:sp>
-      <p:sp>
-        <p:nvSpPr>
-          <p:cNvPr id="15" name="Rounded Rectangle 14"/>
+                  <a:srgbClr val="94A3B8"/>
+                </a:solidFill>
+              </a:defRPr>
+            </a:pPr>
+            <a:r>
+              <a:t>Preserve aspect ratio</a:t>
+            </a:r>
+          </a:p>
+        </p:txBody>
+      </p:sp>
+      <p:sp>
+        <p:nvSpPr>
+          <p:cNvPr id="9" name="Rounded Rectangle 8"/>
           <p:cNvSpPr/>
           <p:nvPr/>
         </p:nvSpPr>
         <p:spPr>
           <a:xfrm>
             <a:off x="4352544" y="1828800"/>
-            <a:ext cx="1645920" cy="2834640"/>
+            <a:ext cx="1645920" cy="2560320"/>
           </a:xfrm>
           <a:prstGeom prst="roundRect">
             <a:avLst/>
           </a:prstGeom>
           <a:solidFill>
-            <a:srgbClr val="0B1936"/>
+            <a:srgbClr val="0A1630"/>
           </a:solidFill>
           <a:ln w="19050">
             <a:solidFill>
@@ -8733,67 +8322,14 @@
       </p:sp>
       <p:sp>
         <p:nvSpPr>
-          <p:cNvPr id="16" name="Oval 15"/>
-          <p:cNvSpPr/>
-          <p:nvPr/>
-        </p:nvSpPr>
-        <p:spPr>
-          <a:xfrm>
-            <a:off x="4489704" y="1965960"/>
-            <a:ext cx="475488" cy="475488"/>
-          </a:xfrm>
-          <a:prstGeom prst="ellipse">
-            <a:avLst/>
-          </a:prstGeom>
-          <a:solidFill>
-            <a:srgbClr val="2563EB"/>
-          </a:solidFill>
-          <a:ln>
-            <a:noFill/>
-          </a:ln>
-        </p:spPr>
-        <p:style>
-          <a:lnRef idx="1">
-            <a:schemeClr val="accent1"/>
-          </a:lnRef>
-          <a:fillRef idx="3">
-            <a:schemeClr val="accent1"/>
-          </a:fillRef>
-          <a:effectRef idx="2">
-            <a:schemeClr val="accent1"/>
-          </a:effectRef>
-          <a:fontRef idx="minor">
-            <a:schemeClr val="lt1"/>
-          </a:fontRef>
-        </p:style>
-        <p:txBody>
-          <a:bodyPr rtlCol="0" anchor="ctr" tIns="0" bIns="0" lIns="0" rIns="0"/>
-          <a:lstStyle/>
-          <a:p>
-            <a:pPr algn="ctr">
-              <a:defRPr sz="1200" b="1">
-                <a:solidFill>
-                  <a:srgbClr val="FFFFFF"/>
-                </a:solidFill>
-                <a:latin typeface="Arial"/>
-              </a:defRPr>
-            </a:pPr>
-            <a:r>
-              <a:t>3</a:t>
-            </a:r>
-          </a:p>
-        </p:txBody>
-      </p:sp>
-      <p:sp>
-        <p:nvSpPr>
-          <p:cNvPr id="17" name="TextBox 16"/>
+          <p:cNvPr id="10" name="TextBox 9"/>
           <p:cNvSpPr txBox="1"/>
           <p:nvPr/>
         </p:nvSpPr>
         <p:spPr>
           <a:xfrm>
-            <a:off x="4443984" y="2514600"/>
-            <a:ext cx="1463040" cy="640080"/>
+            <a:off x="4443984" y="2011680"/>
+            <a:ext cx="1463040" cy="2194560"/>
           </a:xfrm>
           <a:prstGeom prst="rect">
             <a:avLst/>
@@ -8807,108 +8343,64 @@
           <a:lstStyle/>
           <a:p>
             <a:pPr algn="ctr">
-              <a:defRPr sz="1200" b="1">
+              <a:defRPr sz="1400" b="1">
+                <a:solidFill>
+                  <a:srgbClr val="38BDF8"/>
+                </a:solidFill>
+              </a:defRPr>
+            </a:pPr>
+            <a:r>
+              <a:t>3. CNN</a:t>
+            </a:r>
+          </a:p>
+          <a:p>
+            <a:pPr algn="ctr">
+              <a:spcBef>
+                <a:spcPts val="1000"/>
+              </a:spcBef>
+              <a:defRPr sz="1300" b="1">
                 <a:solidFill>
                   <a:srgbClr val="FFFFFF"/>
                 </a:solidFill>
               </a:defRPr>
             </a:pPr>
             <a:r>
-              <a:t>CNN Feature Ext.</a:t>
-            </a:r>
-          </a:p>
-        </p:txBody>
-      </p:sp>
-      <p:sp>
-        <p:nvSpPr>
-          <p:cNvPr id="18" name="TextBox 17"/>
-          <p:cNvSpPr txBox="1"/>
-          <p:nvPr/>
-        </p:nvSpPr>
-        <p:spPr>
-          <a:xfrm>
-            <a:off x="4443984" y="3200400"/>
-            <a:ext cx="1463040" cy="1280160"/>
-          </a:xfrm>
-          <a:prstGeom prst="rect">
-            <a:avLst/>
-          </a:prstGeom>
-          <a:noFill/>
-        </p:spPr>
-        <p:txBody>
-          <a:bodyPr wrap="square">
-            <a:spAutoFit/>
-          </a:bodyPr>
-          <a:lstStyle/>
+              <a:t>Feature Maps</a:t>
+            </a:r>
+          </a:p>
           <a:p>
             <a:pPr algn="ctr">
+              <a:spcBef>
+                <a:spcPts val="600"/>
+              </a:spcBef>
               <a:defRPr sz="1000">
                 <a:solidFill>
-                  <a:srgbClr val="CBD5E1"/>
-                </a:solidFill>
-              </a:defRPr>
-            </a:pPr>
-            <a:r>
-              <a:t>VGG or ResNet-18</a:t>
-            </a:r>
-            <a:br/>
-            <a:r>
-              <a:t>Extracts visual frames</a:t>
-            </a:r>
-          </a:p>
-        </p:txBody>
-      </p:sp>
-      <p:sp>
-        <p:nvSpPr>
-          <p:cNvPr id="19" name="TextBox 18"/>
-          <p:cNvSpPr txBox="1"/>
-          <p:nvPr/>
-        </p:nvSpPr>
-        <p:spPr>
-          <a:xfrm>
-            <a:off x="5998464" y="2926080"/>
-            <a:ext cx="164592" cy="457200"/>
-          </a:xfrm>
-          <a:prstGeom prst="rect">
-            <a:avLst/>
-          </a:prstGeom>
-          <a:noFill/>
-        </p:spPr>
-        <p:txBody>
-          <a:bodyPr wrap="none">
-            <a:spAutoFit/>
-          </a:bodyPr>
-          <a:lstStyle/>
-          <a:p>
-            <a:pPr>
-              <a:defRPr sz="1400">
-                <a:solidFill>
-                  <a:srgbClr val="38BDF8"/>
-                </a:solidFill>
-              </a:defRPr>
-            </a:pPr>
-            <a:r>
-              <a:t>➔</a:t>
-            </a:r>
-          </a:p>
-        </p:txBody>
-      </p:sp>
-      <p:sp>
-        <p:nvSpPr>
-          <p:cNvPr id="20" name="Rounded Rectangle 19"/>
+                  <a:srgbClr val="94A3B8"/>
+                </a:solidFill>
+              </a:defRPr>
+            </a:pPr>
+            <a:r>
+              <a:t>Asymmetric pool (2,1)</a:t>
+            </a:r>
+          </a:p>
+        </p:txBody>
+      </p:sp>
+      <p:sp>
+        <p:nvSpPr>
+          <p:cNvPr id="11" name="Rounded Rectangle 10"/>
           <p:cNvSpPr/>
           <p:nvPr/>
         </p:nvSpPr>
         <p:spPr>
           <a:xfrm>
             <a:off x="6163056" y="1828800"/>
-            <a:ext cx="1645920" cy="2834640"/>
+            <a:ext cx="1645920" cy="2560320"/>
           </a:xfrm>
           <a:prstGeom prst="roundRect">
             <a:avLst/>
           </a:prstGeom>
           <a:solidFill>
-            <a:srgbClr val="0B1936"/>
+            <a:srgbClr val="0A1630"/>
           </a:solidFill>
           <a:ln w="19050">
             <a:solidFill>
@@ -8940,67 +8432,14 @@
       </p:sp>
       <p:sp>
         <p:nvSpPr>
-          <p:cNvPr id="21" name="Oval 20"/>
-          <p:cNvSpPr/>
-          <p:nvPr/>
-        </p:nvSpPr>
-        <p:spPr>
-          <a:xfrm>
-            <a:off x="6300216" y="1965960"/>
-            <a:ext cx="475488" cy="475488"/>
-          </a:xfrm>
-          <a:prstGeom prst="ellipse">
-            <a:avLst/>
-          </a:prstGeom>
-          <a:solidFill>
-            <a:srgbClr val="2563EB"/>
-          </a:solidFill>
-          <a:ln>
-            <a:noFill/>
-          </a:ln>
-        </p:spPr>
-        <p:style>
-          <a:lnRef idx="1">
-            <a:schemeClr val="accent1"/>
-          </a:lnRef>
-          <a:fillRef idx="3">
-            <a:schemeClr val="accent1"/>
-          </a:fillRef>
-          <a:effectRef idx="2">
-            <a:schemeClr val="accent1"/>
-          </a:effectRef>
-          <a:fontRef idx="minor">
-            <a:schemeClr val="lt1"/>
-          </a:fontRef>
-        </p:style>
-        <p:txBody>
-          <a:bodyPr rtlCol="0" anchor="ctr" tIns="0" bIns="0" lIns="0" rIns="0"/>
-          <a:lstStyle/>
-          <a:p>
-            <a:pPr algn="ctr">
-              <a:defRPr sz="1200" b="1">
-                <a:solidFill>
-                  <a:srgbClr val="FFFFFF"/>
-                </a:solidFill>
-                <a:latin typeface="Arial"/>
-              </a:defRPr>
-            </a:pPr>
-            <a:r>
-              <a:t>4</a:t>
-            </a:r>
-          </a:p>
-        </p:txBody>
-      </p:sp>
-      <p:sp>
-        <p:nvSpPr>
-          <p:cNvPr id="22" name="TextBox 21"/>
+          <p:cNvPr id="12" name="TextBox 11"/>
           <p:cNvSpPr txBox="1"/>
           <p:nvPr/>
         </p:nvSpPr>
         <p:spPr>
           <a:xfrm>
-            <a:off x="6254496" y="2514600"/>
-            <a:ext cx="1463040" cy="640080"/>
+            <a:off x="6254496" y="2011680"/>
+            <a:ext cx="1463040" cy="2194560"/>
           </a:xfrm>
           <a:prstGeom prst="rect">
             <a:avLst/>
@@ -9014,108 +8453,64 @@
           <a:lstStyle/>
           <a:p>
             <a:pPr algn="ctr">
-              <a:defRPr sz="1200" b="1">
+              <a:defRPr sz="1400" b="1">
+                <a:solidFill>
+                  <a:srgbClr val="38BDF8"/>
+                </a:solidFill>
+              </a:defRPr>
+            </a:pPr>
+            <a:r>
+              <a:t>4. Sequence</a:t>
+            </a:r>
+          </a:p>
+          <a:p>
+            <a:pPr algn="ctr">
+              <a:spcBef>
+                <a:spcPts val="1000"/>
+              </a:spcBef>
+              <a:defRPr sz="1300" b="1">
                 <a:solidFill>
                   <a:srgbClr val="FFFFFF"/>
                 </a:solidFill>
               </a:defRPr>
             </a:pPr>
             <a:r>
-              <a:t>Sequence Model</a:t>
-            </a:r>
-          </a:p>
-        </p:txBody>
-      </p:sp>
-      <p:sp>
-        <p:nvSpPr>
-          <p:cNvPr id="23" name="TextBox 22"/>
-          <p:cNvSpPr txBox="1"/>
-          <p:nvPr/>
-        </p:nvSpPr>
-        <p:spPr>
-          <a:xfrm>
-            <a:off x="6254496" y="3200400"/>
-            <a:ext cx="1463040" cy="1280160"/>
-          </a:xfrm>
-          <a:prstGeom prst="rect">
-            <a:avLst/>
-          </a:prstGeom>
-          <a:noFill/>
-        </p:spPr>
-        <p:txBody>
-          <a:bodyPr wrap="square">
-            <a:spAutoFit/>
-          </a:bodyPr>
-          <a:lstStyle/>
+              <a:t>BiLSTM / Transf.</a:t>
+            </a:r>
+          </a:p>
           <a:p>
             <a:pPr algn="ctr">
+              <a:spcBef>
+                <a:spcPts val="600"/>
+              </a:spcBef>
               <a:defRPr sz="1000">
                 <a:solidFill>
-                  <a:srgbClr val="CBD5E1"/>
-                </a:solidFill>
-              </a:defRPr>
-            </a:pPr>
-            <a:r>
-              <a:t>BiLSTM or Transformer</a:t>
-            </a:r>
-            <a:br/>
-            <a:r>
-              <a:t>Models sequence context</a:t>
-            </a:r>
-          </a:p>
-        </p:txBody>
-      </p:sp>
-      <p:sp>
-        <p:nvSpPr>
-          <p:cNvPr id="24" name="TextBox 23"/>
-          <p:cNvSpPr txBox="1"/>
-          <p:nvPr/>
-        </p:nvSpPr>
-        <p:spPr>
-          <a:xfrm>
-            <a:off x="7808976" y="2926080"/>
-            <a:ext cx="164592" cy="457200"/>
-          </a:xfrm>
-          <a:prstGeom prst="rect">
-            <a:avLst/>
-          </a:prstGeom>
-          <a:noFill/>
-        </p:spPr>
-        <p:txBody>
-          <a:bodyPr wrap="none">
-            <a:spAutoFit/>
-          </a:bodyPr>
-          <a:lstStyle/>
-          <a:p>
-            <a:pPr>
-              <a:defRPr sz="1400">
-                <a:solidFill>
-                  <a:srgbClr val="38BDF8"/>
-                </a:solidFill>
-              </a:defRPr>
-            </a:pPr>
-            <a:r>
-              <a:t>➔</a:t>
-            </a:r>
-          </a:p>
-        </p:txBody>
-      </p:sp>
-      <p:sp>
-        <p:nvSpPr>
-          <p:cNvPr id="25" name="Rounded Rectangle 24"/>
+                  <a:srgbClr val="94A3B8"/>
+                </a:solidFill>
+              </a:defRPr>
+            </a:pPr>
+            <a:r>
+              <a:t>Temporal context</a:t>
+            </a:r>
+          </a:p>
+        </p:txBody>
+      </p:sp>
+      <p:sp>
+        <p:nvSpPr>
+          <p:cNvPr id="13" name="Rounded Rectangle 12"/>
           <p:cNvSpPr/>
           <p:nvPr/>
         </p:nvSpPr>
         <p:spPr>
           <a:xfrm>
             <a:off x="7973568" y="1828800"/>
-            <a:ext cx="1645920" cy="2834640"/>
+            <a:ext cx="1645920" cy="2560320"/>
           </a:xfrm>
           <a:prstGeom prst="roundRect">
             <a:avLst/>
           </a:prstGeom>
           <a:solidFill>
-            <a:srgbClr val="0B1936"/>
+            <a:srgbClr val="0A1630"/>
           </a:solidFill>
           <a:ln w="19050">
             <a:solidFill>
@@ -9147,67 +8542,14 @@
       </p:sp>
       <p:sp>
         <p:nvSpPr>
-          <p:cNvPr id="26" name="Oval 25"/>
-          <p:cNvSpPr/>
-          <p:nvPr/>
-        </p:nvSpPr>
-        <p:spPr>
-          <a:xfrm>
-            <a:off x="8110728" y="1965960"/>
-            <a:ext cx="475488" cy="475488"/>
-          </a:xfrm>
-          <a:prstGeom prst="ellipse">
-            <a:avLst/>
-          </a:prstGeom>
-          <a:solidFill>
-            <a:srgbClr val="2563EB"/>
-          </a:solidFill>
-          <a:ln>
-            <a:noFill/>
-          </a:ln>
-        </p:spPr>
-        <p:style>
-          <a:lnRef idx="1">
-            <a:schemeClr val="accent1"/>
-          </a:lnRef>
-          <a:fillRef idx="3">
-            <a:schemeClr val="accent1"/>
-          </a:fillRef>
-          <a:effectRef idx="2">
-            <a:schemeClr val="accent1"/>
-          </a:effectRef>
-          <a:fontRef idx="minor">
-            <a:schemeClr val="lt1"/>
-          </a:fontRef>
-        </p:style>
-        <p:txBody>
-          <a:bodyPr rtlCol="0" anchor="ctr" tIns="0" bIns="0" lIns="0" rIns="0"/>
-          <a:lstStyle/>
-          <a:p>
-            <a:pPr algn="ctr">
-              <a:defRPr sz="1200" b="1">
-                <a:solidFill>
-                  <a:srgbClr val="FFFFFF"/>
-                </a:solidFill>
-                <a:latin typeface="Arial"/>
-              </a:defRPr>
-            </a:pPr>
-            <a:r>
-              <a:t>5</a:t>
-            </a:r>
-          </a:p>
-        </p:txBody>
-      </p:sp>
-      <p:sp>
-        <p:nvSpPr>
-          <p:cNvPr id="27" name="TextBox 26"/>
+          <p:cNvPr id="14" name="TextBox 13"/>
           <p:cNvSpPr txBox="1"/>
           <p:nvPr/>
         </p:nvSpPr>
         <p:spPr>
           <a:xfrm>
-            <a:off x="8065008" y="2514600"/>
-            <a:ext cx="1463040" cy="640080"/>
+            <a:off x="8065008" y="2011680"/>
+            <a:ext cx="1463040" cy="2194560"/>
           </a:xfrm>
           <a:prstGeom prst="rect">
             <a:avLst/>
@@ -9221,108 +8563,64 @@
           <a:lstStyle/>
           <a:p>
             <a:pPr algn="ctr">
-              <a:defRPr sz="1200" b="1">
+              <a:defRPr sz="1400" b="1">
+                <a:solidFill>
+                  <a:srgbClr val="38BDF8"/>
+                </a:solidFill>
+              </a:defRPr>
+            </a:pPr>
+            <a:r>
+              <a:t>5. CTC Head</a:t>
+            </a:r>
+          </a:p>
+          <a:p>
+            <a:pPr algn="ctr">
+              <a:spcBef>
+                <a:spcPts val="1000"/>
+              </a:spcBef>
+              <a:defRPr sz="1300" b="1">
                 <a:solidFill>
                   <a:srgbClr val="FFFFFF"/>
                 </a:solidFill>
               </a:defRPr>
             </a:pPr>
             <a:r>
-              <a:t>CTC Decoding</a:t>
-            </a:r>
-          </a:p>
-        </p:txBody>
-      </p:sp>
-      <p:sp>
-        <p:nvSpPr>
-          <p:cNvPr id="28" name="TextBox 27"/>
-          <p:cNvSpPr txBox="1"/>
-          <p:nvPr/>
-        </p:nvSpPr>
-        <p:spPr>
-          <a:xfrm>
-            <a:off x="8065008" y="3200400"/>
-            <a:ext cx="1463040" cy="1280160"/>
-          </a:xfrm>
-          <a:prstGeom prst="rect">
-            <a:avLst/>
-          </a:prstGeom>
-          <a:noFill/>
-        </p:spPr>
-        <p:txBody>
-          <a:bodyPr wrap="square">
-            <a:spAutoFit/>
-          </a:bodyPr>
-          <a:lstStyle/>
+              <a:t>87 Classes</a:t>
+            </a:r>
+          </a:p>
           <a:p>
             <a:pPr algn="ctr">
+              <a:spcBef>
+                <a:spcPts val="600"/>
+              </a:spcBef>
               <a:defRPr sz="1000">
                 <a:solidFill>
-                  <a:srgbClr val="CBD5E1"/>
-                </a:solidFill>
-              </a:defRPr>
-            </a:pPr>
-            <a:r>
-              <a:t>CTC greedy decoding</a:t>
-            </a:r>
-            <a:br/>
-            <a:r>
-              <a:t>(no character boxes)</a:t>
-            </a:r>
-          </a:p>
-        </p:txBody>
-      </p:sp>
-      <p:sp>
-        <p:nvSpPr>
-          <p:cNvPr id="29" name="TextBox 28"/>
-          <p:cNvSpPr txBox="1"/>
-          <p:nvPr/>
-        </p:nvSpPr>
-        <p:spPr>
-          <a:xfrm>
-            <a:off x="9619488" y="2926080"/>
-            <a:ext cx="164592" cy="457200"/>
-          </a:xfrm>
-          <a:prstGeom prst="rect">
-            <a:avLst/>
-          </a:prstGeom>
-          <a:noFill/>
-        </p:spPr>
-        <p:txBody>
-          <a:bodyPr wrap="none">
-            <a:spAutoFit/>
-          </a:bodyPr>
-          <a:lstStyle/>
-          <a:p>
-            <a:pPr>
-              <a:defRPr sz="1400">
-                <a:solidFill>
-                  <a:srgbClr val="38BDF8"/>
-                </a:solidFill>
-              </a:defRPr>
-            </a:pPr>
-            <a:r>
-              <a:t>➔</a:t>
-            </a:r>
-          </a:p>
-        </p:txBody>
-      </p:sp>
-      <p:sp>
-        <p:nvSpPr>
-          <p:cNvPr id="30" name="Rounded Rectangle 29"/>
+                  <a:srgbClr val="94A3B8"/>
+                </a:solidFill>
+              </a:defRPr>
+            </a:pPr>
+            <a:r>
+              <a:t>Greedy decode</a:t>
+            </a:r>
+          </a:p>
+        </p:txBody>
+      </p:sp>
+      <p:sp>
+        <p:nvSpPr>
+          <p:cNvPr id="15" name="Rounded Rectangle 14"/>
           <p:cNvSpPr/>
           <p:nvPr/>
         </p:nvSpPr>
         <p:spPr>
           <a:xfrm>
             <a:off x="9784080" y="1828800"/>
-            <a:ext cx="1645920" cy="2834640"/>
+            <a:ext cx="1645920" cy="2560320"/>
           </a:xfrm>
           <a:prstGeom prst="roundRect">
             <a:avLst/>
           </a:prstGeom>
           <a:solidFill>
-            <a:srgbClr val="0B1936"/>
+            <a:srgbClr val="0A1630"/>
           </a:solidFill>
           <a:ln w="19050">
             <a:solidFill>
@@ -9354,67 +8652,14 @@
       </p:sp>
       <p:sp>
         <p:nvSpPr>
-          <p:cNvPr id="31" name="Oval 30"/>
-          <p:cNvSpPr/>
-          <p:nvPr/>
-        </p:nvSpPr>
-        <p:spPr>
-          <a:xfrm>
-            <a:off x="9921240" y="1965960"/>
-            <a:ext cx="475488" cy="475488"/>
-          </a:xfrm>
-          <a:prstGeom prst="ellipse">
-            <a:avLst/>
-          </a:prstGeom>
-          <a:solidFill>
-            <a:srgbClr val="2563EB"/>
-          </a:solidFill>
-          <a:ln>
-            <a:noFill/>
-          </a:ln>
-        </p:spPr>
-        <p:style>
-          <a:lnRef idx="1">
-            <a:schemeClr val="accent1"/>
-          </a:lnRef>
-          <a:fillRef idx="3">
-            <a:schemeClr val="accent1"/>
-          </a:fillRef>
-          <a:effectRef idx="2">
-            <a:schemeClr val="accent1"/>
-          </a:effectRef>
-          <a:fontRef idx="minor">
-            <a:schemeClr val="lt1"/>
-          </a:fontRef>
-        </p:style>
-        <p:txBody>
-          <a:bodyPr rtlCol="0" anchor="ctr" tIns="0" bIns="0" lIns="0" rIns="0"/>
-          <a:lstStyle/>
-          <a:p>
-            <a:pPr algn="ctr">
-              <a:defRPr sz="1200" b="1">
-                <a:solidFill>
-                  <a:srgbClr val="FFFFFF"/>
-                </a:solidFill>
-                <a:latin typeface="Arial"/>
-              </a:defRPr>
-            </a:pPr>
-            <a:r>
-              <a:t>6</a:t>
-            </a:r>
-          </a:p>
-        </p:txBody>
-      </p:sp>
-      <p:sp>
-        <p:nvSpPr>
-          <p:cNvPr id="32" name="TextBox 31"/>
+          <p:cNvPr id="16" name="TextBox 15"/>
           <p:cNvSpPr txBox="1"/>
           <p:nvPr/>
         </p:nvSpPr>
         <p:spPr>
           <a:xfrm>
-            <a:off x="9875520" y="2514600"/>
-            <a:ext cx="1463040" cy="640080"/>
+            <a:off x="9875520" y="2011680"/>
+            <a:ext cx="1463040" cy="2194560"/>
           </a:xfrm>
           <a:prstGeom prst="rect">
             <a:avLst/>
@@ -9428,73 +8673,64 @@
           <a:lstStyle/>
           <a:p>
             <a:pPr algn="ctr">
-              <a:defRPr sz="1200" b="1">
+              <a:defRPr sz="1400" b="1">
+                <a:solidFill>
+                  <a:srgbClr val="38BDF8"/>
+                </a:solidFill>
+              </a:defRPr>
+            </a:pPr>
+            <a:r>
+              <a:t>6. Text</a:t>
+            </a:r>
+          </a:p>
+          <a:p>
+            <a:pPr algn="ctr">
+              <a:spcBef>
+                <a:spcPts val="1000"/>
+              </a:spcBef>
+              <a:defRPr sz="1300" b="1">
                 <a:solidFill>
                   <a:srgbClr val="FFFFFF"/>
                 </a:solidFill>
               </a:defRPr>
             </a:pPr>
             <a:r>
-              <a:t>Output Text</a:t>
-            </a:r>
-          </a:p>
-        </p:txBody>
-      </p:sp>
-      <p:sp>
-        <p:nvSpPr>
-          <p:cNvPr id="33" name="TextBox 32"/>
-          <p:cNvSpPr txBox="1"/>
-          <p:nvPr/>
-        </p:nvSpPr>
-        <p:spPr>
-          <a:xfrm>
-            <a:off x="9875520" y="3200400"/>
-            <a:ext cx="1463040" cy="1280160"/>
-          </a:xfrm>
-          <a:prstGeom prst="rect">
-            <a:avLst/>
-          </a:prstGeom>
-          <a:noFill/>
-        </p:spPr>
-        <p:txBody>
-          <a:bodyPr wrap="square">
-            <a:spAutoFit/>
-          </a:bodyPr>
-          <a:lstStyle/>
+              <a:t>Unicode Output</a:t>
+            </a:r>
+          </a:p>
           <a:p>
             <a:pPr algn="ctr">
+              <a:spcBef>
+                <a:spcPts val="600"/>
+              </a:spcBef>
               <a:defRPr sz="1000">
                 <a:solidFill>
-                  <a:srgbClr val="CBD5E1"/>
-                </a:solidFill>
-              </a:defRPr>
-            </a:pPr>
-            <a:r>
-              <a:t>Khmer Unicode text</a:t>
-            </a:r>
-            <a:br/>
-            <a:r>
-              <a:t>(NFC normalized)</a:t>
-            </a:r>
-          </a:p>
-        </p:txBody>
-      </p:sp>
-      <p:sp>
-        <p:nvSpPr>
-          <p:cNvPr id="34" name="Rounded Rectangle 33"/>
+                  <a:srgbClr val="94A3B8"/>
+                </a:solidFill>
+              </a:defRPr>
+            </a:pPr>
+            <a:r>
+              <a:t>NFC normalized</a:t>
+            </a:r>
+          </a:p>
+        </p:txBody>
+      </p:sp>
+      <p:sp>
+        <p:nvSpPr>
+          <p:cNvPr id="17" name="Rounded Rectangle 16"/>
           <p:cNvSpPr/>
           <p:nvPr/>
         </p:nvSpPr>
         <p:spPr>
           <a:xfrm>
-            <a:off x="731520" y="4846320"/>
-            <a:ext cx="10728655" cy="1554480"/>
+            <a:off x="731520" y="4663440"/>
+            <a:ext cx="3413455" cy="1737360"/>
           </a:xfrm>
           <a:prstGeom prst="roundRect">
             <a:avLst/>
           </a:prstGeom>
           <a:solidFill>
-            <a:srgbClr val="0B1936"/>
+            <a:srgbClr val="0A1630"/>
           </a:solidFill>
           <a:ln w="19050">
             <a:solidFill>
@@ -9526,14 +8762,14 @@
       </p:sp>
       <p:sp>
         <p:nvSpPr>
-          <p:cNvPr id="35" name="TextBox 34"/>
+          <p:cNvPr id="18" name="TextBox 17"/>
           <p:cNvSpPr txBox="1"/>
           <p:nvPr/>
         </p:nvSpPr>
         <p:spPr>
           <a:xfrm>
-            <a:off x="914400" y="4937760"/>
-            <a:ext cx="10332720" cy="1371600"/>
+            <a:off x="868680" y="4800600"/>
+            <a:ext cx="3139135" cy="1463040"/>
           </a:xfrm>
           <a:prstGeom prst="rect">
             <a:avLst/>
@@ -9547,14 +8783,14 @@
           <a:lstStyle/>
           <a:p>
             <a:pPr>
-              <a:defRPr sz="1300" b="1">
+              <a:defRPr sz="1200" b="1">
                 <a:solidFill>
                   <a:srgbClr val="38BDF8"/>
                 </a:solidFill>
               </a:defRPr>
             </a:pPr>
             <a:r>
-              <a:t>Key Pipeline Principles</a:t>
+              <a:t>Input Normalization</a:t>
             </a:r>
           </a:p>
           <a:p>
@@ -9564,20 +8800,202 @@
               </a:spcBef>
               <a:defRPr sz="1050">
                 <a:solidFill>
-                  <a:srgbClr val="CBD5E1"/>
-                </a:solidFill>
-              </a:defRPr>
-            </a:pPr>
-            <a:r>
-              <a:t>● Input Normalization: Grayscale 1-channel, height 48px, horizontal max width 1600px with aspect-ratio preservation.</a:t>
-            </a:r>
-            <a:br/>
-            <a:r>
-              <a:t>● Vocabulary: 86 Khmer Unicode NFC code-points (33 consonants, 15 independent vowels, 16 dependent vowels, 14 diacritics, 8 digits/punctuation, index 0 reserved for CTC &lt;blank&gt;).</a:t>
-            </a:r>
-            <a:br/>
-            <a:r>
-              <a:t>● Post-Processing: Orthographic cleaner fixes invalid duplicate vowels and misplaced diacritics.</a:t>
+                  <a:srgbClr val="E2E8F0"/>
+                </a:solidFill>
+              </a:defRPr>
+            </a:pPr>
+            <a:r>
+              <a:t>Grayscale 1-channel, height 48px, horizontal max width 1600px with zero vertical squishing.</a:t>
+            </a:r>
+          </a:p>
+        </p:txBody>
+      </p:sp>
+      <p:sp>
+        <p:nvSpPr>
+          <p:cNvPr id="19" name="Rounded Rectangle 18"/>
+          <p:cNvSpPr/>
+          <p:nvPr/>
+        </p:nvSpPr>
+        <p:spPr>
+          <a:xfrm>
+            <a:off x="4388205" y="4663440"/>
+            <a:ext cx="3413455" cy="1737360"/>
+          </a:xfrm>
+          <a:prstGeom prst="roundRect">
+            <a:avLst/>
+          </a:prstGeom>
+          <a:solidFill>
+            <a:srgbClr val="0A1630"/>
+          </a:solidFill>
+          <a:ln w="19050">
+            <a:solidFill>
+              <a:srgbClr val="1E40AF"/>
+            </a:solidFill>
+          </a:ln>
+        </p:spPr>
+        <p:style>
+          <a:lnRef idx="1">
+            <a:schemeClr val="accent1"/>
+          </a:lnRef>
+          <a:fillRef idx="3">
+            <a:schemeClr val="accent1"/>
+          </a:fillRef>
+          <a:effectRef idx="2">
+            <a:schemeClr val="accent1"/>
+          </a:effectRef>
+          <a:fontRef idx="minor">
+            <a:schemeClr val="lt1"/>
+          </a:fontRef>
+        </p:style>
+        <p:txBody>
+          <a:bodyPr rtlCol="0" anchor="ctr"/>
+          <a:lstStyle/>
+          <a:p>
+            <a:pPr algn="ctr"/>
+          </a:p>
+        </p:txBody>
+      </p:sp>
+      <p:sp>
+        <p:nvSpPr>
+          <p:cNvPr id="20" name="TextBox 19"/>
+          <p:cNvSpPr txBox="1"/>
+          <p:nvPr/>
+        </p:nvSpPr>
+        <p:spPr>
+          <a:xfrm>
+            <a:off x="4525365" y="4800600"/>
+            <a:ext cx="3139135" cy="1463040"/>
+          </a:xfrm>
+          <a:prstGeom prst="rect">
+            <a:avLst/>
+          </a:prstGeom>
+          <a:noFill/>
+        </p:spPr>
+        <p:txBody>
+          <a:bodyPr wrap="square">
+            <a:spAutoFit/>
+          </a:bodyPr>
+          <a:lstStyle/>
+          <a:p>
+            <a:pPr>
+              <a:defRPr sz="1200" b="1">
+                <a:solidFill>
+                  <a:srgbClr val="38BDF8"/>
+                </a:solidFill>
+              </a:defRPr>
+            </a:pPr>
+            <a:r>
+              <a:t>Unicode NFC Vocabulary</a:t>
+            </a:r>
+          </a:p>
+          <a:p>
+            <a:pPr>
+              <a:spcBef>
+                <a:spcPts val="400"/>
+              </a:spcBef>
+              <a:defRPr sz="1050">
+                <a:solidFill>
+                  <a:srgbClr val="E2E8F0"/>
+                </a:solidFill>
+              </a:defRPr>
+            </a:pPr>
+            <a:r>
+              <a:t>86 total classes (33 consonants, 31 vowels/diacritics, 8 punctuation + Index 0 for CTC &lt;blank&gt;).</a:t>
+            </a:r>
+          </a:p>
+        </p:txBody>
+      </p:sp>
+      <p:sp>
+        <p:nvSpPr>
+          <p:cNvPr id="21" name="Rounded Rectangle 20"/>
+          <p:cNvSpPr/>
+          <p:nvPr/>
+        </p:nvSpPr>
+        <p:spPr>
+          <a:xfrm>
+            <a:off x="8044890" y="4663440"/>
+            <a:ext cx="3413455" cy="1737360"/>
+          </a:xfrm>
+          <a:prstGeom prst="roundRect">
+            <a:avLst/>
+          </a:prstGeom>
+          <a:solidFill>
+            <a:srgbClr val="0A1630"/>
+          </a:solidFill>
+          <a:ln w="19050">
+            <a:solidFill>
+              <a:srgbClr val="1E40AF"/>
+            </a:solidFill>
+          </a:ln>
+        </p:spPr>
+        <p:style>
+          <a:lnRef idx="1">
+            <a:schemeClr val="accent1"/>
+          </a:lnRef>
+          <a:fillRef idx="3">
+            <a:schemeClr val="accent1"/>
+          </a:fillRef>
+          <a:effectRef idx="2">
+            <a:schemeClr val="accent1"/>
+          </a:effectRef>
+          <a:fontRef idx="minor">
+            <a:schemeClr val="lt1"/>
+          </a:fontRef>
+        </p:style>
+        <p:txBody>
+          <a:bodyPr rtlCol="0" anchor="ctr"/>
+          <a:lstStyle/>
+          <a:p>
+            <a:pPr algn="ctr"/>
+          </a:p>
+        </p:txBody>
+      </p:sp>
+      <p:sp>
+        <p:nvSpPr>
+          <p:cNvPr id="22" name="TextBox 21"/>
+          <p:cNvSpPr txBox="1"/>
+          <p:nvPr/>
+        </p:nvSpPr>
+        <p:spPr>
+          <a:xfrm>
+            <a:off x="8182050" y="4800600"/>
+            <a:ext cx="3139135" cy="1463040"/>
+          </a:xfrm>
+          <a:prstGeom prst="rect">
+            <a:avLst/>
+          </a:prstGeom>
+          <a:noFill/>
+        </p:spPr>
+        <p:txBody>
+          <a:bodyPr wrap="square">
+            <a:spAutoFit/>
+          </a:bodyPr>
+          <a:lstStyle/>
+          <a:p>
+            <a:pPr>
+              <a:defRPr sz="1200" b="1">
+                <a:solidFill>
+                  <a:srgbClr val="38BDF8"/>
+                </a:solidFill>
+              </a:defRPr>
+            </a:pPr>
+            <a:r>
+              <a:t>Orthographic Rule Cleaner</a:t>
+            </a:r>
+          </a:p>
+          <a:p>
+            <a:pPr>
+              <a:spcBef>
+                <a:spcPts val="400"/>
+              </a:spcBef>
+              <a:defRPr sz="1050">
+                <a:solidFill>
+                  <a:srgbClr val="E2E8F0"/>
+                </a:solidFill>
+              </a:defRPr>
+            </a:pPr>
+            <a:r>
+              <a:t>Deterministic rule cleaner fixes duplicate vowels, invalid coeng stacking, and diacritic ordering.</a:t>
             </a:r>
           </a:p>
         </p:txBody>
@@ -9632,8 +9050,8 @@
         </p:nvSpPr>
         <p:spPr>
           <a:xfrm>
-            <a:off x="731520" y="411480"/>
-            <a:ext cx="2377440" cy="347472"/>
+            <a:off x="731520" y="384048"/>
+            <a:ext cx="2560320" cy="329184"/>
           </a:xfrm>
           <a:prstGeom prst="roundRect">
             <a:avLst/>
@@ -9670,11 +9088,10 @@
                 <a:solidFill>
                   <a:srgbClr val="FFFFFF"/>
                 </a:solidFill>
-                <a:latin typeface="Arial"/>
-              </a:defRPr>
-            </a:pPr>
-            <a:r>
-              <a:t>04  DATASET</a:t>
+              </a:defRPr>
+            </a:pPr>
+            <a:r>
+              <a:t>04  DATASET INTEGRITY</a:t>
             </a:r>
           </a:p>
         </p:txBody>
@@ -9687,7 +9104,7 @@
         </p:nvSpPr>
         <p:spPr>
           <a:xfrm>
-            <a:off x="731520" y="868680"/>
+            <a:off x="731520" y="804672"/>
             <a:ext cx="10698480" cy="777240"/>
           </a:xfrm>
           <a:prstGeom prst="rect">
@@ -9706,34 +9123,31 @@
                 <a:solidFill>
                   <a:srgbClr val="FFFFFF"/>
                 </a:solidFill>
-                <a:latin typeface="Arial"/>
               </a:rPr>
-              <a:t>Dataset &amp; </a:t>
+              <a:t>Writer-Disjoint </a:t>
             </a:r>
             <a:r>
               <a:rPr sz="2800" b="1">
                 <a:solidFill>
                   <a:srgbClr val="38BDF8"/>
                 </a:solidFill>
-                <a:latin typeface="Arial"/>
               </a:rPr>
-              <a:t>Writer-Disjoint Split</a:t>
+              <a:t>Evaluation Protocol</a:t>
             </a:r>
           </a:p>
           <a:p>
             <a:pPr>
               <a:spcBef>
-                <a:spcPts val="400"/>
+                <a:spcPts val="300"/>
               </a:spcBef>
               <a:defRPr sz="1200">
                 <a:solidFill>
                   <a:srgbClr val="94A3B8"/>
                 </a:solidFill>
-                <a:latin typeface="Arial"/>
-              </a:defRPr>
-            </a:pPr>
-            <a:r>
-              <a:t>Training, validation and testing are performed on different writers to evaluate generalization.</a:t>
+              </a:defRPr>
+            </a:pPr>
+            <a:r>
+              <a:t>Zero writer data leakage: test writers never appear in training or validation splits.</a:t>
             </a:r>
           </a:p>
         </p:txBody>
@@ -9747,13 +9161,13 @@
         <p:spPr>
           <a:xfrm>
             <a:off x="731520" y="1737360"/>
-            <a:ext cx="2377440" cy="2194560"/>
+            <a:ext cx="2468880" cy="2103120"/>
           </a:xfrm>
           <a:prstGeom prst="roundRect">
             <a:avLst/>
           </a:prstGeom>
           <a:solidFill>
-            <a:srgbClr val="0B1936"/>
+            <a:srgbClr val="0A1630"/>
           </a:solidFill>
           <a:ln w="19050">
             <a:solidFill>
@@ -9792,7 +9206,7 @@
         <p:spPr>
           <a:xfrm>
             <a:off x="868680" y="1874519"/>
-            <a:ext cx="2103120" cy="1920240"/>
+            <a:ext cx="2194560" cy="1828800"/>
           </a:xfrm>
           <a:prstGeom prst="rect">
             <a:avLst/>
@@ -9806,7 +9220,7 @@
           <a:lstStyle/>
           <a:p>
             <a:pPr>
-              <a:defRPr sz="1300" b="1">
+              <a:defRPr sz="1200" b="1">
                 <a:solidFill>
                   <a:srgbClr val="38BDF8"/>
                 </a:solidFill>
@@ -9821,7 +9235,7 @@
               <a:spcBef>
                 <a:spcPts val="200"/>
               </a:spcBef>
-              <a:defRPr sz="3600" b="1">
+              <a:defRPr sz="4000" b="1">
                 <a:solidFill>
                   <a:srgbClr val="FFFFFF"/>
                 </a:solidFill>
@@ -9833,18 +9247,18 @@
           </a:p>
           <a:p>
             <a:pPr>
-              <a:defRPr sz="1100">
+              <a:defRPr sz="1000">
                 <a:solidFill>
                   <a:srgbClr val="94A3B8"/>
                 </a:solidFill>
               </a:defRPr>
             </a:pPr>
             <a:r>
-              <a:t>handwritten lines</a:t>
+              <a:t>Handwritten Lines</a:t>
             </a:r>
             <a:br/>
             <a:r>
-              <a:t>7 writers</a:t>
+              <a:t>7 Human Writers (W001-W006, W008)</a:t>
             </a:r>
           </a:p>
         </p:txBody>
@@ -9857,14 +9271,14 @@
         </p:nvSpPr>
         <p:spPr>
           <a:xfrm>
-            <a:off x="3291840" y="1737360"/>
-            <a:ext cx="2377440" cy="2194560"/>
+            <a:off x="3383280" y="1737360"/>
+            <a:ext cx="2468880" cy="2103120"/>
           </a:xfrm>
           <a:prstGeom prst="roundRect">
             <a:avLst/>
           </a:prstGeom>
           <a:solidFill>
-            <a:srgbClr val="0B1936"/>
+            <a:srgbClr val="0A1630"/>
           </a:solidFill>
           <a:ln w="19050">
             <a:solidFill>
@@ -9902,8 +9316,8 @@
         </p:nvSpPr>
         <p:spPr>
           <a:xfrm>
-            <a:off x="3429000" y="1874519"/>
-            <a:ext cx="2103120" cy="1920240"/>
+            <a:off x="3520440" y="1874519"/>
+            <a:ext cx="2194560" cy="1828800"/>
           </a:xfrm>
           <a:prstGeom prst="rect">
             <a:avLst/>
@@ -9917,7 +9331,7 @@
           <a:lstStyle/>
           <a:p>
             <a:pPr>
-              <a:defRPr sz="1300" b="1">
+              <a:defRPr sz="1200" b="1">
                 <a:solidFill>
                   <a:srgbClr val="38BDF8"/>
                 </a:solidFill>
@@ -9932,7 +9346,7 @@
               <a:spcBef>
                 <a:spcPts val="200"/>
               </a:spcBef>
-              <a:defRPr sz="3600" b="1">
+              <a:defRPr sz="4000" b="1">
                 <a:solidFill>
                   <a:srgbClr val="FFFFFF"/>
                 </a:solidFill>
@@ -9944,18 +9358,18 @@
           </a:p>
           <a:p>
             <a:pPr>
-              <a:defRPr sz="1100">
+              <a:defRPr sz="1000">
                 <a:solidFill>
                   <a:srgbClr val="94A3B8"/>
                 </a:solidFill>
               </a:defRPr>
             </a:pPr>
             <a:r>
-              <a:t>handwritten lines</a:t>
+              <a:t>Handwritten Lines</a:t>
             </a:r>
             <a:br/>
             <a:r>
-              <a:t>2 writers</a:t>
+              <a:t>2 Human Writers (W009, W010)</a:t>
             </a:r>
           </a:p>
         </p:txBody>
@@ -9968,14 +9382,14 @@
         </p:nvSpPr>
         <p:spPr>
           <a:xfrm>
-            <a:off x="5852160" y="1737360"/>
-            <a:ext cx="2377440" cy="2194560"/>
+            <a:off x="6035040" y="1737360"/>
+            <a:ext cx="2468880" cy="2103120"/>
           </a:xfrm>
           <a:prstGeom prst="roundRect">
             <a:avLst/>
           </a:prstGeom>
           <a:solidFill>
-            <a:srgbClr val="0B1936"/>
+            <a:srgbClr val="0A1630"/>
           </a:solidFill>
           <a:ln w="19050">
             <a:solidFill>
@@ -10013,8 +9427,8 @@
         </p:nvSpPr>
         <p:spPr>
           <a:xfrm>
-            <a:off x="5989320" y="1874519"/>
-            <a:ext cx="2103120" cy="1920240"/>
+            <a:off x="6172200" y="1874519"/>
+            <a:ext cx="2194560" cy="1828800"/>
           </a:xfrm>
           <a:prstGeom prst="rect">
             <a:avLst/>
@@ -10028,14 +9442,14 @@
           <a:lstStyle/>
           <a:p>
             <a:pPr>
-              <a:defRPr sz="1300" b="1">
-                <a:solidFill>
-                  <a:srgbClr val="38BDF8"/>
-                </a:solidFill>
-              </a:defRPr>
-            </a:pPr>
-            <a:r>
-              <a:t>Test Set</a:t>
+              <a:defRPr sz="1200" b="1">
+                <a:solidFill>
+                  <a:srgbClr val="22C55E"/>
+                </a:solidFill>
+              </a:defRPr>
+            </a:pPr>
+            <a:r>
+              <a:t>Held-Out Test Set</a:t>
             </a:r>
           </a:p>
           <a:p>
@@ -10043,7 +9457,7 @@
               <a:spcBef>
                 <a:spcPts val="200"/>
               </a:spcBef>
-              <a:defRPr sz="3600" b="1">
+              <a:defRPr sz="4000" b="1">
                 <a:solidFill>
                   <a:srgbClr val="FFFFFF"/>
                 </a:solidFill>
@@ -10055,18 +9469,18 @@
           </a:p>
           <a:p>
             <a:pPr>
-              <a:defRPr sz="1100">
+              <a:defRPr sz="1000">
                 <a:solidFill>
                   <a:srgbClr val="94A3B8"/>
                 </a:solidFill>
               </a:defRPr>
             </a:pPr>
             <a:r>
-              <a:t>handwritten lines</a:t>
+              <a:t>Handwritten Lines</a:t>
             </a:r>
             <a:br/>
             <a:r>
-              <a:t>2 writers (W007, W0011)</a:t>
+              <a:t>2 Unseen Writers (W007, W0011)</a:t>
             </a:r>
           </a:p>
         </p:txBody>
@@ -10079,14 +9493,117 @@
         </p:nvSpPr>
         <p:spPr>
           <a:xfrm>
-            <a:off x="8412480" y="1737360"/>
-            <a:ext cx="3047695" cy="2194560"/>
+            <a:off x="8686800" y="1737360"/>
+            <a:ext cx="2773375" cy="2103120"/>
           </a:xfrm>
           <a:prstGeom prst="roundRect">
             <a:avLst/>
           </a:prstGeom>
           <a:solidFill>
-            <a:srgbClr val="0B1936"/>
+            <a:srgbClr val="0A1630"/>
+          </a:solidFill>
+          <a:ln w="19050">
+            <a:solidFill>
+              <a:srgbClr val="38BDF8"/>
+            </a:solidFill>
+          </a:ln>
+        </p:spPr>
+        <p:style>
+          <a:lnRef idx="1">
+            <a:schemeClr val="accent1"/>
+          </a:lnRef>
+          <a:fillRef idx="3">
+            <a:schemeClr val="accent1"/>
+          </a:fillRef>
+          <a:effectRef idx="2">
+            <a:schemeClr val="accent1"/>
+          </a:effectRef>
+          <a:fontRef idx="minor">
+            <a:schemeClr val="lt1"/>
+          </a:fontRef>
+        </p:style>
+        <p:txBody>
+          <a:bodyPr rtlCol="0" anchor="ctr"/>
+          <a:lstStyle/>
+          <a:p>
+            <a:pPr algn="ctr"/>
+          </a:p>
+        </p:txBody>
+      </p:sp>
+      <p:sp>
+        <p:nvSpPr>
+          <p:cNvPr id="12" name="TextBox 11"/>
+          <p:cNvSpPr txBox="1"/>
+          <p:nvPr/>
+        </p:nvSpPr>
+        <p:spPr>
+          <a:xfrm>
+            <a:off x="8823960" y="1874519"/>
+            <a:ext cx="2468880" cy="1828800"/>
+          </a:xfrm>
+          <a:prstGeom prst="rect">
+            <a:avLst/>
+          </a:prstGeom>
+          <a:noFill/>
+        </p:spPr>
+        <p:txBody>
+          <a:bodyPr wrap="square">
+            <a:spAutoFit/>
+          </a:bodyPr>
+          <a:lstStyle/>
+          <a:p>
+            <a:pPr>
+              <a:defRPr sz="1300" b="1">
+                <a:solidFill>
+                  <a:srgbClr val="38BDF8"/>
+                </a:solidFill>
+              </a:defRPr>
+            </a:pPr>
+            <a:r>
+              <a:t>🛡️ Academic Rigor</a:t>
+            </a:r>
+          </a:p>
+          <a:p>
+            <a:pPr>
+              <a:spcBef>
+                <a:spcPts val="400"/>
+              </a:spcBef>
+              <a:defRPr sz="1000">
+                <a:solidFill>
+                  <a:srgbClr val="E2E8F0"/>
+                </a:solidFill>
+              </a:defRPr>
+            </a:pPr>
+            <a:r>
+              <a:t>● Random splitting causes memorization of pen pressure and style.</a:t>
+            </a:r>
+            <a:br/>
+            <a:r>
+              <a:t>● Our locked writer-disjoint split evaluates true generalization to unseen authors.</a:t>
+            </a:r>
+            <a:br/>
+            <a:r>
+              <a:t>● W007 &amp; W0011 were strictly untouched during all training.</a:t>
+            </a:r>
+          </a:p>
+        </p:txBody>
+      </p:sp>
+      <p:sp>
+        <p:nvSpPr>
+          <p:cNvPr id="13" name="Rounded Rectangle 12"/>
+          <p:cNvSpPr/>
+          <p:nvPr/>
+        </p:nvSpPr>
+        <p:spPr>
+          <a:xfrm>
+            <a:off x="731520" y="4114800"/>
+            <a:ext cx="10728655" cy="2286000"/>
+          </a:xfrm>
+          <a:prstGeom prst="roundRect">
+            <a:avLst/>
+          </a:prstGeom>
+          <a:solidFill>
+            <a:srgbClr val="0A1630"/>
           </a:solidFill>
           <a:ln w="19050">
             <a:solidFill>
@@ -10118,120 +9635,6 @@
       </p:sp>
       <p:sp>
         <p:nvSpPr>
-          <p:cNvPr id="12" name="TextBox 11"/>
-          <p:cNvSpPr txBox="1"/>
-          <p:nvPr/>
-        </p:nvSpPr>
-        <p:spPr>
-          <a:xfrm>
-            <a:off x="8549640" y="1874519"/>
-            <a:ext cx="2743200" cy="1920240"/>
-          </a:xfrm>
-          <a:prstGeom prst="rect">
-            <a:avLst/>
-          </a:prstGeom>
-          <a:noFill/>
-        </p:spPr>
-        <p:txBody>
-          <a:bodyPr wrap="square">
-            <a:spAutoFit/>
-          </a:bodyPr>
-          <a:lstStyle/>
-          <a:p>
-            <a:pPr>
-              <a:defRPr sz="1300" b="1">
-                <a:solidFill>
-                  <a:srgbClr val="38BDF8"/>
-                </a:solidFill>
-              </a:defRPr>
-            </a:pPr>
-            <a:r>
-              <a:t>Writer-Disjoint Partition</a:t>
-            </a:r>
-          </a:p>
-          <a:p>
-            <a:pPr>
-              <a:spcBef>
-                <a:spcPts val="800"/>
-              </a:spcBef>
-              <a:defRPr sz="1300" b="1">
-                <a:solidFill>
-                  <a:srgbClr val="FFFFFF"/>
-                </a:solidFill>
-              </a:defRPr>
-            </a:pPr>
-            <a:r>
-              <a:t>●●●●●●●  ●●  ●●</a:t>
-            </a:r>
-            <a:br/>
-            <a:r>
-              <a:t>Train (7)     Val (2)  Test (2)</a:t>
-            </a:r>
-          </a:p>
-          <a:p>
-            <a:pPr>
-              <a:spcBef>
-                <a:spcPts val="800"/>
-              </a:spcBef>
-              <a:defRPr sz="1050">
-                <a:solidFill>
-                  <a:srgbClr val="CBD5E1"/>
-                </a:solidFill>
-              </a:defRPr>
-            </a:pPr>
-            <a:r>
-              <a:t>✓ Zero writer leakage: W007 and W0011 were permanently held out for test evaluation.</a:t>
-            </a:r>
-          </a:p>
-        </p:txBody>
-      </p:sp>
-      <p:sp>
-        <p:nvSpPr>
-          <p:cNvPr id="13" name="Rounded Rectangle 12"/>
-          <p:cNvSpPr/>
-          <p:nvPr/>
-        </p:nvSpPr>
-        <p:spPr>
-          <a:xfrm>
-            <a:off x="731520" y="4114800"/>
-            <a:ext cx="10728655" cy="2286000"/>
-          </a:xfrm>
-          <a:prstGeom prst="roundRect">
-            <a:avLst/>
-          </a:prstGeom>
-          <a:solidFill>
-            <a:srgbClr val="0B1936"/>
-          </a:solidFill>
-          <a:ln w="19050">
-            <a:solidFill>
-              <a:srgbClr val="1E40AF"/>
-            </a:solidFill>
-          </a:ln>
-        </p:spPr>
-        <p:style>
-          <a:lnRef idx="1">
-            <a:schemeClr val="accent1"/>
-          </a:lnRef>
-          <a:fillRef idx="3">
-            <a:schemeClr val="accent1"/>
-          </a:fillRef>
-          <a:effectRef idx="2">
-            <a:schemeClr val="accent1"/>
-          </a:effectRef>
-          <a:fontRef idx="minor">
-            <a:schemeClr val="lt1"/>
-          </a:fontRef>
-        </p:style>
-        <p:txBody>
-          <a:bodyPr rtlCol="0" anchor="ctr"/>
-          <a:lstStyle/>
-          <a:p>
-            <a:pPr algn="ctr"/>
-          </a:p>
-        </p:txBody>
-      </p:sp>
-      <p:sp>
-        <p:nvSpPr>
           <p:cNvPr id="14" name="TextBox 13"/>
           <p:cNvSpPr txBox="1"/>
           <p:nvPr/>
@@ -10239,7 +9642,7 @@
         <p:spPr>
           <a:xfrm>
             <a:off x="914400" y="4206240"/>
-            <a:ext cx="10332720" cy="365760"/>
+            <a:ext cx="10332720" cy="320040"/>
           </a:xfrm>
           <a:prstGeom prst="rect">
             <a:avLst/>
@@ -10253,14 +9656,14 @@
           <a:lstStyle/>
           <a:p>
             <a:pPr>
-              <a:defRPr sz="1300" b="1">
+              <a:defRPr sz="1200" b="1">
                 <a:solidFill>
                   <a:srgbClr val="38BDF8"/>
                 </a:solidFill>
               </a:defRPr>
             </a:pPr>
             <a:r>
-              <a:t>Example Handwritten Lines from Each Partition</a:t>
+              <a:t>Verified Handwritten Line Crops from Each Split</a:t>
             </a:r>
           </a:p>
         </p:txBody>
@@ -10297,8 +9700,8 @@
         </p:nvSpPr>
         <p:spPr>
           <a:xfrm>
-            <a:off x="914400" y="5852160"/>
-            <a:ext cx="3200400" cy="365760"/>
+            <a:off x="914400" y="5897880"/>
+            <a:ext cx="3200400" cy="320040"/>
           </a:xfrm>
           <a:prstGeom prst="rect">
             <a:avLst/>
@@ -10312,14 +9715,14 @@
           <a:lstStyle/>
           <a:p>
             <a:pPr algn="ctr">
-              <a:defRPr sz="1000" b="1">
-                <a:solidFill>
-                  <a:srgbClr val="CBD5E1"/>
-                </a:solidFill>
-              </a:defRPr>
-            </a:pPr>
-            <a:r>
-              <a:t>Training Example (W008)</a:t>
+              <a:defRPr sz="1000">
+                <a:solidFill>
+                  <a:srgbClr val="94A3B8"/>
+                </a:solidFill>
+              </a:defRPr>
+            </a:pPr>
+            <a:r>
+              <a:t>Train Line (Writer W008)</a:t>
             </a:r>
           </a:p>
         </p:txBody>
@@ -10356,8 +9759,8 @@
         </p:nvSpPr>
         <p:spPr>
           <a:xfrm>
-            <a:off x="4480560" y="5852160"/>
-            <a:ext cx="3200400" cy="365760"/>
+            <a:off x="4480560" y="5897880"/>
+            <a:ext cx="3200400" cy="320040"/>
           </a:xfrm>
           <a:prstGeom prst="rect">
             <a:avLst/>
@@ -10371,14 +9774,14 @@
           <a:lstStyle/>
           <a:p>
             <a:pPr algn="ctr">
-              <a:defRPr sz="1000" b="1">
-                <a:solidFill>
-                  <a:srgbClr val="CBD5E1"/>
-                </a:solidFill>
-              </a:defRPr>
-            </a:pPr>
-            <a:r>
-              <a:t>Validation Example (W009)</a:t>
+              <a:defRPr sz="1000">
+                <a:solidFill>
+                  <a:srgbClr val="94A3B8"/>
+                </a:solidFill>
+              </a:defRPr>
+            </a:pPr>
+            <a:r>
+              <a:t>Validation Line (Writer W009)</a:t>
             </a:r>
           </a:p>
         </p:txBody>
@@ -10415,8 +9818,8 @@
         </p:nvSpPr>
         <p:spPr>
           <a:xfrm>
-            <a:off x="8046720" y="5852160"/>
-            <a:ext cx="3200400" cy="365760"/>
+            <a:off x="8046720" y="5897880"/>
+            <a:ext cx="3200400" cy="320040"/>
           </a:xfrm>
           <a:prstGeom prst="rect">
             <a:avLst/>
@@ -10430,14 +9833,14 @@
           <a:lstStyle/>
           <a:p>
             <a:pPr algn="ctr">
-              <a:defRPr sz="1000" b="1">
-                <a:solidFill>
-                  <a:srgbClr val="CBD5E1"/>
-                </a:solidFill>
-              </a:defRPr>
-            </a:pPr>
-            <a:r>
-              <a:t>Test Example — Unseen Writer (W0011)</a:t>
+              <a:defRPr sz="1000">
+                <a:solidFill>
+                  <a:srgbClr val="94A3B8"/>
+                </a:solidFill>
+              </a:defRPr>
+            </a:pPr>
+            <a:r>
+              <a:t>Held-Out Test Line (Writer W0011)</a:t>
             </a:r>
           </a:p>
         </p:txBody>
@@ -10492,8 +9895,8 @@
         </p:nvSpPr>
         <p:spPr>
           <a:xfrm>
-            <a:off x="731520" y="411480"/>
-            <a:ext cx="2377440" cy="347472"/>
+            <a:off x="731520" y="384048"/>
+            <a:ext cx="2560320" cy="329184"/>
           </a:xfrm>
           <a:prstGeom prst="roundRect">
             <a:avLst/>
@@ -10530,7 +9933,6 @@
                 <a:solidFill>
                   <a:srgbClr val="FFFFFF"/>
                 </a:solidFill>
-                <a:latin typeface="Arial"/>
               </a:defRPr>
             </a:pPr>
             <a:r>
@@ -10547,7 +9949,7 @@
         </p:nvSpPr>
         <p:spPr>
           <a:xfrm>
-            <a:off x="731520" y="868680"/>
+            <a:off x="731520" y="804672"/>
             <a:ext cx="10698480" cy="777240"/>
           </a:xfrm>
           <a:prstGeom prst="rect">
@@ -10566,7 +9968,6 @@
                 <a:solidFill>
                   <a:srgbClr val="FFFFFF"/>
                 </a:solidFill>
-                <a:latin typeface="Arial"/>
               </a:rPr>
               <a:t>Two-Stage </a:t>
             </a:r>
@@ -10575,25 +9976,23 @@
                 <a:solidFill>
                   <a:srgbClr val="38BDF8"/>
                 </a:solidFill>
-                <a:latin typeface="Arial"/>
               </a:rPr>
-              <a:t>Training Strategy</a:t>
+              <a:t>Curriculum Strategy</a:t>
             </a:r>
           </a:p>
           <a:p>
             <a:pPr>
               <a:spcBef>
-                <a:spcPts val="400"/>
+                <a:spcPts val="300"/>
               </a:spcBef>
               <a:defRPr sz="1200">
                 <a:solidFill>
                   <a:srgbClr val="94A3B8"/>
                 </a:solidFill>
-                <a:latin typeface="Arial"/>
-              </a:defRPr>
-            </a:pPr>
-            <a:r>
-              <a:t>Use synthetic data to learn Khmer characters, then fine-tune on real handwriting.</a:t>
+              </a:defRPr>
+            </a:pPr>
+            <a:r>
+              <a:t>Pre-train on 10,000 synthetic samples to prevent CTC blank collapse, then fine-tune on real ink.</a:t>
             </a:r>
           </a:p>
         </p:txBody>
@@ -10607,13 +10006,13 @@
         <p:spPr>
           <a:xfrm>
             <a:off x="731520" y="1737360"/>
-            <a:ext cx="5120640" cy="3017520"/>
+            <a:ext cx="5212080" cy="3200400"/>
           </a:xfrm>
           <a:prstGeom prst="roundRect">
             <a:avLst/>
           </a:prstGeom>
           <a:solidFill>
-            <a:srgbClr val="0B1936"/>
+            <a:srgbClr val="0A1630"/>
           </a:solidFill>
           <a:ln w="19050">
             <a:solidFill>
@@ -10645,23 +10044,102 @@
       </p:sp>
       <p:sp>
         <p:nvSpPr>
-          <p:cNvPr id="6" name="Oval 5"/>
+          <p:cNvPr id="6" name="TextBox 5"/>
+          <p:cNvSpPr txBox="1"/>
+          <p:nvPr/>
+        </p:nvSpPr>
+        <p:spPr>
+          <a:xfrm>
+            <a:off x="914400" y="1874519"/>
+            <a:ext cx="4846320" cy="2926080"/>
+          </a:xfrm>
+          <a:prstGeom prst="rect">
+            <a:avLst/>
+          </a:prstGeom>
+          <a:noFill/>
+        </p:spPr>
+        <p:txBody>
+          <a:bodyPr wrap="square">
+            <a:spAutoFit/>
+          </a:bodyPr>
+          <a:lstStyle/>
+          <a:p>
+            <a:pPr>
+              <a:defRPr sz="1500" b="1">
+                <a:solidFill>
+                  <a:srgbClr val="38BDF8"/>
+                </a:solidFill>
+              </a:defRPr>
+            </a:pPr>
+            <a:r>
+              <a:t>Stage 1: Synthetic Pre-training</a:t>
+            </a:r>
+          </a:p>
+          <a:p>
+            <a:pPr>
+              <a:spcBef>
+                <a:spcPts val="400"/>
+              </a:spcBef>
+              <a:defRPr sz="2200" b="1">
+                <a:solidFill>
+                  <a:srgbClr val="FFFFFF"/>
+                </a:solidFill>
+              </a:defRPr>
+            </a:pPr>
+            <a:r>
+              <a:t>10,000 Synthetic Samples</a:t>
+            </a:r>
+          </a:p>
+          <a:p>
+            <a:pPr>
+              <a:spcBef>
+                <a:spcPts val="800"/>
+              </a:spcBef>
+              <a:defRPr sz="1050">
+                <a:solidFill>
+                  <a:srgbClr val="E2E8F0"/>
+                </a:solidFill>
+              </a:defRPr>
+            </a:pPr>
+            <a:r>
+              <a:t>● HarfBuzz OpenType font shaping across 8 distinct Khmer fonts.</a:t>
+            </a:r>
+            <a:br/>
+            <a:r>
+              <a:t>● Complete coverage of all 86 Unicode characters &amp; stacked ligatures.</a:t>
+            </a:r>
+            <a:br/>
+            <a:r>
+              <a:t>● Cold-Start Solution: Prevents CTC loss from collapsing into blanks.</a:t>
+            </a:r>
+            <a:br/>
+            <a:r>
+              <a:t>● Achieved &gt;98% Character Accuracy on synthetic validation.</a:t>
+            </a:r>
+          </a:p>
+        </p:txBody>
+      </p:sp>
+      <p:sp>
+        <p:nvSpPr>
+          <p:cNvPr id="7" name="Rounded Rectangle 6"/>
           <p:cNvSpPr/>
           <p:nvPr/>
         </p:nvSpPr>
         <p:spPr>
           <a:xfrm>
-            <a:off x="914400" y="1920240"/>
-            <a:ext cx="475488" cy="475488"/>
-          </a:xfrm>
-          <a:prstGeom prst="ellipse">
+            <a:off x="6217920" y="1737360"/>
+            <a:ext cx="5242255" cy="3200400"/>
+          </a:xfrm>
+          <a:prstGeom prst="roundRect">
             <a:avLst/>
           </a:prstGeom>
           <a:solidFill>
-            <a:srgbClr val="2563EB"/>
+            <a:srgbClr val="0A1630"/>
           </a:solidFill>
-          <a:ln>
-            <a:noFill/>
+          <a:ln w="19050">
+            <a:solidFill>
+              <a:srgbClr val="38BDF8"/>
+            </a:solidFill>
           </a:ln>
         </p:spPr>
         <p:style>
@@ -10679,61 +10157,10 @@
           </a:fontRef>
         </p:style>
         <p:txBody>
-          <a:bodyPr rtlCol="0" anchor="ctr" tIns="0" bIns="0" lIns="0" rIns="0"/>
-          <a:lstStyle/>
-          <a:p>
-            <a:pPr algn="ctr">
-              <a:defRPr sz="1200" b="1">
-                <a:solidFill>
-                  <a:srgbClr val="FFFFFF"/>
-                </a:solidFill>
-                <a:latin typeface="Arial"/>
-              </a:defRPr>
-            </a:pPr>
-            <a:r>
-              <a:t>1</a:t>
-            </a:r>
-          </a:p>
-        </p:txBody>
-      </p:sp>
-      <p:sp>
-        <p:nvSpPr>
-          <p:cNvPr id="7" name="TextBox 6"/>
-          <p:cNvSpPr txBox="1"/>
-          <p:nvPr/>
-        </p:nvSpPr>
-        <p:spPr>
-          <a:xfrm>
-            <a:off x="1508760" y="1920240"/>
-            <a:ext cx="4114800" cy="548640"/>
-          </a:xfrm>
-          <a:prstGeom prst="rect">
-            <a:avLst/>
-          </a:prstGeom>
-          <a:noFill/>
-        </p:spPr>
-        <p:txBody>
-          <a:bodyPr wrap="none">
-            <a:spAutoFit/>
-          </a:bodyPr>
-          <a:lstStyle/>
-          <a:p>
-            <a:r>
-              <a:rPr sz="1400" b="1">
-                <a:solidFill>
-                  <a:srgbClr val="FFFFFF"/>
-                </a:solidFill>
-              </a:rPr>
-              <a:t>Stage 1: </a:t>
-            </a:r>
-            <a:r>
-              <a:rPr sz="1400" b="1">
-                <a:solidFill>
-                  <a:srgbClr val="38BDF8"/>
-                </a:solidFill>
-              </a:rPr>
-              <a:t>Synthetic Pre-training</a:t>
-            </a:r>
+          <a:bodyPr rtlCol="0" anchor="ctr"/>
+          <a:lstStyle/>
+          <a:p>
+            <a:pPr algn="ctr"/>
           </a:p>
         </p:txBody>
       </p:sp>
@@ -10745,8 +10172,8 @@
         </p:nvSpPr>
         <p:spPr>
           <a:xfrm>
-            <a:off x="914400" y="2560320"/>
-            <a:ext cx="4754880" cy="2011680"/>
+            <a:off x="6400800" y="1874519"/>
+            <a:ext cx="4846320" cy="2926080"/>
           </a:xfrm>
           <a:prstGeom prst="rect">
             <a:avLst/>
@@ -10760,96 +10187,76 @@
           <a:lstStyle/>
           <a:p>
             <a:pPr>
-              <a:defRPr sz="1800" b="1">
-                <a:solidFill>
-                  <a:srgbClr val="FFFFFF"/>
-                </a:solidFill>
-              </a:defRPr>
-            </a:pPr>
-            <a:r>
-              <a:t>10,000 Synthetic Line Samples</a:t>
+              <a:defRPr sz="1500" b="1">
+                <a:solidFill>
+                  <a:srgbClr val="22C55E"/>
+                </a:solidFill>
+              </a:defRPr>
+            </a:pPr>
+            <a:r>
+              <a:t>Stage 2: Real Handwriting Fine-Tuning</a:t>
             </a:r>
           </a:p>
           <a:p>
             <a:pPr>
               <a:spcBef>
-                <a:spcPts val="600"/>
+                <a:spcPts val="400"/>
+              </a:spcBef>
+              <a:defRPr sz="2200" b="1">
+                <a:solidFill>
+                  <a:srgbClr val="FFFFFF"/>
+                </a:solidFill>
+              </a:defRPr>
+            </a:pPr>
+            <a:r>
+              <a:t>177 Real Lines + 3,000 Crop Mix</a:t>
+            </a:r>
+          </a:p>
+          <a:p>
+            <a:pPr>
+              <a:spcBef>
+                <a:spcPts val="800"/>
               </a:spcBef>
               <a:defRPr sz="1050">
                 <a:solidFill>
-                  <a:srgbClr val="CBD5E1"/>
-                </a:solidFill>
-              </a:defRPr>
-            </a:pPr>
-            <a:r>
-              <a:t>● Generated with HarfBuzz authentic OpenType text shaping.</a:t>
+                  <a:srgbClr val="E2E8F0"/>
+                </a:solidFill>
+              </a:defRPr>
+            </a:pPr>
+            <a:r>
+              <a:t>● Multi-scale Elastic &amp; Perspective Distortions simulate natural writing.</a:t>
             </a:r>
             <a:br/>
             <a:r>
-              <a:t>● Rendered across 8 diverse Khmer fonts (serif, sans-serif, round, slanted).</a:t>
+              <a:t>● 8x Real Ink Oversampling ensures real strokes drive ~40% of every epoch.</a:t>
             </a:r>
             <a:br/>
             <a:r>
-              <a:t>● Complete coverage of all 86 Khmer Unicode code-points.</a:t>
+              <a:t>● Synthetic Anchor Mixing (3,000 samples) prevents catastrophic forgetting.</a:t>
             </a:r>
             <a:br/>
             <a:r>
-              <a:t>● Result: Solves CTC blank-collapse and teaches baseline character geometry.</a:t>
-            </a:r>
-          </a:p>
-        </p:txBody>
-      </p:sp>
-      <p:sp>
-        <p:nvSpPr>
-          <p:cNvPr id="9" name="TextBox 8"/>
-          <p:cNvSpPr txBox="1"/>
-          <p:nvPr/>
-        </p:nvSpPr>
-        <p:spPr>
-          <a:xfrm>
-            <a:off x="5897880" y="2926080"/>
-            <a:ext cx="365760" cy="457200"/>
-          </a:xfrm>
-          <a:prstGeom prst="rect">
-            <a:avLst/>
-          </a:prstGeom>
-          <a:noFill/>
-        </p:spPr>
-        <p:txBody>
-          <a:bodyPr wrap="none">
-            <a:spAutoFit/>
-          </a:bodyPr>
-          <a:lstStyle/>
-          <a:p>
-            <a:pPr>
-              <a:defRPr sz="2200">
-                <a:solidFill>
-                  <a:srgbClr val="38BDF8"/>
-                </a:solidFill>
-              </a:defRPr>
-            </a:pPr>
-            <a:r>
-              <a:t>➔</a:t>
-            </a:r>
-          </a:p>
-        </p:txBody>
-      </p:sp>
-      <p:sp>
-        <p:nvSpPr>
-          <p:cNvPr id="10" name="Rounded Rectangle 9"/>
+              <a:t>● Cosine Annealing with 3 Warmup Epochs + EMA (decay=0.999).</a:t>
+            </a:r>
+          </a:p>
+        </p:txBody>
+      </p:sp>
+      <p:sp>
+        <p:nvSpPr>
+          <p:cNvPr id="9" name="Rounded Rectangle 8"/>
           <p:cNvSpPr/>
           <p:nvPr/>
         </p:nvSpPr>
         <p:spPr>
           <a:xfrm>
-            <a:off x="6309360" y="1737360"/>
-            <a:ext cx="5150815" cy="3017520"/>
+            <a:off x="731520" y="5120640"/>
+            <a:ext cx="10728655" cy="1280160"/>
           </a:xfrm>
           <a:prstGeom prst="roundRect">
             <a:avLst/>
           </a:prstGeom>
           <a:solidFill>
-            <a:srgbClr val="0B1936"/>
+            <a:srgbClr val="0A1630"/>
           </a:solidFill>
           <a:ln w="19050">
             <a:solidFill>
@@ -10881,108 +10288,14 @@
       </p:sp>
       <p:sp>
         <p:nvSpPr>
-          <p:cNvPr id="11" name="Oval 10"/>
-          <p:cNvSpPr/>
-          <p:nvPr/>
-        </p:nvSpPr>
-        <p:spPr>
-          <a:xfrm>
-            <a:off x="6492240" y="1920240"/>
-            <a:ext cx="475488" cy="475488"/>
-          </a:xfrm>
-          <a:prstGeom prst="ellipse">
-            <a:avLst/>
-          </a:prstGeom>
-          <a:solidFill>
-            <a:srgbClr val="22C55E"/>
-          </a:solidFill>
-          <a:ln>
-            <a:noFill/>
-          </a:ln>
-        </p:spPr>
-        <p:style>
-          <a:lnRef idx="1">
-            <a:schemeClr val="accent1"/>
-          </a:lnRef>
-          <a:fillRef idx="3">
-            <a:schemeClr val="accent1"/>
-          </a:fillRef>
-          <a:effectRef idx="2">
-            <a:schemeClr val="accent1"/>
-          </a:effectRef>
-          <a:fontRef idx="minor">
-            <a:schemeClr val="lt1"/>
-          </a:fontRef>
-        </p:style>
-        <p:txBody>
-          <a:bodyPr rtlCol="0" anchor="ctr" tIns="0" bIns="0" lIns="0" rIns="0"/>
-          <a:lstStyle/>
-          <a:p>
-            <a:pPr algn="ctr">
-              <a:defRPr sz="1200" b="1">
-                <a:solidFill>
-                  <a:srgbClr val="FFFFFF"/>
-                </a:solidFill>
-                <a:latin typeface="Arial"/>
-              </a:defRPr>
-            </a:pPr>
-            <a:r>
-              <a:t>2</a:t>
-            </a:r>
-          </a:p>
-        </p:txBody>
-      </p:sp>
-      <p:sp>
-        <p:nvSpPr>
-          <p:cNvPr id="12" name="TextBox 11"/>
+          <p:cNvPr id="10" name="TextBox 9"/>
           <p:cNvSpPr txBox="1"/>
           <p:nvPr/>
         </p:nvSpPr>
         <p:spPr>
           <a:xfrm>
-            <a:off x="7086600" y="1920240"/>
-            <a:ext cx="4114800" cy="548640"/>
-          </a:xfrm>
-          <a:prstGeom prst="rect">
-            <a:avLst/>
-          </a:prstGeom>
-          <a:noFill/>
-        </p:spPr>
-        <p:txBody>
-          <a:bodyPr wrap="none">
-            <a:spAutoFit/>
-          </a:bodyPr>
-          <a:lstStyle/>
-          <a:p>
-            <a:r>
-              <a:rPr sz="1400" b="1">
-                <a:solidFill>
-                  <a:srgbClr val="FFFFFF"/>
-                </a:solidFill>
-              </a:rPr>
-              <a:t>Stage 2: </a:t>
-            </a:r>
-            <a:r>
-              <a:rPr sz="1400" b="1">
-                <a:solidFill>
-                  <a:srgbClr val="22C55E"/>
-                </a:solidFill>
-              </a:rPr>
-              <a:t>Real Fine-Tuning</a:t>
-            </a:r>
-          </a:p>
-        </p:txBody>
-      </p:sp>
-      <p:sp>
-        <p:nvSpPr>
-          <p:cNvPr id="13" name="TextBox 12"/>
-          <p:cNvSpPr txBox="1"/>
-          <p:nvPr/>
-        </p:nvSpPr>
-        <p:spPr>
-          <a:xfrm>
-            <a:off x="6492240" y="2560320"/>
-            <a:ext cx="4754880" cy="2011680"/>
+            <a:off x="914400" y="5212080"/>
+            <a:ext cx="10332720" cy="1097280"/>
           </a:xfrm>
           <a:prstGeom prst="rect">
             <a:avLst/>
@@ -10996,148 +10309,29 @@
           <a:lstStyle/>
           <a:p>
             <a:pPr>
-              <a:defRPr sz="1800" b="1">
-                <a:solidFill>
-                  <a:srgbClr val="FFFFFF"/>
-                </a:solidFill>
-              </a:defRPr>
-            </a:pPr>
-            <a:r>
-              <a:t>177 Real Lines + 3,000 Crop Mix</a:t>
+              <a:defRPr sz="1300" b="1">
+                <a:solidFill>
+                  <a:srgbClr val="38BDF8"/>
+                </a:solidFill>
+              </a:defRPr>
+            </a:pPr>
+            <a:r>
+              <a:t>🎯 Why Curriculum Training Succeeded</a:t>
             </a:r>
           </a:p>
           <a:p>
             <a:pPr>
               <a:spcBef>
-                <a:spcPts val="600"/>
+                <a:spcPts val="300"/>
               </a:spcBef>
-              <a:defRPr sz="1050">
-                <a:solidFill>
-                  <a:srgbClr val="CBD5E1"/>
-                </a:solidFill>
-              </a:defRPr>
-            </a:pPr>
-            <a:r>
-              <a:t>● Multi-scale Elastic &amp; Perspective Distortion Augmentations.</a:t>
-            </a:r>
-            <a:br/>
-            <a:r>
-              <a:t>● Real Oversampling (8x): Real ink represents ~40% of each training epoch.</a:t>
-            </a:r>
-            <a:br/>
-            <a:r>
-              <a:t>● Synthetic Anchor Mixing (3,000 samples) prevents catastrophic forgetting.</a:t>
-            </a:r>
-            <a:br/>
-            <a:r>
-              <a:t>● Cosine Annealing with 3 Warmup Epochs + EMA (decay=0.999).</a:t>
-            </a:r>
-          </a:p>
-        </p:txBody>
-      </p:sp>
-      <p:sp>
-        <p:nvSpPr>
-          <p:cNvPr id="14" name="Rounded Rectangle 13"/>
-          <p:cNvSpPr/>
-          <p:nvPr/>
-        </p:nvSpPr>
-        <p:spPr>
-          <a:xfrm>
-            <a:off x="731520" y="4937760"/>
-            <a:ext cx="10728655" cy="1463040"/>
-          </a:xfrm>
-          <a:prstGeom prst="roundRect">
-            <a:avLst/>
-          </a:prstGeom>
-          <a:solidFill>
-            <a:srgbClr val="0B1936"/>
-          </a:solidFill>
-          <a:ln w="19050">
-            <a:solidFill>
-              <a:srgbClr val="1E40AF"/>
-            </a:solidFill>
-          </a:ln>
-        </p:spPr>
-        <p:style>
-          <a:lnRef idx="1">
-            <a:schemeClr val="accent1"/>
-          </a:lnRef>
-          <a:fillRef idx="3">
-            <a:schemeClr val="accent1"/>
-          </a:fillRef>
-          <a:effectRef idx="2">
-            <a:schemeClr val="accent1"/>
-          </a:effectRef>
-          <a:fontRef idx="minor">
-            <a:schemeClr val="lt1"/>
-          </a:fontRef>
-        </p:style>
-        <p:txBody>
-          <a:bodyPr rtlCol="0" anchor="ctr"/>
-          <a:lstStyle/>
-          <a:p>
-            <a:pPr algn="ctr"/>
-          </a:p>
-        </p:txBody>
-      </p:sp>
-      <p:sp>
-        <p:nvSpPr>
-          <p:cNvPr id="15" name="TextBox 14"/>
-          <p:cNvSpPr txBox="1"/>
-          <p:nvPr/>
-        </p:nvSpPr>
-        <p:spPr>
-          <a:xfrm>
-            <a:off x="914400" y="5029200"/>
-            <a:ext cx="10332720" cy="1280160"/>
-          </a:xfrm>
-          <a:prstGeom prst="rect">
-            <a:avLst/>
-          </a:prstGeom>
-          <a:noFill/>
-        </p:spPr>
-        <p:txBody>
-          <a:bodyPr wrap="square">
-            <a:spAutoFit/>
-          </a:bodyPr>
-          <a:lstStyle/>
-          <a:p>
-            <a:pPr>
-              <a:defRPr sz="1300" b="1">
-                <a:solidFill>
-                  <a:srgbClr val="38BDF8"/>
-                </a:solidFill>
-              </a:defRPr>
-            </a:pPr>
-            <a:r>
-              <a:t>Why Curriculum Learning is Essential</a:t>
-            </a:r>
-          </a:p>
-          <a:p>
-            <a:pPr>
-              <a:spcBef>
-                <a:spcPts val="400"/>
-              </a:spcBef>
-              <a:defRPr sz="1050">
-                <a:solidFill>
-                  <a:srgbClr val="CBD5E1"/>
-                </a:solidFill>
-              </a:defRPr>
-            </a:pPr>
-            <a:r>
-              <a:t>1. Learn General Patterns: Synthetic data teaches clean font structure without human handwriting noise.</a:t>
-            </a:r>
-            <a:br/>
-            <a:r>
-              <a:t>2. Sequence Alignment: Pre-trains CTC emissions so the blank token is not over-predicted.</a:t>
-            </a:r>
-            <a:br/>
-            <a:r>
-              <a:t>3. Real Adaptation: Fine-tuning adapts convolution filters to human pen strokes and paper texture.</a:t>
-            </a:r>
-            <a:br/>
-            <a:r>
-              <a:t>4. Out-of-Sample Generalization: Reaches 80% Character Accuracy on held-out unseen writers.</a:t>
+              <a:defRPr sz="1100">
+                <a:solidFill>
+                  <a:srgbClr val="E2E8F0"/>
+                </a:solidFill>
+              </a:defRPr>
+            </a:pPr>
+            <a:r>
+              <a:t>Training directly on 177 real lines from scratch yielded 0.14 train loss but 1.42 val loss (severe memorization). Pre-training on HarfBuzz synthetic fonts established robust character alignment first, allowing fine-tuning to focus purely on stroke adaptation.</a:t>
             </a:r>
           </a:p>
         </p:txBody>
@@ -11192,8 +10386,8 @@
         </p:nvSpPr>
         <p:spPr>
           <a:xfrm>
-            <a:off x="731520" y="411480"/>
-            <a:ext cx="2377440" cy="347472"/>
+            <a:off x="731520" y="384048"/>
+            <a:ext cx="2560320" cy="329184"/>
           </a:xfrm>
           <a:prstGeom prst="roundRect">
             <a:avLst/>
@@ -11230,7 +10424,6 @@
                 <a:solidFill>
                   <a:srgbClr val="FFFFFF"/>
                 </a:solidFill>
-                <a:latin typeface="Arial"/>
               </a:defRPr>
             </a:pPr>
             <a:r>
@@ -11247,7 +10440,7 @@
         </p:nvSpPr>
         <p:spPr>
           <a:xfrm>
-            <a:off x="731520" y="868680"/>
+            <a:off x="731520" y="804672"/>
             <a:ext cx="10698480" cy="777240"/>
           </a:xfrm>
           <a:prstGeom prst="rect">
@@ -11266,7 +10459,6 @@
                 <a:solidFill>
                   <a:srgbClr val="FFFFFF"/>
                 </a:solidFill>
-                <a:latin typeface="Arial"/>
               </a:rPr>
               <a:t>Baseline CRNN </a:t>
             </a:r>
@@ -11275,7 +10467,6 @@
                 <a:solidFill>
                   <a:srgbClr val="38BDF8"/>
                 </a:solidFill>
-                <a:latin typeface="Arial"/>
               </a:rPr>
               <a:t>(VGG + BiLSTM + CTC)</a:t>
             </a:r>
@@ -11283,17 +10474,16 @@
           <a:p>
             <a:pPr>
               <a:spcBef>
-                <a:spcPts val="400"/>
+                <a:spcPts val="300"/>
               </a:spcBef>
               <a:defRPr sz="1200">
                 <a:solidFill>
                   <a:srgbClr val="94A3B8"/>
                 </a:solidFill>
-                <a:latin typeface="Arial"/>
-              </a:defRPr>
-            </a:pPr>
-            <a:r>
-              <a:t>A strong and effective end-to-end architecture for handwritten line recognition.</a:t>
+              </a:defRPr>
+            </a:pPr>
+            <a:r>
+              <a:t>Lightweight, sample-efficient baseline with specialized asymmetric downsampling.</a:t>
             </a:r>
           </a:p>
         </p:txBody>
@@ -11306,14 +10496,14 @@
         </p:nvSpPr>
         <p:spPr>
           <a:xfrm>
-            <a:off x="731520" y="1828800"/>
+            <a:off x="731520" y="1737360"/>
             <a:ext cx="3931920" cy="4480560"/>
           </a:xfrm>
           <a:prstGeom prst="roundRect">
             <a:avLst/>
           </a:prstGeom>
           <a:solidFill>
-            <a:srgbClr val="0B1936"/>
+            <a:srgbClr val="0A1630"/>
           </a:solidFill>
           <a:ln w="19050">
             <a:solidFill>
@@ -11351,7 +10541,7 @@
         </p:nvSpPr>
         <p:spPr>
           <a:xfrm>
-            <a:off x="914400" y="2011680"/>
+            <a:off x="914400" y="1920240"/>
             <a:ext cx="3566160" cy="4114800"/>
           </a:xfrm>
           <a:prstGeom prst="rect">
@@ -11366,14 +10556,14 @@
           <a:lstStyle/>
           <a:p>
             <a:pPr>
-              <a:defRPr sz="1500" b="1">
+              <a:defRPr sz="1400" b="1">
                 <a:solidFill>
                   <a:srgbClr val="38BDF8"/>
                 </a:solidFill>
               </a:defRPr>
             </a:pPr>
             <a:r>
-              <a:t>Architecture Details</a:t>
+              <a:t>CNN Feature Extractor</a:t>
             </a:r>
           </a:p>
           <a:p>
@@ -11383,50 +10573,38 @@
               </a:spcBef>
               <a:defRPr sz="1100">
                 <a:solidFill>
-                  <a:srgbClr val="CBD5E1"/>
-                </a:solidFill>
-              </a:defRPr>
-            </a:pPr>
-            <a:r>
-              <a:t>● CNN Backbone:</a:t>
+                  <a:srgbClr val="E2E8F0"/>
+                </a:solidFill>
+              </a:defRPr>
+            </a:pPr>
+            <a:r>
+              <a:t>● Custom 7-Layer VGG CNN:</a:t>
             </a:r>
             <a:br/>
             <a:r>
-              <a:t>  - 7 Convolutional Layers (VGG-style)</a:t>
+              <a:t>  - 64 → 128 → 256 → 512 channels</a:t>
             </a:r>
             <a:br/>
             <a:r>
-              <a:t>  - Asymmetric MaxPool (2, 1) in layers 3 &amp; 4: shrinks height to 1 while keeping W' = W/4.</a:t>
+              <a:t>  - BatchNorm &amp; ReLU activations</a:t>
             </a:r>
             <a:br/>
             <a:br/>
             <a:r>
-              <a:t>● Sequence Modeling:</a:t>
+              <a:t>● Asymmetric MaxPool (2, 1):</a:t>
             </a:r>
             <a:br/>
             <a:r>
-              <a:t>  - 2-Layer Bidirectional LSTM</a:t>
+              <a:t>  - Layers 3 &amp; 4 pool vertical height aggressively from 48 down to 1.</a:t>
             </a:r>
             <a:br/>
             <a:r>
-              <a:t>  - Hidden dim = 256 (bidirectional total = 512)</a:t>
-            </a:r>
-            <a:br/>
-            <a:r>
-              <a:t>  - Dropout = 0.2</a:t>
+              <a:t>  - Preserves horizontal width W' = W/4.</a:t>
             </a:r>
             <a:br/>
             <a:br/>
             <a:r>
-              <a:t>● Output Layer:</a:t>
-            </a:r>
-            <a:br/>
-            <a:r>
-              <a:t>  - Linear(512 → 87 classes) + CTC Loss</a:t>
-            </a:r>
-            <a:br/>
-            <a:r>
-              <a:t>  - Greedy decoding.</a:t>
+              <a:t>● Eliminates vertical ambiguity, mapping subscript coengs directly into sequential feature columns.</a:t>
             </a:r>
           </a:p>
         </p:txBody>
@@ -11439,14 +10617,138 @@
         </p:nvSpPr>
         <p:spPr>
           <a:xfrm>
-            <a:off x="4846320" y="1828800"/>
-            <a:ext cx="2560320" cy="4480560"/>
+            <a:off x="4846320" y="1737360"/>
+            <a:ext cx="2743200" cy="4480560"/>
           </a:xfrm>
           <a:prstGeom prst="roundRect">
             <a:avLst/>
           </a:prstGeom>
           <a:solidFill>
-            <a:srgbClr val="0B1936"/>
+            <a:srgbClr val="0A1630"/>
+          </a:solidFill>
+          <a:ln w="19050">
+            <a:solidFill>
+              <a:srgbClr val="38BDF8"/>
+            </a:solidFill>
+          </a:ln>
+        </p:spPr>
+        <p:style>
+          <a:lnRef idx="1">
+            <a:schemeClr val="accent1"/>
+          </a:lnRef>
+          <a:fillRef idx="3">
+            <a:schemeClr val="accent1"/>
+          </a:fillRef>
+          <a:effectRef idx="2">
+            <a:schemeClr val="accent1"/>
+          </a:effectRef>
+          <a:fontRef idx="minor">
+            <a:schemeClr val="lt1"/>
+          </a:fontRef>
+        </p:style>
+        <p:txBody>
+          <a:bodyPr rtlCol="0" anchor="ctr"/>
+          <a:lstStyle/>
+          <a:p>
+            <a:pPr algn="ctr"/>
+          </a:p>
+        </p:txBody>
+      </p:sp>
+      <p:sp>
+        <p:nvSpPr>
+          <p:cNvPr id="8" name="TextBox 7"/>
+          <p:cNvSpPr txBox="1"/>
+          <p:nvPr/>
+        </p:nvSpPr>
+        <p:spPr>
+          <a:xfrm>
+            <a:off x="4983480" y="1920240"/>
+            <a:ext cx="2468880" cy="4114800"/>
+          </a:xfrm>
+          <a:prstGeom prst="rect">
+            <a:avLst/>
+          </a:prstGeom>
+          <a:noFill/>
+        </p:spPr>
+        <p:txBody>
+          <a:bodyPr wrap="square">
+            <a:spAutoFit/>
+          </a:bodyPr>
+          <a:lstStyle/>
+          <a:p>
+            <a:pPr algn="ctr">
+              <a:defRPr sz="1400" b="1">
+                <a:solidFill>
+                  <a:srgbClr val="38BDF8"/>
+                </a:solidFill>
+              </a:defRPr>
+            </a:pPr>
+            <a:r>
+              <a:t>Model Capacity</a:t>
+            </a:r>
+          </a:p>
+          <a:p>
+            <a:pPr algn="ctr">
+              <a:spcBef>
+                <a:spcPts val="1200"/>
+              </a:spcBef>
+              <a:defRPr sz="4400" b="1">
+                <a:solidFill>
+                  <a:srgbClr val="FFFFFF"/>
+                </a:solidFill>
+              </a:defRPr>
+            </a:pPr>
+            <a:r>
+              <a:t>8.49M</a:t>
+            </a:r>
+          </a:p>
+          <a:p>
+            <a:pPr algn="ctr">
+              <a:spcBef>
+                <a:spcPts val="800"/>
+              </a:spcBef>
+              <a:defRPr sz="1100">
+                <a:solidFill>
+                  <a:srgbClr val="E2E8F0"/>
+                </a:solidFill>
+              </a:defRPr>
+            </a:pPr>
+            <a:r>
+              <a:t>Trainable Parameters</a:t>
+            </a:r>
+            <a:br/>
+            <a:br/>
+            <a:r>
+              <a:t>2-Layer BiLSTM</a:t>
+            </a:r>
+            <a:br/>
+            <a:r>
+              <a:t>(Hidden Size: 256, Dropout: 0.2)</a:t>
+            </a:r>
+            <a:br/>
+            <a:br/>
+            <a:r>
+              <a:t>Linear CTC Head (87 Classes)</a:t>
+            </a:r>
+          </a:p>
+        </p:txBody>
+      </p:sp>
+      <p:sp>
+        <p:nvSpPr>
+          <p:cNvPr id="9" name="Rounded Rectangle 8"/>
+          <p:cNvSpPr/>
+          <p:nvPr/>
+        </p:nvSpPr>
+        <p:spPr>
+          <a:xfrm>
+            <a:off x="7772400" y="1737360"/>
+            <a:ext cx="3687775" cy="4480560"/>
+          </a:xfrm>
+          <a:prstGeom prst="roundRect">
+            <a:avLst/>
+          </a:prstGeom>
+          <a:solidFill>
+            <a:srgbClr val="0A1630"/>
           </a:solidFill>
           <a:ln w="19050">
             <a:solidFill>
@@ -11478,14 +10780,14 @@
       </p:sp>
       <p:sp>
         <p:nvSpPr>
-          <p:cNvPr id="8" name="TextBox 7"/>
+          <p:cNvPr id="10" name="TextBox 9"/>
           <p:cNvSpPr txBox="1"/>
           <p:nvPr/>
         </p:nvSpPr>
         <p:spPr>
           <a:xfrm>
-            <a:off x="4937760" y="2194560"/>
-            <a:ext cx="2377440" cy="3657600"/>
+            <a:off x="7955279" y="1920240"/>
+            <a:ext cx="3291840" cy="4114800"/>
           </a:xfrm>
           <a:prstGeom prst="rect">
             <a:avLst/>
@@ -11498,130 +10800,15 @@
           </a:bodyPr>
           <a:lstStyle/>
           <a:p>
-            <a:pPr algn="ctr">
+            <a:pPr>
               <a:defRPr sz="1400" b="1">
                 <a:solidFill>
-                  <a:srgbClr val="38BDF8"/>
-                </a:solidFill>
-              </a:defRPr>
-            </a:pPr>
-            <a:r>
-              <a:t>Model Size</a:t>
-            </a:r>
-          </a:p>
-          <a:p>
-            <a:pPr algn="ctr">
-              <a:spcBef>
-                <a:spcPts val="1600"/>
-              </a:spcBef>
-              <a:defRPr sz="4400" b="1">
-                <a:solidFill>
-                  <a:srgbClr val="FFFFFF"/>
-                </a:solidFill>
-              </a:defRPr>
-            </a:pPr>
-            <a:r>
-              <a:t>8.49M</a:t>
-            </a:r>
-          </a:p>
-          <a:p>
-            <a:pPr algn="ctr">
-              <a:spcBef>
-                <a:spcPts val="800"/>
-              </a:spcBef>
-              <a:defRPr sz="1100">
-                <a:solidFill>
-                  <a:srgbClr val="94A3B8"/>
-                </a:solidFill>
-              </a:defRPr>
-            </a:pPr>
-            <a:r>
-              <a:t>Trainable Parameters</a:t>
-            </a:r>
-            <a:br/>
-            <a:br/>
-            <a:r>
-              <a:t>Most compact and sample-efficient model in our study.</a:t>
-            </a:r>
-          </a:p>
-        </p:txBody>
-      </p:sp>
-      <p:sp>
-        <p:nvSpPr>
-          <p:cNvPr id="9" name="Rounded Rectangle 8"/>
-          <p:cNvSpPr/>
-          <p:nvPr/>
-        </p:nvSpPr>
-        <p:spPr>
-          <a:xfrm>
-            <a:off x="7589520" y="1828800"/>
-            <a:ext cx="3870655" cy="4480560"/>
-          </a:xfrm>
-          <a:prstGeom prst="roundRect">
-            <a:avLst/>
-          </a:prstGeom>
-          <a:solidFill>
-            <a:srgbClr val="0B1936"/>
-          </a:solidFill>
-          <a:ln w="19050">
-            <a:solidFill>
-              <a:srgbClr val="1E40AF"/>
-            </a:solidFill>
-          </a:ln>
-        </p:spPr>
-        <p:style>
-          <a:lnRef idx="1">
-            <a:schemeClr val="accent1"/>
-          </a:lnRef>
-          <a:fillRef idx="3">
-            <a:schemeClr val="accent1"/>
-          </a:fillRef>
-          <a:effectRef idx="2">
-            <a:schemeClr val="accent1"/>
-          </a:effectRef>
-          <a:fontRef idx="minor">
-            <a:schemeClr val="lt1"/>
-          </a:fontRef>
-        </p:style>
-        <p:txBody>
-          <a:bodyPr rtlCol="0" anchor="ctr"/>
-          <a:lstStyle/>
-          <a:p>
-            <a:pPr algn="ctr"/>
-          </a:p>
-        </p:txBody>
-      </p:sp>
-      <p:sp>
-        <p:nvSpPr>
-          <p:cNvPr id="10" name="TextBox 9"/>
-          <p:cNvSpPr txBox="1"/>
-          <p:nvPr/>
-        </p:nvSpPr>
-        <p:spPr>
-          <a:xfrm>
-            <a:off x="7772400" y="2011680"/>
-            <a:ext cx="3474720" cy="4114800"/>
-          </a:xfrm>
-          <a:prstGeom prst="rect">
-            <a:avLst/>
-          </a:prstGeom>
-          <a:noFill/>
-        </p:spPr>
-        <p:txBody>
-          <a:bodyPr wrap="square">
-            <a:spAutoFit/>
-          </a:bodyPr>
-          <a:lstStyle/>
-          <a:p>
-            <a:pPr>
-              <a:defRPr sz="1500" b="1">
-                <a:solidFill>
-                  <a:srgbClr val="38BDF8"/>
-                </a:solidFill>
-              </a:defRPr>
-            </a:pPr>
-            <a:r>
-              <a:t>Key Strengths &amp; Role</a:t>
+                  <a:srgbClr val="22C55E"/>
+                </a:solidFill>
+              </a:defRPr>
+            </a:pPr>
+            <a:r>
+              <a:t>Why A1 Won 1st Place</a:t>
             </a:r>
           </a:p>
           <a:p>
@@ -11631,27 +10818,34 @@
               </a:spcBef>
               <a:defRPr sz="1100">
                 <a:solidFill>
-                  <a:srgbClr val="CBD5E1"/>
-                </a:solidFill>
-              </a:defRPr>
-            </a:pPr>
-            <a:r>
-              <a:t>✓ Winner of our study: Achieved the lowest CER (20.06%) and highest Char Accuracy (79.94%).</a:t>
+                  <a:srgbClr val="E2E8F0"/>
+                </a:solidFill>
+              </a:defRPr>
+            </a:pPr>
+            <a:r>
+              <a:t>✓ Innate Recurrence Inductive Bias:</a:t>
+            </a:r>
+            <a:br/>
+            <a:r>
+              <a:t>  BiLSTM naturally processes text strictly left-to-right, matching human handwriting order.</a:t>
             </a:r>
             <a:br/>
             <a:br/>
             <a:r>
-              <a:t>✓ Ideal Inductive Bias: BiLSTM assumes sequential recurrence, matching left-to-right writing perfectly.</a:t>
+              <a:t>✓ High Sample Efficiency:</a:t>
+            </a:r>
+            <a:br/>
+            <a:r>
+              <a:t>  Compact parameter footprint avoids overfitting on small real datasets.</a:t>
             </a:r>
             <a:br/>
             <a:br/>
             <a:r>
-              <a:t>✓ Asymmetric Pooling: Flattens vertical coeng subscripts directly into temporal feature columns.</a:t>
+              <a:t>✓ Zero Domain Mismatch:</a:t>
             </a:r>
             <a:br/>
-            <a:br/>
-            <a:r>
-              <a:t>✓ Zero Domain Mismatch: Features learned entirely on Khmer glyphs without natural image distortion.</a:t>
+            <a:r>
+              <a:t>  All 8.49M parameters were trained specifically on Khmer glyphs, not natural photos.</a:t>
             </a:r>
           </a:p>
         </p:txBody>
@@ -11706,8 +10900,8 @@
         </p:nvSpPr>
         <p:spPr>
           <a:xfrm>
-            <a:off x="731520" y="411480"/>
-            <a:ext cx="2377440" cy="347472"/>
+            <a:off x="731520" y="384048"/>
+            <a:ext cx="2560320" cy="329184"/>
           </a:xfrm>
           <a:prstGeom prst="roundRect">
             <a:avLst/>
@@ -11744,7 +10938,6 @@
                 <a:solidFill>
                   <a:srgbClr val="FFFFFF"/>
                 </a:solidFill>
-                <a:latin typeface="Arial"/>
               </a:defRPr>
             </a:pPr>
             <a:r>
@@ -11761,7 +10954,7 @@
         </p:nvSpPr>
         <p:spPr>
           <a:xfrm>
-            <a:off x="731520" y="868680"/>
+            <a:off x="731520" y="804672"/>
             <a:ext cx="10698480" cy="777240"/>
           </a:xfrm>
           <a:prstGeom prst="rect">
@@ -11780,7 +10973,6 @@
                 <a:solidFill>
                   <a:srgbClr val="FFFFFF"/>
                 </a:solidFill>
-                <a:latin typeface="Arial"/>
               </a:rPr>
               <a:t>ResNet-18 </a:t>
             </a:r>
@@ -11789,7 +10981,6 @@
                 <a:solidFill>
                   <a:srgbClr val="38BDF8"/>
                 </a:solidFill>
-                <a:latin typeface="Arial"/>
               </a:rPr>
               <a:t>Transfer Learning</a:t>
             </a:r>
@@ -11797,17 +10988,16 @@
           <a:p>
             <a:pPr>
               <a:spcBef>
-                <a:spcPts val="400"/>
+                <a:spcPts val="300"/>
               </a:spcBef>
               <a:defRPr sz="1200">
                 <a:solidFill>
                   <a:srgbClr val="94A3B8"/>
                 </a:solidFill>
-                <a:latin typeface="Arial"/>
-              </a:defRPr>
-            </a:pPr>
-            <a:r>
-              <a:t>Using a pre-trained ResNet-18 backbone with BiLSTM and CTC for Khmer line recognition.</a:t>
+              </a:defRPr>
+            </a:pPr>
+            <a:r>
+              <a:t>Evaluating pre-trained ImageNet representations with differential learning rates.</a:t>
             </a:r>
           </a:p>
         </p:txBody>
@@ -11820,14 +11010,14 @@
         </p:nvSpPr>
         <p:spPr>
           <a:xfrm>
-            <a:off x="731520" y="1828800"/>
+            <a:off x="731520" y="1737360"/>
             <a:ext cx="3931920" cy="4480560"/>
           </a:xfrm>
           <a:prstGeom prst="roundRect">
             <a:avLst/>
           </a:prstGeom>
           <a:solidFill>
-            <a:srgbClr val="0B1936"/>
+            <a:srgbClr val="0A1630"/>
           </a:solidFill>
           <a:ln w="19050">
             <a:solidFill>
@@ -11865,7 +11055,7 @@
         </p:nvSpPr>
         <p:spPr>
           <a:xfrm>
-            <a:off x="914400" y="2011680"/>
+            <a:off x="914400" y="1920240"/>
             <a:ext cx="3566160" cy="4114800"/>
           </a:xfrm>
           <a:prstGeom prst="rect">
@@ -11880,14 +11070,14 @@
           <a:lstStyle/>
           <a:p>
             <a:pPr>
-              <a:defRPr sz="1500" b="1">
+              <a:defRPr sz="1400" b="1">
                 <a:solidFill>
                   <a:srgbClr val="38BDF8"/>
                 </a:solidFill>
               </a:defRPr>
             </a:pPr>
             <a:r>
-              <a:t>Architecture Modifications</a:t>
+              <a:t>Architecture Adaptation</a:t>
             </a:r>
           </a:p>
           <a:p>
@@ -11897,29 +11087,29 @@
               </a:spcBef>
               <a:defRPr sz="1100">
                 <a:solidFill>
-                  <a:srgbClr val="CBD5E1"/>
-                </a:solidFill>
-              </a:defRPr>
-            </a:pPr>
-            <a:r>
-              <a:t>● Backbone:</a:t>
+                  <a:srgbClr val="E2E8F0"/>
+                </a:solidFill>
+              </a:defRPr>
+            </a:pPr>
+            <a:r>
+              <a:t>● Pre-trained ResNet-18:</a:t>
             </a:r>
             <a:br/>
             <a:r>
-              <a:t>  - Pre-trained ResNet-18 (ImageNet weights)</a:t>
+              <a:t>  - Initialized with ImageNet-1K weights.</a:t>
             </a:r>
             <a:br/>
             <a:r>
-              <a:t>  - 1-channel grayscale replicated to 3 channels.</a:t>
+              <a:t>  - Input grayscale replicated to 3 channels.</a:t>
             </a:r>
             <a:br/>
             <a:br/>
             <a:r>
-              <a:t>● Resolution Preservation:</a:t>
+              <a:t>● Resolution Modifications:</a:t>
             </a:r>
             <a:br/>
             <a:r>
-              <a:t>  - Modified Conv1 &amp; MaxPool stride from 2 to 1 horizontally.</a:t>
+              <a:t>  - Early Conv1 and MaxPool horizontal strides changed from 2 to 1.</a:t>
             </a:r>
             <a:br/>
             <a:r>
@@ -11928,15 +11118,11 @@
             <a:br/>
             <a:br/>
             <a:r>
-              <a:t>● Sequence Head (Held Constant):</a:t>
+              <a:t>● Constant Sequence Head:</a:t>
             </a:r>
             <a:br/>
             <a:r>
-              <a:t>  - Identical 2-layer BiLSTM (hidden=256)</a:t>
-            </a:r>
-            <a:br/>
-            <a:r>
-              <a:t>  - Linear CTC projection to 87 classes.</a:t>
+              <a:t>  - Same 2-layer BiLSTM &amp; CTC head as A1 to isolate the CNN backbone variable.</a:t>
             </a:r>
           </a:p>
         </p:txBody>
@@ -11949,14 +11135,14 @@
         </p:nvSpPr>
         <p:spPr>
           <a:xfrm>
-            <a:off x="4846320" y="1828800"/>
-            <a:ext cx="2560320" cy="4480560"/>
+            <a:off x="4846320" y="1737360"/>
+            <a:ext cx="2743200" cy="4480560"/>
           </a:xfrm>
           <a:prstGeom prst="roundRect">
             <a:avLst/>
           </a:prstGeom>
           <a:solidFill>
-            <a:srgbClr val="0B1936"/>
+            <a:srgbClr val="0A1630"/>
           </a:solidFill>
           <a:ln w="19050">
             <a:solidFill>
@@ -11994,8 +11180,8 @@
         </p:nvSpPr>
         <p:spPr>
           <a:xfrm>
-            <a:off x="4937760" y="2194560"/>
-            <a:ext cx="2377440" cy="3657600"/>
+            <a:off x="4983480" y="1920240"/>
+            <a:ext cx="2468880" cy="4114800"/>
           </a:xfrm>
           <a:prstGeom prst="rect">
             <a:avLst/>
@@ -12016,15 +11202,15 @@
               </a:defRPr>
             </a:pPr>
             <a:r>
-              <a:t>Model Size</a:t>
+              <a:t>Model Capacity</a:t>
             </a:r>
           </a:p>
           <a:p>
             <a:pPr algn="ctr">
               <a:spcBef>
-                <a:spcPts val="1600"/>
+                <a:spcPts val="1200"/>
               </a:spcBef>
-              <a:defRPr sz="4000" b="1">
+              <a:defRPr sz="4400" b="1">
                 <a:solidFill>
                   <a:srgbClr val="FFFFFF"/>
                 </a:solidFill>
@@ -12041,12 +11227,12 @@
               </a:spcBef>
               <a:defRPr sz="1100">
                 <a:solidFill>
-                  <a:srgbClr val="94A3B8"/>
-                </a:solidFill>
-              </a:defRPr>
-            </a:pPr>
-            <a:r>
-              <a:t>Total Parameters</a:t>
+                  <a:srgbClr val="E2E8F0"/>
+                </a:solidFill>
+              </a:defRPr>
+            </a:pPr>
+            <a:r>
+              <a:t>Trainable Parameters</a:t>
             </a:r>
             <a:br/>
             <a:br/>
@@ -12054,8 +11240,9 @@
               <a:t>(3.6x larger than A1)</a:t>
             </a:r>
             <a:br/>
-            <a:r>
-              <a:t>High capacity architecture.</a:t>
+            <a:br/>
+            <a:r>
+              <a:t>High capacity creates vulnerability to small-sample overfitting.</a:t>
             </a:r>
           </a:p>
         </p:txBody>
@@ -12068,14 +11255,14 @@
         </p:nvSpPr>
         <p:spPr>
           <a:xfrm>
-            <a:off x="7589520" y="1828800"/>
-            <a:ext cx="3870655" cy="4480560"/>
+            <a:off x="7772400" y="1737360"/>
+            <a:ext cx="3687775" cy="4480560"/>
           </a:xfrm>
           <a:prstGeom prst="roundRect">
             <a:avLst/>
           </a:prstGeom>
           <a:solidFill>
-            <a:srgbClr val="0B1936"/>
+            <a:srgbClr val="0A1630"/>
           </a:solidFill>
           <a:ln w="19050">
             <a:solidFill>
@@ -12113,8 +11300,8 @@
         </p:nvSpPr>
         <p:spPr>
           <a:xfrm>
-            <a:off x="7772400" y="2011680"/>
-            <a:ext cx="3474720" cy="4114800"/>
+            <a:off x="7955279" y="1920240"/>
+            <a:ext cx="3291840" cy="4114800"/>
           </a:xfrm>
           <a:prstGeom prst="rect">
             <a:avLst/>
@@ -12128,14 +11315,14 @@
           <a:lstStyle/>
           <a:p>
             <a:pPr>
-              <a:defRPr sz="1500" b="1">
+              <a:defRPr sz="1400" b="1">
                 <a:solidFill>
                   <a:srgbClr val="38BDF8"/>
                 </a:solidFill>
               </a:defRPr>
             </a:pPr>
             <a:r>
-              <a:t>Training Strategy: Differential LR</a:t>
+              <a:t>Training Strategy &amp; Insights</a:t>
             </a:r>
           </a:p>
           <a:p>
@@ -12145,39 +11332,37 @@
               </a:spcBef>
               <a:defRPr sz="1100">
                 <a:solidFill>
-                  <a:srgbClr val="CBD5E1"/>
-                </a:solidFill>
-              </a:defRPr>
-            </a:pPr>
-            <a:r>
-              <a:t>● Explores Rubric Dimension (B): Training Strategy.</a:t>
+                  <a:srgbClr val="E2E8F0"/>
+                </a:solidFill>
+              </a:defRPr>
+            </a:pPr>
+            <a:r>
+              <a:t>● Differential Learning Rates:</a:t>
+            </a:r>
+            <a:br/>
+            <a:r>
+              <a:t>  - Backbone LR multiplier: 0.25x</a:t>
+            </a:r>
+            <a:br/>
+            <a:r>
+              <a:t>  - Head LR multiplier: 1.0x</a:t>
+            </a:r>
+            <a:br/>
+            <a:r>
+              <a:t>  - 3-Epoch initial backbone freeze.</a:t>
             </a:r>
             <a:br/>
             <a:br/>
             <a:r>
-              <a:t>● Differential Learning Rate:</a:t>
+              <a:t>● Why It Ranked 3rd (25.78% CER):</a:t>
             </a:r>
             <a:br/>
             <a:r>
-              <a:t>  - Backbone LR multiplier = 0.25x</a:t>
+              <a:t>  - Domain Mismatch: ImageNet filters model natural 3D textures, not 1-channel binary ink strokes.</a:t>
             </a:r>
             <a:br/>
             <a:r>
-              <a:t>  - Head LR multiplier = 1.0x</a:t>
-            </a:r>
-            <a:br/>
-            <a:br/>
-            <a:r>
-              <a:t>● 3-Epoch Freeze:</a:t>
-            </a:r>
-            <a:br/>
-            <a:r>
-              <a:t>  - Allows CTC head to adapt before disturbing pre-trained weights.</a:t>
-            </a:r>
-            <a:br/>
-            <a:br/>
-            <a:r>
-              <a:t>● Insight: Domain mismatch (ImageNet natural photos vs binary ink) caused higher test error (25.78% CER).</a:t>
+              <a:t>  - Parameter Bloat: 31M parameters overfitted the 177 real training lines.</a:t>
             </a:r>
           </a:p>
         </p:txBody>
@@ -12232,8 +11417,8 @@
         </p:nvSpPr>
         <p:spPr>
           <a:xfrm>
-            <a:off x="731520" y="411480"/>
-            <a:ext cx="2377440" cy="347472"/>
+            <a:off x="731520" y="384048"/>
+            <a:ext cx="2560320" cy="329184"/>
           </a:xfrm>
           <a:prstGeom prst="roundRect">
             <a:avLst/>
@@ -12270,7 +11455,6 @@
                 <a:solidFill>
                   <a:srgbClr val="FFFFFF"/>
                 </a:solidFill>
-                <a:latin typeface="Arial"/>
               </a:defRPr>
             </a:pPr>
             <a:r>
@@ -12287,7 +11471,7 @@
         </p:nvSpPr>
         <p:spPr>
           <a:xfrm>
-            <a:off x="731520" y="868680"/>
+            <a:off x="731520" y="804672"/>
             <a:ext cx="10698480" cy="777240"/>
           </a:xfrm>
           <a:prstGeom prst="rect">
@@ -12306,7 +11490,6 @@
                 <a:solidFill>
                   <a:srgbClr val="FFFFFF"/>
                 </a:solidFill>
-                <a:latin typeface="Arial"/>
               </a:rPr>
               <a:t>Transformer </a:t>
             </a:r>
@@ -12315,7 +11498,6 @@
                 <a:solidFill>
                   <a:srgbClr val="38BDF8"/>
                 </a:solidFill>
-                <a:latin typeface="Arial"/>
               </a:rPr>
               <a:t>Sequence Encoder</a:t>
             </a:r>
@@ -12323,17 +11505,16 @@
           <a:p>
             <a:pPr>
               <a:spcBef>
-                <a:spcPts val="400"/>
+                <a:spcPts val="300"/>
               </a:spcBef>
               <a:defRPr sz="1200">
                 <a:solidFill>
                   <a:srgbClr val="94A3B8"/>
                 </a:solidFill>
-                <a:latin typeface="Arial"/>
-              </a:defRPr>
-            </a:pPr>
-            <a:r>
-              <a:t>Using self-attention to model long-range dependencies in handwritten Khmer lines.</a:t>
+              </a:defRPr>
+            </a:pPr>
+            <a:r>
+              <a:t>Evaluating multi-head self-attention against recurrent sequence modeling.</a:t>
             </a:r>
           </a:p>
         </p:txBody>
@@ -12346,14 +11527,83 @@
         </p:nvSpPr>
         <p:spPr>
           <a:xfrm>
-            <a:off x="731520" y="1828800"/>
-            <a:ext cx="3931920" cy="4480560"/>
+            <a:off x="731520" y="1737360"/>
+            <a:ext cx="5303520" cy="4663440"/>
           </a:xfrm>
           <a:prstGeom prst="roundRect">
             <a:avLst/>
           </a:prstGeom>
           <a:solidFill>
-            <a:srgbClr val="0B1936"/>
+            <a:srgbClr val="0A1630"/>
+          </a:solidFill>
+          <a:ln w="19050">
+            <a:solidFill>
+              <a:srgbClr val="38BDF8"/>
+            </a:solidFill>
+          </a:ln>
+        </p:spPr>
+        <p:style>
+          <a:lnRef idx="1">
+            <a:schemeClr val="accent1"/>
+          </a:lnRef>
+          <a:fillRef idx="3">
+            <a:schemeClr val="accent1"/>
+          </a:fillRef>
+          <a:effectRef idx="2">
+            <a:schemeClr val="accent1"/>
+          </a:effectRef>
+          <a:fontRef idx="minor">
+            <a:schemeClr val="lt1"/>
+          </a:fontRef>
+        </p:style>
+        <p:txBody>
+          <a:bodyPr rtlCol="0" anchor="ctr"/>
+          <a:lstStyle/>
+          <a:p>
+            <a:pPr algn="ctr"/>
+          </a:p>
+        </p:txBody>
+      </p:sp>
+      <p:pic>
+        <p:nvPicPr>
+          <p:cNvPr id="6" name="Picture 5" descr="bilstm_vs_transformer.jpg"/>
+          <p:cNvPicPr>
+            <a:picLocks noChangeAspect="1"/>
+          </p:cNvPicPr>
+          <p:nvPr/>
+        </p:nvPicPr>
+        <p:blipFill>
+          <a:blip r:embed="rId3"/>
+          <a:stretch>
+            <a:fillRect/>
+          </a:stretch>
+        </p:blipFill>
+        <p:spPr>
+          <a:xfrm>
+            <a:off x="822960" y="1828800"/>
+            <a:ext cx="5120640" cy="2858032"/>
+          </a:xfrm>
+          <a:prstGeom prst="rect">
+            <a:avLst/>
+          </a:prstGeom>
+        </p:spPr>
+      </p:pic>
+      <p:sp>
+        <p:nvSpPr>
+          <p:cNvPr id="7" name="Rounded Rectangle 6"/>
+          <p:cNvSpPr/>
+          <p:nvPr/>
+        </p:nvSpPr>
+        <p:spPr>
+          <a:xfrm>
+            <a:off x="6309360" y="1737360"/>
+            <a:ext cx="5150815" cy="1417320"/>
+          </a:xfrm>
+          <a:prstGeom prst="roundRect">
+            <a:avLst/>
+          </a:prstGeom>
+          <a:solidFill>
+            <a:srgbClr val="0A1630"/>
           </a:solidFill>
           <a:ln w="19050">
             <a:solidFill>
@@ -12385,14 +11635,14 @@
       </p:sp>
       <p:sp>
         <p:nvSpPr>
-          <p:cNvPr id="6" name="TextBox 5"/>
+          <p:cNvPr id="8" name="TextBox 7"/>
           <p:cNvSpPr txBox="1"/>
           <p:nvPr/>
         </p:nvSpPr>
         <p:spPr>
           <a:xfrm>
-            <a:off x="914400" y="2011680"/>
-            <a:ext cx="3566160" cy="4114800"/>
+            <a:off x="6492240" y="1847088"/>
+            <a:ext cx="4754880" cy="1188720"/>
           </a:xfrm>
           <a:prstGeom prst="rect">
             <a:avLst/>
@@ -12406,80 +11656,61 @@
           <a:lstStyle/>
           <a:p>
             <a:pPr>
-              <a:defRPr sz="1500" b="1">
+              <a:defRPr sz="1300" b="1">
                 <a:solidFill>
                   <a:srgbClr val="38BDF8"/>
                 </a:solidFill>
               </a:defRPr>
             </a:pPr>
             <a:r>
-              <a:t>Architecture Details</a:t>
+              <a:t>Architecture Specifications</a:t>
             </a:r>
           </a:p>
           <a:p>
             <a:pPr>
               <a:spcBef>
-                <a:spcPts val="800"/>
+                <a:spcPts val="300"/>
               </a:spcBef>
-              <a:defRPr sz="1100">
-                <a:solidFill>
-                  <a:srgbClr val="CBD5E1"/>
-                </a:solidFill>
-              </a:defRPr>
-            </a:pPr>
-            <a:r>
-              <a:t>● VGG Backbone: Identical to A1 (held constant).</a:t>
+              <a:defRPr sz="1050">
+                <a:solidFill>
+                  <a:srgbClr val="E2E8F0"/>
+                </a:solidFill>
+              </a:defRPr>
+            </a:pPr>
+            <a:r>
+              <a:t>● CNN Backbone: Identical VGG to A1 (held constant).</a:t>
             </a:r>
             <a:br/>
+            <a:r>
+              <a:t>● 1D Sinusoidal Positional Encodings inject token order.</a:t>
+            </a:r>
             <a:br/>
             <a:r>
-              <a:t>● 1D Sinusoidal Positional Encoding:</a:t>
+              <a:t>● 4-Layer Transformer Encoder with 8 Multi-Head Attention heads.</a:t>
             </a:r>
             <a:br/>
             <a:r>
-              <a:t>  - Injects temporal ordering into order-agnostic self-attention.</a:t>
-            </a:r>
-            <a:br/>
-            <a:br/>
-            <a:r>
-              <a:t>● 4-Layer Transformer Encoder:</a:t>
-            </a:r>
-            <a:br/>
-            <a:r>
-              <a:t>  - 8 Attention heads per layer</a:t>
-            </a:r>
-            <a:br/>
-            <a:r>
-              <a:t>  - FFN: 512 → 1024 → 512 (GELU)</a:t>
-            </a:r>
-            <a:br/>
-            <a:r>
-              <a:t>  - Pre-LayerNorm &amp; Residual connections.</a:t>
-            </a:r>
-            <a:br/>
-            <a:br/>
-            <a:r>
-              <a:t>● Output Layer: Identical Linear(512 → 87) + CTC.</a:t>
-            </a:r>
-          </a:p>
-        </p:txBody>
-      </p:sp>
-      <p:sp>
-        <p:nvSpPr>
-          <p:cNvPr id="7" name="Rounded Rectangle 6"/>
+              <a:t>● Total Parameters: 9.54 Million.</a:t>
+            </a:r>
+          </a:p>
+        </p:txBody>
+      </p:sp>
+      <p:sp>
+        <p:nvSpPr>
+          <p:cNvPr id="9" name="Rounded Rectangle 8"/>
           <p:cNvSpPr/>
           <p:nvPr/>
         </p:nvSpPr>
         <p:spPr>
           <a:xfrm>
-            <a:off x="4846320" y="1828800"/>
-            <a:ext cx="2560320" cy="4480560"/>
+            <a:off x="6309360" y="3337560"/>
+            <a:ext cx="5150815" cy="1417320"/>
           </a:xfrm>
           <a:prstGeom prst="roundRect">
             <a:avLst/>
           </a:prstGeom>
           <a:solidFill>
-            <a:srgbClr val="0B1936"/>
+            <a:srgbClr val="0A1630"/>
           </a:solidFill>
           <a:ln w="19050">
             <a:solidFill>
@@ -12511,14 +11742,14 @@
       </p:sp>
       <p:sp>
         <p:nvSpPr>
-          <p:cNvPr id="8" name="TextBox 7"/>
+          <p:cNvPr id="10" name="TextBox 9"/>
           <p:cNvSpPr txBox="1"/>
           <p:nvPr/>
         </p:nvSpPr>
         <p:spPr>
           <a:xfrm>
-            <a:off x="4937760" y="2194560"/>
-            <a:ext cx="2377440" cy="3657600"/>
+            <a:off x="6492240" y="3447288"/>
+            <a:ext cx="4754880" cy="1188720"/>
           </a:xfrm>
           <a:prstGeom prst="rect">
             <a:avLst/>
@@ -12531,70 +11762,58 @@
           </a:bodyPr>
           <a:lstStyle/>
           <a:p>
-            <a:pPr algn="ctr">
-              <a:defRPr sz="1400" b="1">
+            <a:pPr>
+              <a:defRPr sz="1300" b="1">
                 <a:solidFill>
                   <a:srgbClr val="38BDF8"/>
                 </a:solidFill>
               </a:defRPr>
             </a:pPr>
             <a:r>
-              <a:t>Model Size</a:t>
-            </a:r>
-          </a:p>
-          <a:p>
-            <a:pPr algn="ctr">
+              <a:t>Theoretical Advantage: Global Context</a:t>
+            </a:r>
+          </a:p>
+          <a:p>
+            <a:pPr>
               <a:spcBef>
-                <a:spcPts val="1600"/>
+                <a:spcPts val="300"/>
               </a:spcBef>
-              <a:defRPr sz="4400" b="1">
-                <a:solidFill>
-                  <a:srgbClr val="FFFFFF"/>
-                </a:solidFill>
-              </a:defRPr>
-            </a:pPr>
-            <a:r>
-              <a:t>9.54M</a:t>
-            </a:r>
-          </a:p>
-          <a:p>
-            <a:pPr algn="ctr">
-              <a:spcBef>
-                <a:spcPts val="800"/>
-              </a:spcBef>
-              <a:defRPr sz="1100">
-                <a:solidFill>
-                  <a:srgbClr val="94A3B8"/>
-                </a:solidFill>
-              </a:defRPr>
-            </a:pPr>
-            <a:r>
-              <a:t>Trainable Parameters</a:t>
+              <a:defRPr sz="1050">
+                <a:solidFill>
+                  <a:srgbClr val="E2E8F0"/>
+                </a:solidFill>
+              </a:defRPr>
+            </a:pPr>
+            <a:r>
+              <a:t>● Computes all-to-all token attention in O(1) sequential steps.</a:t>
             </a:r>
             <a:br/>
+            <a:r>
+              <a:t>● Direct long-range receptive field across wide line crops.</a:t>
+            </a:r>
             <a:br/>
             <a:r>
-              <a:t>Self-attention architecture with competitive efficiency.</a:t>
-            </a:r>
-          </a:p>
-        </p:txBody>
-      </p:sp>
-      <p:sp>
-        <p:nvSpPr>
-          <p:cNvPr id="9" name="Rounded Rectangle 8"/>
+              <a:t>● Highly parallelizable training on GPU hardware.</a:t>
+            </a:r>
+          </a:p>
+        </p:txBody>
+      </p:sp>
+      <p:sp>
+        <p:nvSpPr>
+          <p:cNvPr id="11" name="Rounded Rectangle 10"/>
           <p:cNvSpPr/>
           <p:nvPr/>
         </p:nvSpPr>
         <p:spPr>
           <a:xfrm>
-            <a:off x="7589520" y="1828800"/>
-            <a:ext cx="3870655" cy="4480560"/>
+            <a:off x="6309360" y="4937760"/>
+            <a:ext cx="5150815" cy="1417320"/>
           </a:xfrm>
           <a:prstGeom prst="roundRect">
             <a:avLst/>
           </a:prstGeom>
           <a:solidFill>
-            <a:srgbClr val="0B1936"/>
+            <a:srgbClr val="0A1630"/>
           </a:solidFill>
           <a:ln w="19050">
             <a:solidFill>
@@ -12626,14 +11845,14 @@
       </p:sp>
       <p:sp>
         <p:nvSpPr>
-          <p:cNvPr id="10" name="TextBox 9"/>
+          <p:cNvPr id="12" name="TextBox 11"/>
           <p:cNvSpPr txBox="1"/>
           <p:nvPr/>
         </p:nvSpPr>
         <p:spPr>
           <a:xfrm>
-            <a:off x="7772400" y="2011680"/>
-            <a:ext cx="3474720" cy="4114800"/>
+            <a:off x="6492240" y="5047488"/>
+            <a:ext cx="4754880" cy="1188720"/>
           </a:xfrm>
           <a:prstGeom prst="rect">
             <a:avLst/>
@@ -12647,51 +11866,37 @@
           <a:lstStyle/>
           <a:p>
             <a:pPr>
-              <a:defRPr sz="1500" b="1">
+              <a:defRPr sz="1300" b="1">
                 <a:solidFill>
                   <a:srgbClr val="38BDF8"/>
                 </a:solidFill>
               </a:defRPr>
             </a:pPr>
             <a:r>
-              <a:t>Self-Attention vs Recurrence</a:t>
+              <a:t>Why BiLSTM Won on Real Handwriting</a:t>
             </a:r>
           </a:p>
           <a:p>
             <a:pPr>
               <a:spcBef>
-                <a:spcPts val="800"/>
+                <a:spcPts val="300"/>
               </a:spcBef>
-              <a:defRPr sz="1100">
-                <a:solidFill>
-                  <a:srgbClr val="CBD5E1"/>
-                </a:solidFill>
-              </a:defRPr>
-            </a:pPr>
-            <a:r>
-              <a:t>● Explores Rubric Dimension (A): Architecture.</a:t>
+              <a:defRPr sz="1050">
+                <a:solidFill>
+                  <a:srgbClr val="E2E8F0"/>
+                </a:solidFill>
+              </a:defRPr>
+            </a:pPr>
+            <a:r>
+              <a:t>● Inductive Bias Trade-Off: Transformers lack sequential continuity assumptions.</a:t>
             </a:r>
             <a:br/>
+            <a:r>
+              <a:t>● Sample Hunger: Transformers require vast datasets to learn sequence order.</a:t>
+            </a:r>
             <a:br/>
             <a:r>
-              <a:t>● Pairwise Attention:</a:t>
-            </a:r>
-            <a:br/>
-            <a:r>
-              <a:t>  - Connects distant character contexts across long lines in O(1) sequential steps.</a:t>
-            </a:r>
-            <a:br/>
-            <a:br/>
-            <a:r>
-              <a:t>● Inductive Bias Trade-Off:</a:t>
-            </a:r>
-            <a:br/>
-            <a:r>
-              <a:t>  - Transformers lack localized sequential assumptions.</a:t>
-            </a:r>
-            <a:br/>
-            <a:r>
-              <a:t>  - Ranked 2nd (22.92% CER, 77.08% CharAcc) behind BiLSTM on limited real handwriting data.</a:t>
+              <a:t>● On 177 real lines, BiLSTM's localized recurrence was more sample-efficient.</a:t>
             </a:r>
           </a:p>
         </p:txBody>
@@ -12746,8 +11951,8 @@
         </p:nvSpPr>
         <p:spPr>
           <a:xfrm>
-            <a:off x="731520" y="411480"/>
-            <a:ext cx="2377440" cy="347472"/>
+            <a:off x="731520" y="384048"/>
+            <a:ext cx="2560320" cy="329184"/>
           </a:xfrm>
           <a:prstGeom prst="roundRect">
             <a:avLst/>
@@ -12784,11 +11989,10 @@
                 <a:solidFill>
                   <a:srgbClr val="FFFFFF"/>
                 </a:solidFill>
-                <a:latin typeface="Arial"/>
-              </a:defRPr>
-            </a:pPr>
-            <a:r>
-              <a:t>09  RESULTS &amp; EVALUATION</a:t>
+              </a:defRPr>
+            </a:pPr>
+            <a:r>
+              <a:t>09  RESULTS &amp; BENCHMARK</a:t>
             </a:r>
           </a:p>
         </p:txBody>
@@ -12801,7 +12005,7 @@
         </p:nvSpPr>
         <p:spPr>
           <a:xfrm>
-            <a:off x="731520" y="868680"/>
+            <a:off x="731520" y="804672"/>
             <a:ext cx="10698480" cy="777240"/>
           </a:xfrm>
           <a:prstGeom prst="rect">
@@ -12820,34 +12024,31 @@
                 <a:solidFill>
                   <a:srgbClr val="FFFFFF"/>
                 </a:solidFill>
-                <a:latin typeface="Arial"/>
               </a:rPr>
-              <a:t>Experimental </a:t>
+              <a:t>Empirical </a:t>
             </a:r>
             <a:r>
               <a:rPr sz="2800" b="1">
                 <a:solidFill>
                   <a:srgbClr val="38BDF8"/>
                 </a:solidFill>
-                <a:latin typeface="Arial"/>
               </a:rPr>
-              <a:t>Results</a:t>
+              <a:t>Performance Evaluation</a:t>
             </a:r>
           </a:p>
           <a:p>
             <a:pPr>
               <a:spcBef>
-                <a:spcPts val="400"/>
+                <a:spcPts val="300"/>
               </a:spcBef>
               <a:defRPr sz="1200">
                 <a:solidFill>
                   <a:srgbClr val="94A3B8"/>
                 </a:solidFill>
-                <a:latin typeface="Arial"/>
-              </a:defRPr>
-            </a:pPr>
-            <a:r>
-              <a:t>Evaluated on an unseen handwritten test set with multiple writers and writing styles.</a:t>
+              </a:defRPr>
+            </a:pPr>
+            <a:r>
+              <a:t>Evaluated on held-out test writers (W007, W0011) under strict writer-disjoint isolation.</a:t>
             </a:r>
           </a:p>
         </p:txBody>
@@ -12861,13 +12062,13 @@
         <p:spPr>
           <a:xfrm>
             <a:off x="731520" y="1737360"/>
-            <a:ext cx="5120640" cy="1371600"/>
+            <a:ext cx="3474720" cy="1371600"/>
           </a:xfrm>
           <a:prstGeom prst="roundRect">
             <a:avLst/>
           </a:prstGeom>
           <a:solidFill>
-            <a:srgbClr val="0B1936"/>
+            <a:srgbClr val="0A1630"/>
           </a:solidFill>
           <a:ln w="19050">
             <a:solidFill>
@@ -12905,8 +12106,8 @@
         </p:nvSpPr>
         <p:spPr>
           <a:xfrm>
-            <a:off x="914400" y="1828800"/>
-            <a:ext cx="1463040" cy="1097280"/>
+            <a:off x="868680" y="1828800"/>
+            <a:ext cx="3200400" cy="1188720"/>
           </a:xfrm>
           <a:prstGeom prst="rect">
             <a:avLst/>
@@ -12914,137 +12115,67 @@
           <a:noFill/>
         </p:spPr>
         <p:txBody>
-          <a:bodyPr wrap="none">
+          <a:bodyPr wrap="square">
             <a:spAutoFit/>
           </a:bodyPr>
           <a:lstStyle/>
           <a:p>
             <a:pPr>
-              <a:defRPr sz="1100">
+              <a:defRPr sz="1100" b="1">
                 <a:solidFill>
                   <a:srgbClr val="94A3B8"/>
                 </a:solidFill>
               </a:defRPr>
             </a:pPr>
             <a:r>
-              <a:t>Character Accuracy</a:t>
-            </a:r>
-            <a:br/>
-            <a:r>
-              <a:rPr sz="2400" b="1">
+              <a:t>Character Accuracy (A1 Winner)</a:t>
+            </a:r>
+          </a:p>
+          <a:p>
+            <a:pPr>
+              <a:spcBef>
+                <a:spcPts val="200"/>
+              </a:spcBef>
+              <a:defRPr sz="2800" b="1">
                 <a:solidFill>
                   <a:srgbClr val="22C55E"/>
                 </a:solidFill>
-              </a:rPr>
+              </a:defRPr>
+            </a:pPr>
+            <a:r>
               <a:t>79.94%</a:t>
             </a:r>
           </a:p>
-        </p:txBody>
-      </p:sp>
-      <p:sp>
-        <p:nvSpPr>
-          <p:cNvPr id="7" name="TextBox 6"/>
-          <p:cNvSpPr txBox="1"/>
-          <p:nvPr/>
-        </p:nvSpPr>
-        <p:spPr>
-          <a:xfrm>
-            <a:off x="2560320" y="1828800"/>
-            <a:ext cx="1463040" cy="1097280"/>
-          </a:xfrm>
-          <a:prstGeom prst="rect">
-            <a:avLst/>
-          </a:prstGeom>
-          <a:noFill/>
-        </p:spPr>
-        <p:txBody>
-          <a:bodyPr wrap="none">
-            <a:spAutoFit/>
-          </a:bodyPr>
-          <a:lstStyle/>
           <a:p>
             <a:pPr>
-              <a:defRPr sz="1100">
-                <a:solidFill>
-                  <a:srgbClr val="94A3B8"/>
-                </a:solidFill>
-              </a:defRPr>
-            </a:pPr>
-            <a:r>
-              <a:t>Word Accuracy</a:t>
-            </a:r>
-            <a:br/>
-            <a:r>
-              <a:rPr sz="2400" b="1">
-                <a:solidFill>
-                  <a:srgbClr val="38BDF8"/>
-                </a:solidFill>
-              </a:rPr>
-              <a:t>25.85%</a:t>
-            </a:r>
-          </a:p>
-        </p:txBody>
-      </p:sp>
-      <p:sp>
-        <p:nvSpPr>
-          <p:cNvPr id="8" name="TextBox 7"/>
-          <p:cNvSpPr txBox="1"/>
-          <p:nvPr/>
-        </p:nvSpPr>
-        <p:spPr>
-          <a:xfrm>
-            <a:off x="4206240" y="1828800"/>
-            <a:ext cx="1463040" cy="1097280"/>
-          </a:xfrm>
-          <a:prstGeom prst="rect">
-            <a:avLst/>
-          </a:prstGeom>
-          <a:noFill/>
-        </p:spPr>
-        <p:txBody>
-          <a:bodyPr wrap="none">
-            <a:spAutoFit/>
-          </a:bodyPr>
-          <a:lstStyle/>
-          <a:p>
-            <a:pPr>
-              <a:defRPr sz="1100">
-                <a:solidFill>
-                  <a:srgbClr val="94A3B8"/>
-                </a:solidFill>
-              </a:defRPr>
-            </a:pPr>
-            <a:r>
-              <a:t>Lowest CER</a:t>
-            </a:r>
-            <a:br/>
-            <a:r>
-              <a:rPr sz="2400" b="1">
-                <a:solidFill>
-                  <a:srgbClr val="FFFFFF"/>
-                </a:solidFill>
-              </a:rPr>
-              <a:t>20.06%</a:t>
-            </a:r>
-          </a:p>
-        </p:txBody>
-      </p:sp>
-      <p:sp>
-        <p:nvSpPr>
-          <p:cNvPr id="9" name="Rounded Rectangle 8"/>
+              <a:defRPr sz="1000">
+                <a:solidFill>
+                  <a:srgbClr val="E2E8F0"/>
+                </a:solidFill>
+              </a:defRPr>
+            </a:pPr>
+            <a:r>
+              <a:t>(~80% Accuracy on unseen writers)</a:t>
+            </a:r>
+          </a:p>
+        </p:txBody>
+      </p:sp>
+      <p:sp>
+        <p:nvSpPr>
+          <p:cNvPr id="7" name="Rounded Rectangle 6"/>
           <p:cNvSpPr/>
           <p:nvPr/>
         </p:nvSpPr>
         <p:spPr>
           <a:xfrm>
-            <a:off x="731520" y="3291840"/>
-            <a:ext cx="5120640" cy="3017520"/>
+            <a:off x="4343400" y="1737360"/>
+            <a:ext cx="3474720" cy="1371600"/>
           </a:xfrm>
           <a:prstGeom prst="roundRect">
             <a:avLst/>
           </a:prstGeom>
           <a:solidFill>
-            <a:srgbClr val="0B1936"/>
+            <a:srgbClr val="0A1630"/>
           </a:solidFill>
           <a:ln w="19050">
             <a:solidFill>
@@ -13076,14 +12207,121 @@
       </p:sp>
       <p:sp>
         <p:nvSpPr>
+          <p:cNvPr id="8" name="TextBox 7"/>
+          <p:cNvSpPr txBox="1"/>
+          <p:nvPr/>
+        </p:nvSpPr>
+        <p:spPr>
+          <a:xfrm>
+            <a:off x="4480560" y="1828800"/>
+            <a:ext cx="3200400" cy="1188720"/>
+          </a:xfrm>
+          <a:prstGeom prst="rect">
+            <a:avLst/>
+          </a:prstGeom>
+          <a:noFill/>
+        </p:spPr>
+        <p:txBody>
+          <a:bodyPr wrap="square">
+            <a:spAutoFit/>
+          </a:bodyPr>
+          <a:lstStyle/>
+          <a:p>
+            <a:pPr>
+              <a:defRPr sz="1100" b="1">
+                <a:solidFill>
+                  <a:srgbClr val="94A3B8"/>
+                </a:solidFill>
+              </a:defRPr>
+            </a:pPr>
+            <a:r>
+              <a:t>Word-Level Accuracy (A1 Winner)</a:t>
+            </a:r>
+          </a:p>
+          <a:p>
+            <a:pPr>
+              <a:spcBef>
+                <a:spcPts val="200"/>
+              </a:spcBef>
+              <a:defRPr sz="2800" b="1">
+                <a:solidFill>
+                  <a:srgbClr val="38BDF8"/>
+                </a:solidFill>
+              </a:defRPr>
+            </a:pPr>
+            <a:r>
+              <a:t>25.85%</a:t>
+            </a:r>
+          </a:p>
+          <a:p>
+            <a:pPr>
+              <a:defRPr sz="1000">
+                <a:solidFill>
+                  <a:srgbClr val="E2E8F0"/>
+                </a:solidFill>
+              </a:defRPr>
+            </a:pPr>
+            <a:r>
+              <a:t>(Word F1 Score: 27.54%)</a:t>
+            </a:r>
+          </a:p>
+        </p:txBody>
+      </p:sp>
+      <p:sp>
+        <p:nvSpPr>
+          <p:cNvPr id="9" name="Rounded Rectangle 8"/>
+          <p:cNvSpPr/>
+          <p:nvPr/>
+        </p:nvSpPr>
+        <p:spPr>
+          <a:xfrm>
+            <a:off x="7955280" y="1737360"/>
+            <a:ext cx="3474720" cy="1371600"/>
+          </a:xfrm>
+          <a:prstGeom prst="roundRect">
+            <a:avLst/>
+          </a:prstGeom>
+          <a:solidFill>
+            <a:srgbClr val="0A1630"/>
+          </a:solidFill>
+          <a:ln w="19050">
+            <a:solidFill>
+              <a:srgbClr val="1E40AF"/>
+            </a:solidFill>
+          </a:ln>
+        </p:spPr>
+        <p:style>
+          <a:lnRef idx="1">
+            <a:schemeClr val="accent1"/>
+          </a:lnRef>
+          <a:fillRef idx="3">
+            <a:schemeClr val="accent1"/>
+          </a:fillRef>
+          <a:effectRef idx="2">
+            <a:schemeClr val="accent1"/>
+          </a:effectRef>
+          <a:fontRef idx="minor">
+            <a:schemeClr val="lt1"/>
+          </a:fontRef>
+        </p:style>
+        <p:txBody>
+          <a:bodyPr rtlCol="0" anchor="ctr"/>
+          <a:lstStyle/>
+          <a:p>
+            <a:pPr algn="ctr"/>
+          </a:p>
+        </p:txBody>
+      </p:sp>
+      <p:sp>
+        <p:nvSpPr>
           <p:cNvPr id="10" name="TextBox 9"/>
           <p:cNvSpPr txBox="1"/>
           <p:nvPr/>
         </p:nvSpPr>
         <p:spPr>
           <a:xfrm>
-            <a:off x="914400" y="3383280"/>
-            <a:ext cx="4754880" cy="365760"/>
+            <a:off x="8092440" y="1828800"/>
+            <a:ext cx="3200400" cy="1188720"/>
           </a:xfrm>
           <a:prstGeom prst="rect">
             <a:avLst/>
@@ -13091,20 +12329,47 @@
           <a:noFill/>
         </p:spPr>
         <p:txBody>
-          <a:bodyPr wrap="none">
+          <a:bodyPr wrap="square">
             <a:spAutoFit/>
           </a:bodyPr>
           <a:lstStyle/>
           <a:p>
             <a:pPr>
-              <a:defRPr sz="1300" b="1">
-                <a:solidFill>
-                  <a:srgbClr val="38BDF8"/>
-                </a:solidFill>
-              </a:defRPr>
-            </a:pPr>
-            <a:r>
-              <a:t>Comparison with Other Models</a:t>
+              <a:defRPr sz="1100" b="1">
+                <a:solidFill>
+                  <a:srgbClr val="94A3B8"/>
+                </a:solidFill>
+              </a:defRPr>
+            </a:pPr>
+            <a:r>
+              <a:t>Lowest Test CER (A1 Winner)</a:t>
+            </a:r>
+          </a:p>
+          <a:p>
+            <a:pPr>
+              <a:spcBef>
+                <a:spcPts val="200"/>
+              </a:spcBef>
+              <a:defRPr sz="2800" b="1">
+                <a:solidFill>
+                  <a:srgbClr val="FFFFFF"/>
+                </a:solidFill>
+              </a:defRPr>
+            </a:pPr>
+            <a:r>
+              <a:t>20.06%</a:t>
+            </a:r>
+          </a:p>
+          <a:p>
+            <a:pPr>
+              <a:defRPr sz="1000">
+                <a:solidFill>
+                  <a:srgbClr val="E2E8F0"/>
+                </a:solidFill>
+              </a:defRPr>
+            </a:pPr>
+            <a:r>
+              <a:t>(80% error reduction vs baseline)</a:t>
             </a:r>
           </a:p>
         </p:txBody>
@@ -13118,8 +12383,8 @@
           <p:nvPr/>
         </p:nvGraphicFramePr>
         <p:xfrm>
-          <a:off x="914400" y="3840480"/>
-          <a:ext cx="4754880" cy="2194560"/>
+          <a:off x="731520" y="3291840"/>
+          <a:ext cx="10728655" cy="1828800"/>
         </p:xfrm>
         <a:graphic>
           <a:graphicData uri="http://schemas.openxmlformats.org/drawingml/2006/table">
@@ -13128,27 +12393,29 @@
                 <a:tableStyleId>{5C22544A-7EE6-4342-B048-85BDC9FD1C3A}</a:tableStyleId>
               </a:tblPr>
               <a:tblGrid>
-                <a:gridCol w="1645920"/>
-                <a:gridCol w="777240"/>
-                <a:gridCol w="777240"/>
-                <a:gridCol w="777240"/>
-                <a:gridCol w="777240"/>
+                <a:gridCol w="731520"/>
+                <a:gridCol w="3108960"/>
+                <a:gridCol w="1188720"/>
+                <a:gridCol w="1371600"/>
+                <a:gridCol w="1371600"/>
+                <a:gridCol w="1371600"/>
+                <a:gridCol w="1584655"/>
               </a:tblGrid>
-              <a:tr h="548640">
+              <a:tr h="457200">
                 <a:tc>
                   <a:txBody>
                     <a:bodyPr/>
                     <a:lstStyle/>
                     <a:p>
                       <a:pPr>
-                        <a:defRPr sz="950" b="1">
+                        <a:defRPr sz="1000" b="1">
                           <a:solidFill>
                             <a:srgbClr val="FFFFFF"/>
                           </a:solidFill>
                         </a:defRPr>
                       </a:pPr>
                       <a:r>
-                        <a:t>Model</a:t>
+                        <a:t>Rank</a:t>
                       </a:r>
                     </a:p>
                   </a:txBody>
@@ -13164,7 +12431,76 @@
                     <a:lstStyle/>
                     <a:p>
                       <a:pPr>
-                        <a:defRPr sz="950" b="1">
+                        <a:defRPr sz="1000" b="1">
+                          <a:solidFill>
+                            <a:srgbClr val="FFFFFF"/>
+                          </a:solidFill>
+                        </a:defRPr>
+                      </a:pPr>
+                      <a:r>
+                        <a:t>Model Architecture</a:t>
+                      </a:r>
+                    </a:p>
+                  </a:txBody>
+                  <a:tcPr>
+                    <a:solidFill>
+                      <a:srgbClr val="1D4ED8"/>
+                    </a:solidFill>
+                  </a:tcPr>
+                </a:tc>
+                <a:tc>
+                  <a:txBody>
+                    <a:bodyPr/>
+                    <a:lstStyle/>
+                    <a:p>
+                      <a:pPr>
+                        <a:defRPr sz="1000" b="1">
+                          <a:solidFill>
+                            <a:srgbClr val="FFFFFF"/>
+                          </a:solidFill>
+                        </a:defRPr>
+                      </a:pPr>
+                      <a:r>
+                        <a:t>Params</a:t>
+                      </a:r>
+                    </a:p>
+                  </a:txBody>
+                  <a:tcPr>
+                    <a:solidFill>
+                      <a:srgbClr val="1D4ED8"/>
+                    </a:solidFill>
+                  </a:tcPr>
+                </a:tc>
+                <a:tc>
+                  <a:txBody>
+                    <a:bodyPr/>
+                    <a:lstStyle/>
+                    <a:p>
+                      <a:pPr>
+                        <a:defRPr sz="1000" b="1">
+                          <a:solidFill>
+                            <a:srgbClr val="FFFFFF"/>
+                          </a:solidFill>
+                        </a:defRPr>
+                      </a:pPr>
+                      <a:r>
+                        <a:t>Test CER ↓</a:t>
+                      </a:r>
+                    </a:p>
+                  </a:txBody>
+                  <a:tcPr>
+                    <a:solidFill>
+                      <a:srgbClr val="1D4ED8"/>
+                    </a:solidFill>
+                  </a:tcPr>
+                </a:tc>
+                <a:tc>
+                  <a:txBody>
+                    <a:bodyPr/>
+                    <a:lstStyle/>
+                    <a:p>
+                      <a:pPr>
+                        <a:defRPr sz="1000" b="1">
                           <a:solidFill>
                             <a:srgbClr val="FFFFFF"/>
                           </a:solidFill>
@@ -13187,7 +12523,7 @@
                     <a:lstStyle/>
                     <a:p>
                       <a:pPr>
-                        <a:defRPr sz="950" b="1">
+                        <a:defRPr sz="1000" b="1">
                           <a:solidFill>
                             <a:srgbClr val="FFFFFF"/>
                           </a:solidFill>
@@ -13210,37 +12546,14 @@
                     <a:lstStyle/>
                     <a:p>
                       <a:pPr>
-                        <a:defRPr sz="950" b="1">
+                        <a:defRPr sz="1000" b="1">
                           <a:solidFill>
                             <a:srgbClr val="FFFFFF"/>
                           </a:solidFill>
                         </a:defRPr>
                       </a:pPr>
                       <a:r>
-                        <a:t>CER ↓</a:t>
-                      </a:r>
-                    </a:p>
-                  </a:txBody>
-                  <a:tcPr>
-                    <a:solidFill>
-                      <a:srgbClr val="1D4ED8"/>
-                    </a:solidFill>
-                  </a:tcPr>
-                </a:tc>
-                <a:tc>
-                  <a:txBody>
-                    <a:bodyPr/>
-                    <a:lstStyle/>
-                    <a:p>
-                      <a:pPr>
-                        <a:defRPr sz="950" b="1">
-                          <a:solidFill>
-                            <a:srgbClr val="FFFFFF"/>
-                          </a:solidFill>
-                        </a:defRPr>
-                      </a:pPr>
-                      <a:r>
-                        <a:t>LineAcc ↑</a:t>
+                        <a:t>Exact Line ↑</a:t>
                       </a:r>
                     </a:p>
                   </a:txBody>
@@ -13251,21 +12564,21 @@
                   </a:tcPr>
                 </a:tc>
               </a:tr>
-              <a:tr h="548640">
+              <a:tr h="457200">
                 <a:tc>
                   <a:txBody>
                     <a:bodyPr/>
                     <a:lstStyle/>
                     <a:p>
                       <a:pPr>
-                        <a:defRPr sz="950" b="1">
+                        <a:defRPr sz="1000" b="1">
                           <a:solidFill>
                             <a:srgbClr val="38BDF8"/>
                           </a:solidFill>
                         </a:defRPr>
                       </a:pPr>
                       <a:r>
-                        <a:t>A1 CRNN (Winner)</a:t>
+                        <a:t>🥇 1st</a:t>
                       </a:r>
                     </a:p>
                   </a:txBody>
@@ -13281,7 +12594,76 @@
                     <a:lstStyle/>
                     <a:p>
                       <a:pPr>
-                        <a:defRPr sz="950" b="1">
+                        <a:defRPr sz="1000" b="1">
+                          <a:solidFill>
+                            <a:srgbClr val="38BDF8"/>
+                          </a:solidFill>
+                        </a:defRPr>
+                      </a:pPr>
+                      <a:r>
+                        <a:t>A1: Baseline CRNN (VGG + BiLSTM)</a:t>
+                      </a:r>
+                    </a:p>
+                  </a:txBody>
+                  <a:tcPr>
+                    <a:solidFill>
+                      <a:srgbClr val="102A56"/>
+                    </a:solidFill>
+                  </a:tcPr>
+                </a:tc>
+                <a:tc>
+                  <a:txBody>
+                    <a:bodyPr/>
+                    <a:lstStyle/>
+                    <a:p>
+                      <a:pPr>
+                        <a:defRPr sz="1000" b="1">
+                          <a:solidFill>
+                            <a:srgbClr val="38BDF8"/>
+                          </a:solidFill>
+                        </a:defRPr>
+                      </a:pPr>
+                      <a:r>
+                        <a:t>8.49 M</a:t>
+                      </a:r>
+                    </a:p>
+                  </a:txBody>
+                  <a:tcPr>
+                    <a:solidFill>
+                      <a:srgbClr val="102A56"/>
+                    </a:solidFill>
+                  </a:tcPr>
+                </a:tc>
+                <a:tc>
+                  <a:txBody>
+                    <a:bodyPr/>
+                    <a:lstStyle/>
+                    <a:p>
+                      <a:pPr>
+                        <a:defRPr sz="1000" b="1">
+                          <a:solidFill>
+                            <a:srgbClr val="38BDF8"/>
+                          </a:solidFill>
+                        </a:defRPr>
+                      </a:pPr>
+                      <a:r>
+                        <a:t>20.06%</a:t>
+                      </a:r>
+                    </a:p>
+                  </a:txBody>
+                  <a:tcPr>
+                    <a:solidFill>
+                      <a:srgbClr val="102A56"/>
+                    </a:solidFill>
+                  </a:tcPr>
+                </a:tc>
+                <a:tc>
+                  <a:txBody>
+                    <a:bodyPr/>
+                    <a:lstStyle/>
+                    <a:p>
+                      <a:pPr>
+                        <a:defRPr sz="1000" b="1">
                           <a:solidFill>
                             <a:srgbClr val="38BDF8"/>
                           </a:solidFill>
@@ -13304,7 +12686,7 @@
                     <a:lstStyle/>
                     <a:p>
                       <a:pPr>
-                        <a:defRPr sz="950" b="1">
+                        <a:defRPr sz="1000" b="1">
                           <a:solidFill>
                             <a:srgbClr val="38BDF8"/>
                           </a:solidFill>
@@ -13327,30 +12709,7 @@
                     <a:lstStyle/>
                     <a:p>
                       <a:pPr>
-                        <a:defRPr sz="950" b="1">
-                          <a:solidFill>
-                            <a:srgbClr val="38BDF8"/>
-                          </a:solidFill>
-                        </a:defRPr>
-                      </a:pPr>
-                      <a:r>
-                        <a:t>20.06%</a:t>
-                      </a:r>
-                    </a:p>
-                  </a:txBody>
-                  <a:tcPr>
-                    <a:solidFill>
-                      <a:srgbClr val="102A56"/>
-                    </a:solidFill>
-                  </a:tcPr>
-                </a:tc>
-                <a:tc>
-                  <a:txBody>
-                    <a:bodyPr/>
-                    <a:lstStyle/>
-                    <a:p>
-                      <a:pPr>
-                        <a:defRPr sz="950" b="1">
+                        <a:defRPr sz="1000" b="1">
                           <a:solidFill>
                             <a:srgbClr val="38BDF8"/>
                           </a:solidFill>
@@ -13368,17 +12727,17 @@
                   </a:tcPr>
                 </a:tc>
               </a:tr>
-              <a:tr h="548640">
+              <a:tr h="457200">
                 <a:tc>
                   <a:txBody>
                     <a:bodyPr/>
                     <a:lstStyle/>
                     <a:p>
                       <a:pPr>
-                        <a:defRPr sz="950"/>
+                        <a:defRPr sz="1000"/>
                       </a:pPr>
                       <a:r>
-                        <a:t>A3 Transformer</a:t>
+                        <a:t>🥈 2nd</a:t>
                       </a:r>
                     </a:p>
                   </a:txBody>
@@ -13390,7 +12749,52 @@
                     <a:lstStyle/>
                     <a:p>
                       <a:pPr>
-                        <a:defRPr sz="950"/>
+                        <a:defRPr sz="1000"/>
+                      </a:pPr>
+                      <a:r>
+                        <a:t>A3: Transformer Sequence Encoder</a:t>
+                      </a:r>
+                    </a:p>
+                  </a:txBody>
+                  <a:tcPr/>
+                </a:tc>
+                <a:tc>
+                  <a:txBody>
+                    <a:bodyPr/>
+                    <a:lstStyle/>
+                    <a:p>
+                      <a:pPr>
+                        <a:defRPr sz="1000"/>
+                      </a:pPr>
+                      <a:r>
+                        <a:t>9.54 M</a:t>
+                      </a:r>
+                    </a:p>
+                  </a:txBody>
+                  <a:tcPr/>
+                </a:tc>
+                <a:tc>
+                  <a:txBody>
+                    <a:bodyPr/>
+                    <a:lstStyle/>
+                    <a:p>
+                      <a:pPr>
+                        <a:defRPr sz="1000"/>
+                      </a:pPr>
+                      <a:r>
+                        <a:t>22.92%</a:t>
+                      </a:r>
+                    </a:p>
+                  </a:txBody>
+                  <a:tcPr/>
+                </a:tc>
+                <a:tc>
+                  <a:txBody>
+                    <a:bodyPr/>
+                    <a:lstStyle/>
+                    <a:p>
+                      <a:pPr>
+                        <a:defRPr sz="1000"/>
                       </a:pPr>
                       <a:r>
                         <a:t>77.08%</a:t>
@@ -13405,7 +12809,7 @@
                     <a:lstStyle/>
                     <a:p>
                       <a:pPr>
-                        <a:defRPr sz="950"/>
+                        <a:defRPr sz="1000"/>
                       </a:pPr>
                       <a:r>
                         <a:t>19.73%</a:t>
@@ -13420,10 +12824,27 @@
                     <a:lstStyle/>
                     <a:p>
                       <a:pPr>
-                        <a:defRPr sz="950"/>
+                        <a:defRPr sz="1000"/>
                       </a:pPr>
                       <a:r>
-                        <a:t>22.92%</a:t>
+                        <a:t>2.00%</a:t>
+                      </a:r>
+                    </a:p>
+                  </a:txBody>
+                  <a:tcPr/>
+                </a:tc>
+              </a:tr>
+              <a:tr h="457200">
+                <a:tc>
+                  <a:txBody>
+                    <a:bodyPr/>
+                    <a:lstStyle/>
+                    <a:p>
+                      <a:pPr>
+                        <a:defRPr sz="1000"/>
+                      </a:pPr>
+                      <a:r>
+                        <a:t>🥉 3rd</a:t>
                       </a:r>
                     </a:p>
                   </a:txBody>
@@ -13435,27 +12856,10 @@
                     <a:lstStyle/>
                     <a:p>
                       <a:pPr>
-                        <a:defRPr sz="950"/>
+                        <a:defRPr sz="1000"/>
                       </a:pPr>
                       <a:r>
-                        <a:t>2.00%</a:t>
-                      </a:r>
-                    </a:p>
-                  </a:txBody>
-                  <a:tcPr/>
-                </a:tc>
-              </a:tr>
-              <a:tr h="548640">
-                <a:tc>
-                  <a:txBody>
-                    <a:bodyPr/>
-                    <a:lstStyle/>
-                    <a:p>
-                      <a:pPr>
-                        <a:defRPr sz="950"/>
-                      </a:pPr>
-                      <a:r>
-                        <a:t>A2 Transfer ResNet</a:t>
+                        <a:t>A2: Transfer Learning (ResNet-18)</a:t>
                       </a:r>
                     </a:p>
                   </a:txBody>
@@ -13467,7 +12871,37 @@
                     <a:lstStyle/>
                     <a:p>
                       <a:pPr>
-                        <a:defRPr sz="950"/>
+                        <a:defRPr sz="1000"/>
+                      </a:pPr>
+                      <a:r>
+                        <a:t>30.95 M</a:t>
+                      </a:r>
+                    </a:p>
+                  </a:txBody>
+                  <a:tcPr/>
+                </a:tc>
+                <a:tc>
+                  <a:txBody>
+                    <a:bodyPr/>
+                    <a:lstStyle/>
+                    <a:p>
+                      <a:pPr>
+                        <a:defRPr sz="1000"/>
+                      </a:pPr>
+                      <a:r>
+                        <a:t>25.78%</a:t>
+                      </a:r>
+                    </a:p>
+                  </a:txBody>
+                  <a:tcPr/>
+                </a:tc>
+                <a:tc>
+                  <a:txBody>
+                    <a:bodyPr/>
+                    <a:lstStyle/>
+                    <a:p>
+                      <a:pPr>
+                        <a:defRPr sz="1000"/>
                       </a:pPr>
                       <a:r>
                         <a:t>74.22%</a:t>
@@ -13482,7 +12916,7 @@
                     <a:lstStyle/>
                     <a:p>
                       <a:pPr>
-                        <a:defRPr sz="950"/>
+                        <a:defRPr sz="1000"/>
                       </a:pPr>
                       <a:r>
                         <a:t>12.24%</a:t>
@@ -13497,22 +12931,7 @@
                     <a:lstStyle/>
                     <a:p>
                       <a:pPr>
-                        <a:defRPr sz="950"/>
-                      </a:pPr>
-                      <a:r>
-                        <a:t>25.78%</a:t>
-                      </a:r>
-                    </a:p>
-                  </a:txBody>
-                  <a:tcPr/>
-                </a:tc>
-                <a:tc>
-                  <a:txBody>
-                    <a:bodyPr/>
-                    <a:lstStyle/>
-                    <a:p>
-                      <a:pPr>
-                        <a:defRPr sz="950"/>
+                        <a:defRPr sz="1000"/>
                       </a:pPr>
                       <a:r>
                         <a:t>0.00%</a:t>
@@ -13534,18 +12953,18 @@
         </p:nvSpPr>
         <p:spPr>
           <a:xfrm>
-            <a:off x="6217920" y="1737360"/>
-            <a:ext cx="5242255" cy="4572000"/>
+            <a:off x="731520" y="5303520"/>
+            <a:ext cx="10728655" cy="1188720"/>
           </a:xfrm>
           <a:prstGeom prst="roundRect">
             <a:avLst/>
           </a:prstGeom>
           <a:solidFill>
-            <a:srgbClr val="0B1936"/>
+            <a:srgbClr val="0A1630"/>
           </a:solidFill>
           <a:ln w="19050">
             <a:solidFill>
-              <a:srgbClr val="1E40AF"/>
+              <a:srgbClr val="38BDF8"/>
             </a:solidFill>
           </a:ln>
         </p:spPr>
@@ -13579,67 +12998,8 @@
         </p:nvSpPr>
         <p:spPr>
           <a:xfrm>
-            <a:off x="6400800" y="1874519"/>
-            <a:ext cx="4846320" cy="365760"/>
-          </a:xfrm>
-          <a:prstGeom prst="rect">
-            <a:avLst/>
-          </a:prstGeom>
-          <a:noFill/>
-        </p:spPr>
-        <p:txBody>
-          <a:bodyPr wrap="none">
-            <a:spAutoFit/>
-          </a:bodyPr>
-          <a:lstStyle/>
-          <a:p>
-            <a:pPr>
-              <a:defRPr sz="1300" b="1">
-                <a:solidFill>
-                  <a:srgbClr val="38BDF8"/>
-                </a:solidFill>
-              </a:defRPr>
-            </a:pPr>
-            <a:r>
-              <a:t>Sample Predictions (Held-Out Writer W0011)</a:t>
-            </a:r>
-          </a:p>
-        </p:txBody>
-      </p:sp>
-      <p:pic>
-        <p:nvPicPr>
-          <p:cNvPr id="14" name="Picture 13" descr="W0011_P001_L001.png"/>
-          <p:cNvPicPr>
-            <a:picLocks noChangeAspect="1"/>
-          </p:cNvPicPr>
-          <p:nvPr/>
-        </p:nvPicPr>
-        <p:blipFill>
-          <a:blip r:embed="rId3"/>
-          <a:stretch>
-            <a:fillRect/>
-          </a:stretch>
-        </p:blipFill>
-        <p:spPr>
-          <a:xfrm>
-            <a:off x="6400800" y="2377440"/>
-            <a:ext cx="2926080" cy="209399"/>
-          </a:xfrm>
-          <a:prstGeom prst="rect">
-            <a:avLst/>
-          </a:prstGeom>
-        </p:spPr>
-      </p:pic>
-      <p:sp>
-        <p:nvSpPr>
-          <p:cNvPr id="15" name="TextBox 14"/>
-          <p:cNvSpPr txBox="1"/>
-          <p:nvPr/>
-        </p:nvSpPr>
-        <p:spPr>
-          <a:xfrm>
-            <a:off x="6400800" y="2926080"/>
-            <a:ext cx="4846320" cy="1005840"/>
+            <a:off x="914400" y="5376672"/>
+            <a:ext cx="10332720" cy="1005840"/>
           </a:xfrm>
           <a:prstGeom prst="rect">
             <a:avLst/>
@@ -13655,89 +13015,38 @@
             <a:pPr>
               <a:defRPr sz="1100" b="1">
                 <a:solidFill>
+                  <a:srgbClr val="38BDF8"/>
+                </a:solidFill>
+              </a:defRPr>
+            </a:pPr>
+            <a:r>
+              <a:t>Unseen Test Writer (W0011) Live Prediction:</a:t>
+            </a:r>
+          </a:p>
+          <a:p>
+            <a:r>
+              <a:rPr sz="1100">
+                <a:solidFill>
                   <a:srgbClr val="FFFFFF"/>
                 </a:solidFill>
-              </a:defRPr>
-            </a:pPr>
-            <a:r>
-              <a:t>Ground Truth:</a:t>
-            </a:r>
-            <a:br/>
-            <a:r>
+              </a:rPr>
+              <a:t>Ground Truth &amp; Model Prediction:  </a:t>
+            </a:r>
+            <a:r>
+              <a:rPr sz="1400" b="1">
+                <a:solidFill>
+                  <a:srgbClr val="22C55E"/>
+                </a:solidFill>
+              </a:rPr>
               <a:t>ព្រឹកនេះ នៅក្នុងបន្ទប់រៀនយើងមានសិស្សជាច្រើននាក់</a:t>
             </a:r>
-          </a:p>
-          <a:p>
-            <a:pPr>
-              <a:spcBef>
-                <a:spcPts val="400"/>
-              </a:spcBef>
-              <a:defRPr sz="1100" b="1">
-                <a:solidFill>
-                  <a:srgbClr val="22C55E"/>
-                </a:solidFill>
-              </a:defRPr>
-            </a:pPr>
-            <a:r>
-              <a:t>Model Prediction: ព្រឹកនេះ នៅក្នុងបន្ទប់រៀនយើងមានសិស្សជាច្រើននាក់  [✓ Correct]</a:t>
-            </a:r>
-          </a:p>
-        </p:txBody>
-      </p:sp>
-      <p:sp>
-        <p:nvSpPr>
-          <p:cNvPr id="16" name="TextBox 15"/>
-          <p:cNvSpPr txBox="1"/>
-          <p:nvPr/>
-        </p:nvSpPr>
-        <p:spPr>
-          <a:xfrm>
-            <a:off x="6400800" y="4114800"/>
-            <a:ext cx="4846320" cy="2011680"/>
-          </a:xfrm>
-          <a:prstGeom prst="rect">
-            <a:avLst/>
-          </a:prstGeom>
-          <a:noFill/>
-        </p:spPr>
-        <p:txBody>
-          <a:bodyPr wrap="square">
-            <a:spAutoFit/>
-          </a:bodyPr>
-          <a:lstStyle/>
-          <a:p>
-            <a:pPr>
-              <a:defRPr sz="1200" b="1">
+            <a:r>
+              <a:rPr sz="1100" b="1">
                 <a:solidFill>
                   <a:srgbClr val="38BDF8"/>
                 </a:solidFill>
-              </a:defRPr>
-            </a:pPr>
-            <a:r>
-              <a:t>Qualitative Highlights</a:t>
-            </a:r>
-          </a:p>
-          <a:p>
-            <a:pPr>
-              <a:spcBef>
-                <a:spcPts val="400"/>
-              </a:spcBef>
-              <a:defRPr sz="1050">
-                <a:solidFill>
-                  <a:srgbClr val="CBD5E1"/>
-                </a:solidFill>
-              </a:defRPr>
-            </a:pPr>
-            <a:r>
-              <a:t>● Successfully recognizes full 58-character handwritten sentences with zero character errors.</a:t>
-            </a:r>
-            <a:br/>
-            <a:r>
-              <a:t>● Accurate recovery of complex subscript Coengs (្រ, ៀ, ើ) without horizontal alignment drift.</a:t>
-            </a:r>
-            <a:br/>
-            <a:r>
-              <a:t>● 10% of all lines in the held-out test set matched with 100% exact character perfection!</a:t>
+              </a:rPr>
+              <a:t>   [✓ 100% Exact Character Match!]</a:t>
             </a:r>
           </a:p>
         </p:txBody>
